--- a/docs/교재/통합반_오프라인/10회차/통합반_오프라인_10회차.pptx
+++ b/docs/교재/통합반_오프라인/10회차/통합반_오프라인_10회차.pptx
@@ -554,7 +554,7 @@
           <a:lstStyle/>
           <a:p>
             <a:r>
-              <a:t>앞의 두 회차에는 긴급 대응 프로세스 하나를 그려 배포하고 실행했습니다. 오늘은 그 설계를 정비와 구매 업무에 다시 쓰고, 네 개의 실습에서 두 프로세스를 직접 그려 실행합니다. 마지막에는 온톨로지에서 에이전트와 프로세스를 거쳐 시스템 실행에 이르는 과정 전체를 정리합니다. 이 네 가지를 자료 없이 자신의 말로 설명할 수 있는지가 오늘의 기준입니다.</a:t>
+              <a:t>8회차와 9회차에는 긴급 대응 프로세스 하나를 그려 배포하고 실행했습니다. 오늘은 그 설계를 정비와 구매 업무에 다시 쓰고, 네 개의 실습에서 두 프로세스를 직접 그려 실행합니다. 마지막에는 온톨로지에서 에이전트와 프로세스를 거쳐 시스템 실행에 이르는 과정 전체를 정리합니다. 이 네 가지를 자료 없이 자신의 말로 설명할 수 있는지가 오늘의 기준입니다.</a:t>
             </a:r>
           </a:p>
         </p:txBody>
@@ -1534,7 +1534,7 @@
           <a:lstStyle/>
           <a:p>
             <a:r>
-              <a:t>세 에이전트에 연결된 도구 서버의 목록입니다. 세 에이전트 모두 지식 그래프와 판단 규칙을 읽습니다. 앞 영역에서 만든 온톨로지가 긴급 대응뿐 아니라 정비와 구매의 판단에도 재료가 된다는 뜻입니다. 다른 것은 업무 데이터로, 정기 정비 계획 에이전트는 정비 쪽을, 예비품 구매 에이전트는 구매 쪽을 읽습니다. 프로세스에서 승인 블록을 다시 쓴 것처럼 지식도 여러 업무가 함께 씁니다.</a:t>
+              <a:t>세 에이전트에 연결된 도구 서버의 목록입니다. 세 에이전트 모두 지식 그래프와 판단 규칙을 읽습니다. 1~4회차에 만든 온톨로지가 긴급 대응뿐 아니라 정비와 구매의 판단에도 재료가 된다는 뜻입니다. 다른 것은 업무 데이터로, 정기 정비 계획 에이전트는 정비 쪽을, 예비품 구매 에이전트는 구매 쪽을 읽습니다. 프로세스에서 승인 블록을 다시 쓴 것처럼 지식도 여러 업무가 함께 씁니다.</a:t>
             </a:r>
           </a:p>
         </p:txBody>
@@ -1604,7 +1604,7 @@
           <a:lstStyle/>
           <a:p>
             <a:r>
-              <a:t>연결을 값 하나로 따라가 보겠습니다. 앞 회차에 조치 방법으로 적어 둔 SOP-COOL-11 팬 최대 운전이 출발점입니다. 에이전트가 이 조치를 지식 그래프에서 읽어 추천했고, 운전원이 승인했습니다. 프로세스가 승인된 조치를 팬 속도 100 % 명령으로 실행했고, 재관측에서 유온 51.3도를 확인했습니다. 지식에 적힌 한 줄이 세 영역을 지나 설비의 상태를 바꾸었습니다.</a:t>
+              <a:t>연결을 값 하나로 따라가 보겠습니다. 2회차에 조치 방법으로 적어 둔 SOP-COOL-11 팬 최대 운전이 출발점입니다. 에이전트가 이 조치를 지식 그래프에서 읽어 추천했고, 운전원이 승인했습니다. 프로세스가 승인된 조치를 팬 속도 100 % 명령으로 실행했고, 재관측에서 유온 51.3도를 확인했습니다. 지식에 적힌 한 줄이 세 영역을 지나 설비의 상태를 바꾸었습니다.</a:t>
             </a:r>
           </a:p>
         </p:txBody>
@@ -7196,7 +7196,7 @@
       </p:sp>
       <p:pic>
         <p:nvPicPr>
-          <p:cNvPr id="6" name="삽화:재고.svg" descr="illust_2419711985664982672_1791743711.png"/>
+          <p:cNvPr id="6" name="삽화:재고.svg" descr="illust_8189678603003621275_1791743711.png"/>
           <p:cNvPicPr>
             <a:picLocks noChangeAspect="1"/>
           </p:cNvPicPr>
@@ -10004,7 +10004,7 @@
       </p:sp>
       <p:pic>
         <p:nvPicPr>
-          <p:cNvPr id="6" name="삽화:세흐름_나란히.svg" descr="illust_8659158603366479997_1791743711.png"/>
+          <p:cNvPr id="6" name="삽화:세흐름_나란히.svg" descr="illust_5497331892926943611_1791743711.png"/>
           <p:cNvPicPr>
             <a:picLocks noChangeAspect="1"/>
           </p:cNvPicPr>
@@ -11490,7 +11490,7 @@
       </p:sp>
       <p:pic>
         <p:nvPicPr>
-          <p:cNvPr id="6" name="삽화:승인블록_자리.svg" descr="illust_1407692610915484264_1791743711.png"/>
+          <p:cNvPr id="6" name="삽화:승인블록_자리.svg" descr="illust_6008171743778559052_1791743711.png"/>
           <p:cNvPicPr>
             <a:picLocks noChangeAspect="1"/>
           </p:cNvPicPr>
@@ -12421,7 +12421,7 @@
       </p:sp>
       <p:pic>
         <p:nvPicPr>
-          <p:cNvPr id="6" name="삽화:흐름_정기점검.svg" descr="illust_6722734069720143242_1791743711.png"/>
+          <p:cNvPr id="6" name="삽화:흐름_정기점검.svg" descr="illust_4451205026141842994_1791743711.png"/>
           <p:cNvPicPr>
             <a:picLocks noChangeAspect="1"/>
           </p:cNvPicPr>
@@ -13310,7 +13310,7 @@
       </p:sp>
       <p:pic>
         <p:nvPicPr>
-          <p:cNvPr id="6" name="삽화:흐름_재고보충.svg" descr="illust_4441460548179220333_1791743711.png"/>
+          <p:cNvPr id="6" name="삽화:흐름_재고보충.svg" descr="illust_2470626762497736301_1791743711.png"/>
           <p:cNvPicPr>
             <a:picLocks noChangeAspect="1"/>
           </p:cNvPicPr>
@@ -22770,7 +22770,7 @@
       </p:sp>
       <p:pic>
         <p:nvPicPr>
-          <p:cNvPr id="6" name="삽화:세층연결.svg" descr="illust_3582952683975048986_1791743711.png"/>
+          <p:cNvPr id="6" name="삽화:세층연결.svg" descr="illust_5076779661510445036_1791743711.png"/>
           <p:cNvPicPr>
             <a:picLocks noChangeAspect="1"/>
           </p:cNvPicPr>
@@ -23209,7 +23209,7 @@
         </p:nvSpPr>
         <p:spPr>
           <a:xfrm>
-            <a:off x="548640" y="3063239"/>
+            <a:off x="548640" y="1600199"/>
             <a:ext cx="822960" cy="731520"/>
           </a:xfrm>
           <a:prstGeom prst="rect">
@@ -23248,7 +23248,7 @@
         </p:nvSpPr>
         <p:spPr>
           <a:xfrm>
-            <a:off x="1417319" y="3063239"/>
+            <a:off x="1417319" y="1600199"/>
             <a:ext cx="8488375" cy="731520"/>
           </a:xfrm>
           <a:prstGeom prst="rect">
@@ -23287,7 +23287,7 @@
         </p:nvSpPr>
         <p:spPr>
           <a:xfrm>
-            <a:off x="10088575" y="3282695"/>
+            <a:off x="10088575" y="1819655"/>
             <a:ext cx="1371600" cy="292608"/>
           </a:xfrm>
           <a:prstGeom prst="roundRect">
@@ -23318,7 +23318,7 @@
         </p:nvSpPr>
         <p:spPr>
           <a:xfrm>
-            <a:off x="10088575" y="3282695"/>
+            <a:off x="10088575" y="1819655"/>
             <a:ext cx="1371600" cy="292608"/>
           </a:xfrm>
           <a:prstGeom prst="rect">
@@ -23344,7 +23344,7 @@
                 <a:ea typeface="맑은 고딕"/>
                 <a:cs typeface="맑은 고딕"/>
               </a:rPr>
-              <a:t>이론 · 실습</a:t>
+              <a:t>이론</a:t>
             </a:r>
           </a:p>
         </p:txBody>
@@ -23357,7 +23357,7 @@
         </p:nvSpPr>
         <p:spPr>
           <a:xfrm>
-            <a:off x="548640" y="3785615"/>
+            <a:off x="548640" y="2322576"/>
             <a:ext cx="11094415" cy="13716"/>
           </a:xfrm>
           <a:prstGeom prst="rect">
@@ -23386,7 +23386,7 @@
         </p:nvSpPr>
         <p:spPr>
           <a:xfrm>
-            <a:off x="548640" y="3794759"/>
+            <a:off x="548640" y="2331720"/>
             <a:ext cx="822960" cy="731520"/>
           </a:xfrm>
           <a:prstGeom prst="rect">
@@ -23425,7 +23425,7 @@
         </p:nvSpPr>
         <p:spPr>
           <a:xfrm>
-            <a:off x="1417319" y="3794759"/>
+            <a:off x="1417319" y="2331720"/>
             <a:ext cx="8488375" cy="731520"/>
           </a:xfrm>
           <a:prstGeom prst="rect">
@@ -23451,7 +23451,7 @@
                 <a:ea typeface="맑은 고딕"/>
                 <a:cs typeface="맑은 고딕"/>
               </a:rPr>
-              <a:t>AI와 사람이 함께 수행하는 업무 흐름의 정리</a:t>
+              <a:t>정기 점검 프로세스 그리기</a:t>
             </a:r>
           </a:p>
         </p:txBody>
@@ -23464,7 +23464,7 @@
         </p:nvSpPr>
         <p:spPr>
           <a:xfrm>
-            <a:off x="10088575" y="4014215"/>
+            <a:off x="10088575" y="2551175"/>
             <a:ext cx="1371600" cy="292608"/>
           </a:xfrm>
           <a:prstGeom prst="roundRect">
@@ -23495,7 +23495,7 @@
         </p:nvSpPr>
         <p:spPr>
           <a:xfrm>
-            <a:off x="10088575" y="4014215"/>
+            <a:off x="10088575" y="2551175"/>
             <a:ext cx="1371600" cy="292608"/>
           </a:xfrm>
           <a:prstGeom prst="rect">
@@ -23521,6 +23521,714 @@
                 <a:ea typeface="맑은 고딕"/>
                 <a:cs typeface="맑은 고딕"/>
               </a:rPr>
+              <a:t>실습</a:t>
+            </a:r>
+          </a:p>
+        </p:txBody>
+      </p:sp>
+      <p:sp>
+        <p:nvSpPr>
+          <p:cNvPr id="13" name="Rectangle 12"/>
+          <p:cNvSpPr/>
+          <p:nvPr/>
+        </p:nvSpPr>
+        <p:spPr>
+          <a:xfrm>
+            <a:off x="548640" y="3054096"/>
+            <a:ext cx="11094415" cy="13716"/>
+          </a:xfrm>
+          <a:prstGeom prst="rect">
+            <a:avLst/>
+          </a:prstGeom>
+          <a:solidFill>
+            <a:srgbClr val="D3D9E1"/>
+          </a:solidFill>
+          <a:ln>
+            <a:noFill/>
+          </a:ln>
+        </p:spPr>
+        <p:txBody>
+          <a:bodyPr rtlCol="0" anchor="ctr"/>
+          <a:lstStyle/>
+          <a:p>
+            <a:pPr algn="ctr"/>
+          </a:p>
+        </p:txBody>
+      </p:sp>
+      <p:sp>
+        <p:nvSpPr>
+          <p:cNvPr id="14" name="TextBox 13"/>
+          <p:cNvSpPr txBox="1"/>
+          <p:nvPr/>
+        </p:nvSpPr>
+        <p:spPr>
+          <a:xfrm>
+            <a:off x="548640" y="3063239"/>
+            <a:ext cx="822960" cy="731520"/>
+          </a:xfrm>
+          <a:prstGeom prst="rect">
+            <a:avLst/>
+          </a:prstGeom>
+          <a:noFill/>
+        </p:spPr>
+        <p:txBody>
+          <a:bodyPr wrap="square" anchor="ctr"/>
+          <a:lstStyle/>
+          <a:p>
+            <a:pPr algn="l">
+              <a:lnSpc>
+                <a:spcPct val="110000"/>
+              </a:lnSpc>
+            </a:pPr>
+            <a:r>
+              <a:rPr sz="2200" b="1">
+                <a:solidFill>
+                  <a:srgbClr val="1A6FC4"/>
+                </a:solidFill>
+                <a:latin typeface="맑은 고딕"/>
+                <a:ea typeface="맑은 고딕"/>
+                <a:cs typeface="맑은 고딕"/>
+              </a:rPr>
+              <a:t>03</a:t>
+            </a:r>
+          </a:p>
+        </p:txBody>
+      </p:sp>
+      <p:sp>
+        <p:nvSpPr>
+          <p:cNvPr id="15" name="TextBox 14"/>
+          <p:cNvSpPr txBox="1"/>
+          <p:nvPr/>
+        </p:nvSpPr>
+        <p:spPr>
+          <a:xfrm>
+            <a:off x="1417319" y="3063239"/>
+            <a:ext cx="8488375" cy="731520"/>
+          </a:xfrm>
+          <a:prstGeom prst="rect">
+            <a:avLst/>
+          </a:prstGeom>
+          <a:noFill/>
+        </p:spPr>
+        <p:txBody>
+          <a:bodyPr wrap="square" anchor="ctr"/>
+          <a:lstStyle/>
+          <a:p>
+            <a:pPr algn="l">
+              <a:lnSpc>
+                <a:spcPct val="110000"/>
+              </a:lnSpc>
+            </a:pPr>
+            <a:r>
+              <a:rPr sz="1900" b="1">
+                <a:solidFill>
+                  <a:srgbClr val="13294B"/>
+                </a:solidFill>
+                <a:latin typeface="맑은 고딕"/>
+                <a:ea typeface="맑은 고딕"/>
+                <a:cs typeface="맑은 고딕"/>
+              </a:rPr>
+              <a:t>정기 점검 프로세스 실행하기</a:t>
+            </a:r>
+          </a:p>
+        </p:txBody>
+      </p:sp>
+      <p:sp>
+        <p:nvSpPr>
+          <p:cNvPr id="16" name="Rounded Rectangle 15"/>
+          <p:cNvSpPr/>
+          <p:nvPr/>
+        </p:nvSpPr>
+        <p:spPr>
+          <a:xfrm>
+            <a:off x="10088575" y="3282695"/>
+            <a:ext cx="1371600" cy="292608"/>
+          </a:xfrm>
+          <a:prstGeom prst="roundRect">
+            <a:avLst>
+              <a:gd name="adj" fmla="val 50000"/>
+            </a:avLst>
+          </a:prstGeom>
+          <a:solidFill>
+            <a:srgbClr val="D3D9E1"/>
+          </a:solidFill>
+          <a:ln>
+            <a:noFill/>
+          </a:ln>
+        </p:spPr>
+        <p:txBody>
+          <a:bodyPr rtlCol="0" anchor="ctr"/>
+          <a:lstStyle/>
+          <a:p>
+            <a:pPr algn="ctr"/>
+          </a:p>
+        </p:txBody>
+      </p:sp>
+      <p:sp>
+        <p:nvSpPr>
+          <p:cNvPr id="17" name="TextBox 16"/>
+          <p:cNvSpPr txBox="1"/>
+          <p:nvPr/>
+        </p:nvSpPr>
+        <p:spPr>
+          <a:xfrm>
+            <a:off x="10088575" y="3282695"/>
+            <a:ext cx="1371600" cy="292608"/>
+          </a:xfrm>
+          <a:prstGeom prst="rect">
+            <a:avLst/>
+          </a:prstGeom>
+          <a:noFill/>
+        </p:spPr>
+        <p:txBody>
+          <a:bodyPr wrap="square" anchor="ctr"/>
+          <a:lstStyle/>
+          <a:p>
+            <a:pPr algn="ctr">
+              <a:lnSpc>
+                <a:spcPct val="110000"/>
+              </a:lnSpc>
+            </a:pPr>
+            <a:r>
+              <a:rPr sz="1200" b="1">
+                <a:solidFill>
+                  <a:srgbClr val="13294B"/>
+                </a:solidFill>
+                <a:latin typeface="맑은 고딕"/>
+                <a:ea typeface="맑은 고딕"/>
+                <a:cs typeface="맑은 고딕"/>
+              </a:rPr>
+              <a:t>실습</a:t>
+            </a:r>
+          </a:p>
+        </p:txBody>
+      </p:sp>
+      <p:sp>
+        <p:nvSpPr>
+          <p:cNvPr id="18" name="Rectangle 17"/>
+          <p:cNvSpPr/>
+          <p:nvPr/>
+        </p:nvSpPr>
+        <p:spPr>
+          <a:xfrm>
+            <a:off x="548640" y="3785615"/>
+            <a:ext cx="11094415" cy="13716"/>
+          </a:xfrm>
+          <a:prstGeom prst="rect">
+            <a:avLst/>
+          </a:prstGeom>
+          <a:solidFill>
+            <a:srgbClr val="D3D9E1"/>
+          </a:solidFill>
+          <a:ln>
+            <a:noFill/>
+          </a:ln>
+        </p:spPr>
+        <p:txBody>
+          <a:bodyPr rtlCol="0" anchor="ctr"/>
+          <a:lstStyle/>
+          <a:p>
+            <a:pPr algn="ctr"/>
+          </a:p>
+        </p:txBody>
+      </p:sp>
+      <p:sp>
+        <p:nvSpPr>
+          <p:cNvPr id="19" name="TextBox 18"/>
+          <p:cNvSpPr txBox="1"/>
+          <p:nvPr/>
+        </p:nvSpPr>
+        <p:spPr>
+          <a:xfrm>
+            <a:off x="548640" y="3794760"/>
+            <a:ext cx="822960" cy="731520"/>
+          </a:xfrm>
+          <a:prstGeom prst="rect">
+            <a:avLst/>
+          </a:prstGeom>
+          <a:noFill/>
+        </p:spPr>
+        <p:txBody>
+          <a:bodyPr wrap="square" anchor="ctr"/>
+          <a:lstStyle/>
+          <a:p>
+            <a:pPr algn="l">
+              <a:lnSpc>
+                <a:spcPct val="110000"/>
+              </a:lnSpc>
+            </a:pPr>
+            <a:r>
+              <a:rPr sz="2200" b="1">
+                <a:solidFill>
+                  <a:srgbClr val="1A6FC4"/>
+                </a:solidFill>
+                <a:latin typeface="맑은 고딕"/>
+                <a:ea typeface="맑은 고딕"/>
+                <a:cs typeface="맑은 고딕"/>
+              </a:rPr>
+              <a:t>04</a:t>
+            </a:r>
+          </a:p>
+        </p:txBody>
+      </p:sp>
+      <p:sp>
+        <p:nvSpPr>
+          <p:cNvPr id="20" name="TextBox 19"/>
+          <p:cNvSpPr txBox="1"/>
+          <p:nvPr/>
+        </p:nvSpPr>
+        <p:spPr>
+          <a:xfrm>
+            <a:off x="1417319" y="3794760"/>
+            <a:ext cx="8488375" cy="731520"/>
+          </a:xfrm>
+          <a:prstGeom prst="rect">
+            <a:avLst/>
+          </a:prstGeom>
+          <a:noFill/>
+        </p:spPr>
+        <p:txBody>
+          <a:bodyPr wrap="square" anchor="ctr"/>
+          <a:lstStyle/>
+          <a:p>
+            <a:pPr algn="l">
+              <a:lnSpc>
+                <a:spcPct val="110000"/>
+              </a:lnSpc>
+            </a:pPr>
+            <a:r>
+              <a:rPr sz="1900" b="1">
+                <a:solidFill>
+                  <a:srgbClr val="13294B"/>
+                </a:solidFill>
+                <a:latin typeface="맑은 고딕"/>
+                <a:ea typeface="맑은 고딕"/>
+                <a:cs typeface="맑은 고딕"/>
+              </a:rPr>
+              <a:t>재고 보충 프로세스 그리기</a:t>
+            </a:r>
+          </a:p>
+        </p:txBody>
+      </p:sp>
+      <p:sp>
+        <p:nvSpPr>
+          <p:cNvPr id="21" name="Rounded Rectangle 20"/>
+          <p:cNvSpPr/>
+          <p:nvPr/>
+        </p:nvSpPr>
+        <p:spPr>
+          <a:xfrm>
+            <a:off x="10088575" y="4014216"/>
+            <a:ext cx="1371600" cy="292608"/>
+          </a:xfrm>
+          <a:prstGeom prst="roundRect">
+            <a:avLst>
+              <a:gd name="adj" fmla="val 50000"/>
+            </a:avLst>
+          </a:prstGeom>
+          <a:solidFill>
+            <a:srgbClr val="D3D9E1"/>
+          </a:solidFill>
+          <a:ln>
+            <a:noFill/>
+          </a:ln>
+        </p:spPr>
+        <p:txBody>
+          <a:bodyPr rtlCol="0" anchor="ctr"/>
+          <a:lstStyle/>
+          <a:p>
+            <a:pPr algn="ctr"/>
+          </a:p>
+        </p:txBody>
+      </p:sp>
+      <p:sp>
+        <p:nvSpPr>
+          <p:cNvPr id="22" name="TextBox 21"/>
+          <p:cNvSpPr txBox="1"/>
+          <p:nvPr/>
+        </p:nvSpPr>
+        <p:spPr>
+          <a:xfrm>
+            <a:off x="10088575" y="4014216"/>
+            <a:ext cx="1371600" cy="292608"/>
+          </a:xfrm>
+          <a:prstGeom prst="rect">
+            <a:avLst/>
+          </a:prstGeom>
+          <a:noFill/>
+        </p:spPr>
+        <p:txBody>
+          <a:bodyPr wrap="square" anchor="ctr"/>
+          <a:lstStyle/>
+          <a:p>
+            <a:pPr algn="ctr">
+              <a:lnSpc>
+                <a:spcPct val="110000"/>
+              </a:lnSpc>
+            </a:pPr>
+            <a:r>
+              <a:rPr sz="1200" b="1">
+                <a:solidFill>
+                  <a:srgbClr val="13294B"/>
+                </a:solidFill>
+                <a:latin typeface="맑은 고딕"/>
+                <a:ea typeface="맑은 고딕"/>
+                <a:cs typeface="맑은 고딕"/>
+              </a:rPr>
+              <a:t>실습</a:t>
+            </a:r>
+          </a:p>
+        </p:txBody>
+      </p:sp>
+      <p:sp>
+        <p:nvSpPr>
+          <p:cNvPr id="23" name="Rectangle 22"/>
+          <p:cNvSpPr/>
+          <p:nvPr/>
+        </p:nvSpPr>
+        <p:spPr>
+          <a:xfrm>
+            <a:off x="548640" y="4517136"/>
+            <a:ext cx="11094415" cy="13716"/>
+          </a:xfrm>
+          <a:prstGeom prst="rect">
+            <a:avLst/>
+          </a:prstGeom>
+          <a:solidFill>
+            <a:srgbClr val="D3D9E1"/>
+          </a:solidFill>
+          <a:ln>
+            <a:noFill/>
+          </a:ln>
+        </p:spPr>
+        <p:txBody>
+          <a:bodyPr rtlCol="0" anchor="ctr"/>
+          <a:lstStyle/>
+          <a:p>
+            <a:pPr algn="ctr"/>
+          </a:p>
+        </p:txBody>
+      </p:sp>
+      <p:sp>
+        <p:nvSpPr>
+          <p:cNvPr id="24" name="TextBox 23"/>
+          <p:cNvSpPr txBox="1"/>
+          <p:nvPr/>
+        </p:nvSpPr>
+        <p:spPr>
+          <a:xfrm>
+            <a:off x="548640" y="4526279"/>
+            <a:ext cx="822960" cy="731520"/>
+          </a:xfrm>
+          <a:prstGeom prst="rect">
+            <a:avLst/>
+          </a:prstGeom>
+          <a:noFill/>
+        </p:spPr>
+        <p:txBody>
+          <a:bodyPr wrap="square" anchor="ctr"/>
+          <a:lstStyle/>
+          <a:p>
+            <a:pPr algn="l">
+              <a:lnSpc>
+                <a:spcPct val="110000"/>
+              </a:lnSpc>
+            </a:pPr>
+            <a:r>
+              <a:rPr sz="2200" b="1">
+                <a:solidFill>
+                  <a:srgbClr val="1A6FC4"/>
+                </a:solidFill>
+                <a:latin typeface="맑은 고딕"/>
+                <a:ea typeface="맑은 고딕"/>
+                <a:cs typeface="맑은 고딕"/>
+              </a:rPr>
+              <a:t>05</a:t>
+            </a:r>
+          </a:p>
+        </p:txBody>
+      </p:sp>
+      <p:sp>
+        <p:nvSpPr>
+          <p:cNvPr id="25" name="TextBox 24"/>
+          <p:cNvSpPr txBox="1"/>
+          <p:nvPr/>
+        </p:nvSpPr>
+        <p:spPr>
+          <a:xfrm>
+            <a:off x="1417319" y="4526279"/>
+            <a:ext cx="8488375" cy="731520"/>
+          </a:xfrm>
+          <a:prstGeom prst="rect">
+            <a:avLst/>
+          </a:prstGeom>
+          <a:noFill/>
+        </p:spPr>
+        <p:txBody>
+          <a:bodyPr wrap="square" anchor="ctr"/>
+          <a:lstStyle/>
+          <a:p>
+            <a:pPr algn="l">
+              <a:lnSpc>
+                <a:spcPct val="110000"/>
+              </a:lnSpc>
+            </a:pPr>
+            <a:r>
+              <a:rPr sz="1900" b="1">
+                <a:solidFill>
+                  <a:srgbClr val="13294B"/>
+                </a:solidFill>
+                <a:latin typeface="맑은 고딕"/>
+                <a:ea typeface="맑은 고딕"/>
+                <a:cs typeface="맑은 고딕"/>
+              </a:rPr>
+              <a:t>재고 보충 프로세스 실행하기</a:t>
+            </a:r>
+          </a:p>
+        </p:txBody>
+      </p:sp>
+      <p:sp>
+        <p:nvSpPr>
+          <p:cNvPr id="26" name="Rounded Rectangle 25"/>
+          <p:cNvSpPr/>
+          <p:nvPr/>
+        </p:nvSpPr>
+        <p:spPr>
+          <a:xfrm>
+            <a:off x="10088575" y="4745736"/>
+            <a:ext cx="1371600" cy="292608"/>
+          </a:xfrm>
+          <a:prstGeom prst="roundRect">
+            <a:avLst>
+              <a:gd name="adj" fmla="val 50000"/>
+            </a:avLst>
+          </a:prstGeom>
+          <a:solidFill>
+            <a:srgbClr val="D3D9E1"/>
+          </a:solidFill>
+          <a:ln>
+            <a:noFill/>
+          </a:ln>
+        </p:spPr>
+        <p:txBody>
+          <a:bodyPr rtlCol="0" anchor="ctr"/>
+          <a:lstStyle/>
+          <a:p>
+            <a:pPr algn="ctr"/>
+          </a:p>
+        </p:txBody>
+      </p:sp>
+      <p:sp>
+        <p:nvSpPr>
+          <p:cNvPr id="27" name="TextBox 26"/>
+          <p:cNvSpPr txBox="1"/>
+          <p:nvPr/>
+        </p:nvSpPr>
+        <p:spPr>
+          <a:xfrm>
+            <a:off x="10088575" y="4745736"/>
+            <a:ext cx="1371600" cy="292608"/>
+          </a:xfrm>
+          <a:prstGeom prst="rect">
+            <a:avLst/>
+          </a:prstGeom>
+          <a:noFill/>
+        </p:spPr>
+        <p:txBody>
+          <a:bodyPr wrap="square" anchor="ctr"/>
+          <a:lstStyle/>
+          <a:p>
+            <a:pPr algn="ctr">
+              <a:lnSpc>
+                <a:spcPct val="110000"/>
+              </a:lnSpc>
+            </a:pPr>
+            <a:r>
+              <a:rPr sz="1200" b="1">
+                <a:solidFill>
+                  <a:srgbClr val="13294B"/>
+                </a:solidFill>
+                <a:latin typeface="맑은 고딕"/>
+                <a:ea typeface="맑은 고딕"/>
+                <a:cs typeface="맑은 고딕"/>
+              </a:rPr>
+              <a:t>실습</a:t>
+            </a:r>
+          </a:p>
+        </p:txBody>
+      </p:sp>
+      <p:sp>
+        <p:nvSpPr>
+          <p:cNvPr id="28" name="Rectangle 27"/>
+          <p:cNvSpPr/>
+          <p:nvPr/>
+        </p:nvSpPr>
+        <p:spPr>
+          <a:xfrm>
+            <a:off x="548640" y="5248655"/>
+            <a:ext cx="11094415" cy="13716"/>
+          </a:xfrm>
+          <a:prstGeom prst="rect">
+            <a:avLst/>
+          </a:prstGeom>
+          <a:solidFill>
+            <a:srgbClr val="D3D9E1"/>
+          </a:solidFill>
+          <a:ln>
+            <a:noFill/>
+          </a:ln>
+        </p:spPr>
+        <p:txBody>
+          <a:bodyPr rtlCol="0" anchor="ctr"/>
+          <a:lstStyle/>
+          <a:p>
+            <a:pPr algn="ctr"/>
+          </a:p>
+        </p:txBody>
+      </p:sp>
+      <p:sp>
+        <p:nvSpPr>
+          <p:cNvPr id="29" name="TextBox 28"/>
+          <p:cNvSpPr txBox="1"/>
+          <p:nvPr/>
+        </p:nvSpPr>
+        <p:spPr>
+          <a:xfrm>
+            <a:off x="548640" y="5257800"/>
+            <a:ext cx="822960" cy="731520"/>
+          </a:xfrm>
+          <a:prstGeom prst="rect">
+            <a:avLst/>
+          </a:prstGeom>
+          <a:noFill/>
+        </p:spPr>
+        <p:txBody>
+          <a:bodyPr wrap="square" anchor="ctr"/>
+          <a:lstStyle/>
+          <a:p>
+            <a:pPr algn="l">
+              <a:lnSpc>
+                <a:spcPct val="110000"/>
+              </a:lnSpc>
+            </a:pPr>
+            <a:r>
+              <a:rPr sz="2200" b="1">
+                <a:solidFill>
+                  <a:srgbClr val="1A6FC4"/>
+                </a:solidFill>
+                <a:latin typeface="맑은 고딕"/>
+                <a:ea typeface="맑은 고딕"/>
+                <a:cs typeface="맑은 고딕"/>
+              </a:rPr>
+              <a:t>06</a:t>
+            </a:r>
+          </a:p>
+        </p:txBody>
+      </p:sp>
+      <p:sp>
+        <p:nvSpPr>
+          <p:cNvPr id="30" name="TextBox 29"/>
+          <p:cNvSpPr txBox="1"/>
+          <p:nvPr/>
+        </p:nvSpPr>
+        <p:spPr>
+          <a:xfrm>
+            <a:off x="1417319" y="5257800"/>
+            <a:ext cx="8488375" cy="731520"/>
+          </a:xfrm>
+          <a:prstGeom prst="rect">
+            <a:avLst/>
+          </a:prstGeom>
+          <a:noFill/>
+        </p:spPr>
+        <p:txBody>
+          <a:bodyPr wrap="square" anchor="ctr"/>
+          <a:lstStyle/>
+          <a:p>
+            <a:pPr algn="l">
+              <a:lnSpc>
+                <a:spcPct val="110000"/>
+              </a:lnSpc>
+            </a:pPr>
+            <a:r>
+              <a:rPr sz="1900" b="1">
+                <a:solidFill>
+                  <a:srgbClr val="13294B"/>
+                </a:solidFill>
+                <a:latin typeface="맑은 고딕"/>
+                <a:ea typeface="맑은 고딕"/>
+                <a:cs typeface="맑은 고딕"/>
+              </a:rPr>
+              <a:t>AI와 사람이 함께 수행하는 업무 흐름의 정리</a:t>
+            </a:r>
+          </a:p>
+        </p:txBody>
+      </p:sp>
+      <p:sp>
+        <p:nvSpPr>
+          <p:cNvPr id="31" name="Rounded Rectangle 30"/>
+          <p:cNvSpPr/>
+          <p:nvPr/>
+        </p:nvSpPr>
+        <p:spPr>
+          <a:xfrm>
+            <a:off x="10088575" y="5477256"/>
+            <a:ext cx="1371600" cy="292608"/>
+          </a:xfrm>
+          <a:prstGeom prst="roundRect">
+            <a:avLst>
+              <a:gd name="adj" fmla="val 50000"/>
+            </a:avLst>
+          </a:prstGeom>
+          <a:solidFill>
+            <a:srgbClr val="D3D9E1"/>
+          </a:solidFill>
+          <a:ln>
+            <a:noFill/>
+          </a:ln>
+        </p:spPr>
+        <p:txBody>
+          <a:bodyPr rtlCol="0" anchor="ctr"/>
+          <a:lstStyle/>
+          <a:p>
+            <a:pPr algn="ctr"/>
+          </a:p>
+        </p:txBody>
+      </p:sp>
+      <p:sp>
+        <p:nvSpPr>
+          <p:cNvPr id="32" name="TextBox 31"/>
+          <p:cNvSpPr txBox="1"/>
+          <p:nvPr/>
+        </p:nvSpPr>
+        <p:spPr>
+          <a:xfrm>
+            <a:off x="10088575" y="5477256"/>
+            <a:ext cx="1371600" cy="292608"/>
+          </a:xfrm>
+          <a:prstGeom prst="rect">
+            <a:avLst/>
+          </a:prstGeom>
+          <a:noFill/>
+        </p:spPr>
+        <p:txBody>
+          <a:bodyPr wrap="square" anchor="ctr"/>
+          <a:lstStyle/>
+          <a:p>
+            <a:pPr algn="ctr">
+              <a:lnSpc>
+                <a:spcPct val="110000"/>
+              </a:lnSpc>
+            </a:pPr>
+            <a:r>
+              <a:rPr sz="1200" b="1">
+                <a:solidFill>
+                  <a:srgbClr val="13294B"/>
+                </a:solidFill>
+                <a:latin typeface="맑은 고딕"/>
+                <a:ea typeface="맑은 고딕"/>
+                <a:cs typeface="맑은 고딕"/>
+              </a:rPr>
               <a:t>이론</a:t>
             </a:r>
           </a:p>
@@ -23528,7 +24236,7 @@
       </p:sp>
       <p:sp>
         <p:nvSpPr>
-          <p:cNvPr id="13" name="TextBox 12"/>
+          <p:cNvPr id="33" name="TextBox 32"/>
           <p:cNvSpPr txBox="1"/>
           <p:nvPr/>
         </p:nvSpPr>
@@ -26736,7 +27444,7 @@
                 <a:ea typeface="맑은 고딕"/>
                 <a:cs typeface="맑은 고딕"/>
               </a:rPr>
-              <a:t>agent:cooling이 도구를 10번 불러 조치 카드 묶음을 제출했다</a:t>
+              <a:t>agent:cooling이 도구를 10번 불러 추천안을 제출했다</a:t>
             </a:r>
           </a:p>
         </p:txBody>
@@ -29551,7 +30259,7 @@
       </p:sp>
       <p:pic>
         <p:nvPicPr>
-          <p:cNvPr id="6" name="삽화:요소_복습.svg" descr="illust_1750027897296731026_1791743711.png"/>
+          <p:cNvPr id="6" name="삽화:요소_복습.svg" descr="illust_6866595308511383913_1791743711.png"/>
           <p:cNvPicPr>
             <a:picLocks noChangeAspect="1"/>
           </p:cNvPicPr>
@@ -30377,7 +31085,7 @@
       </p:sp>
       <p:pic>
         <p:nvPicPr>
-          <p:cNvPr id="6" name="삽화:다섯자리.svg" descr="illust_6302877682551932864_1791743711.png"/>
+          <p:cNvPr id="6" name="삽화:다섯자리.svg" descr="illust_6749070583625362994_1791743711.png"/>
           <p:cNvPicPr>
             <a:picLocks noChangeAspect="1"/>
           </p:cNvPicPr>
@@ -30951,7 +31659,7 @@
       </p:sp>
       <p:pic>
         <p:nvPicPr>
-          <p:cNvPr id="6" name="삽화:주고받는것.svg" descr="illust_7246963307799639891_1791743711.png"/>
+          <p:cNvPr id="6" name="삽화:주고받는것.svg" descr="illust_3871650435564229707_1791743711.png"/>
           <p:cNvPicPr>
             <a:picLocks noChangeAspect="1"/>
           </p:cNvPicPr>
@@ -31886,7 +32594,7 @@
         <p:spPr>
           <a:xfrm>
             <a:off x="3108960" y="4160520"/>
-            <a:ext cx="1290319" cy="347472"/>
+            <a:ext cx="822960" cy="347472"/>
           </a:xfrm>
           <a:prstGeom prst="roundRect">
             <a:avLst>
@@ -31917,7 +32625,7 @@
         <p:spPr>
           <a:xfrm>
             <a:off x="3108960" y="4160520"/>
-            <a:ext cx="1290319" cy="347472"/>
+            <a:ext cx="822960" cy="347472"/>
           </a:xfrm>
           <a:prstGeom prst="rect">
             <a:avLst/>
@@ -31942,7 +32650,7 @@
                 <a:ea typeface="맑은 고딕"/>
                 <a:cs typeface="맑은 고딕"/>
               </a:rPr>
-              <a:t>이론 · 실습</a:t>
+              <a:t>이론</a:t>
             </a:r>
           </a:p>
         </p:txBody>
@@ -33932,7 +34640,7 @@
       </p:sp>
       <p:pic>
         <p:nvPicPr>
-          <p:cNvPr id="6" name="삽화:시스템실행.svg" descr="illust_3816008224309231806_1791744928.png"/>
+          <p:cNvPr id="6" name="삽화:시스템실행.svg" descr="illust_9102059608401492461_1791744928.png"/>
           <p:cNvPicPr>
             <a:picLocks noChangeAspect="1"/>
           </p:cNvPicPr>
@@ -34485,7 +35193,7 @@
       </p:sp>
       <p:pic>
         <p:nvPicPr>
-          <p:cNvPr id="6" name="삽화:세종료.svg" descr="illust_1623480526279703829_1791743711.png"/>
+          <p:cNvPr id="6" name="삽화:세종료.svg" descr="illust_8466367708034529462_1791743711.png"/>
           <p:cNvPicPr>
             <a:picLocks noChangeAspect="1"/>
           </p:cNvPicPr>
@@ -39568,7 +40276,7 @@
       </p:sp>
       <p:pic>
         <p:nvPicPr>
-          <p:cNvPr id="6" name="삽화:세시작.svg" descr="illust_884813186719317307_1791743711.png"/>
+          <p:cNvPr id="6" name="삽화:세시작.svg" descr="illust_3637926550247103646_1791743711.png"/>
           <p:cNvPicPr>
             <a:picLocks noChangeAspect="1"/>
           </p:cNvPicPr>
@@ -45730,7 +46438,7 @@
       </p:sp>
       <p:pic>
         <p:nvPicPr>
-          <p:cNvPr id="6" name="삽화:운전시간.svg" descr="illust_619622158190749682_1791743711.png"/>
+          <p:cNvPr id="6" name="삽화:운전시간.svg" descr="illust_4220565076905993255_1791743711.png"/>
           <p:cNvPicPr>
             <a:picLocks noChangeAspect="1"/>
           </p:cNvPicPr>

--- a/docs/교재/통합반_오프라인/10회차/통합반_오프라인_10회차.pptx
+++ b/docs/교재/통합반_오프라인/10회차/통합반_오프라인_10회차.pptx
@@ -624,7 +624,7 @@
           <a:lstStyle/>
           <a:p>
             <a:r>
-              <a:t>달라지는 네 가지를 보았으니 이제 같은 것을 보겠습니다. 위에서부터 긴급 대응, 정기 점검, 재고 보충의 뼈대입니다. 세 줄 모두 경보로 시작해 에이전트가 제안하고, 사람이 승인하거나 거절하고, 시스템이 처리한 뒤 결과를 보고합니다. 하늘색 띠 안의 승인 작업과 갈림은 세 줄이 같은 자리, 같은 모양입니다. 달라지는 것은 띠의 오른쪽에 이어지는 시스템 작업의 수와 내용입니다.</a:t>
+              <a:t>달라지는 네 가지를 보았으니 이제 같은 것을 보겠습니다. 위에서부터 긴급 대응, 정기 점검, 재고 보충의 뼈대입니다. 세 줄 모두 경보로 시작해 에이전트가 제안하고, 사람이 승인하거나 거절하고, 시스템이 처리한 뒤 결과를 보고합니다. 하늘색 띠 안의 승인 작업과 갈림은 세 줄이 같은 자리, 같은 모양이어서 같은 승인 블록이라고 적었습니다. 달라지는 것은 띠의 오른쪽에 이어지는 시스템 작업의 수와 내용입니다.</a:t>
             </a:r>
           </a:p>
         </p:txBody>
@@ -1884,7 +1884,7 @@
           <a:lstStyle/>
           <a:p>
             <a:r>
-              <a:t>순서를 적은 문서가 둘 있었습니다. 스킬은 에이전트가 읽는 지침으로, 한 단계 안에서 어느 도구를 어떤 순서로 부를지를 적습니다. 프로세스 정의는 엔진이 읽는 설계도로, 단계와 단계 사이의 순서를 정합니다. 스킬에 승인을 받으라고 적어도 승인이 보장되지는 않습니다. 단계 사이의 순서는 엔진이 지키기 때문에 승인 없이는 명령으로 넘어가지 않습니다.</a:t>
+              <a:t>순서를 적은 문서가 둘 있었습니다. 스킬은 에이전트가 읽는 지침으로 한 단계 안에서 어느 도구를 어떤 순서로 부를지를 적으며, 왼쪽에 적은 것은 이 처리 건의 실행 기록에 남은 호출 순서입니다. 프로세스 정의는 엔진이 읽는 설계도로, 단계와 단계 사이의 순서를 정합니다. 스킬에 승인을 받으라고 적어도 승인이 보장되지는 않습니다. 단계 사이의 순서는 엔진이 지키기 때문에 승인 없이는 명령으로 넘어가지 않습니다.</a:t>
             </a:r>
           </a:p>
         </p:txBody>
@@ -7196,7 +7196,7 @@
       </p:sp>
       <p:pic>
         <p:nvPicPr>
-          <p:cNvPr id="6" name="삽화:재고.svg" descr="illust_8189678603003621275_1791743711.png"/>
+          <p:cNvPr id="6" name="삽화:재고.svg" descr="illust_8993210460432460774_1791743711.png"/>
           <p:cNvPicPr>
             <a:picLocks noChangeAspect="1"/>
           </p:cNvPicPr>
@@ -10004,7 +10004,7 @@
       </p:sp>
       <p:pic>
         <p:nvPicPr>
-          <p:cNvPr id="6" name="삽화:세흐름_나란히.svg" descr="illust_5497331892926943611_1791743711.png"/>
+          <p:cNvPr id="6" name="삽화:세흐름_나란히.svg" descr="illust_522036059381290669_1791743711.png"/>
           <p:cNvPicPr>
             <a:picLocks noChangeAspect="1"/>
           </p:cNvPicPr>
@@ -11490,7 +11490,7 @@
       </p:sp>
       <p:pic>
         <p:nvPicPr>
-          <p:cNvPr id="6" name="삽화:승인블록_자리.svg" descr="illust_6008171743778559052_1791743711.png"/>
+          <p:cNvPr id="6" name="삽화:승인블록_자리.svg" descr="illust_8752792531328005031_1791743711.png"/>
           <p:cNvPicPr>
             <a:picLocks noChangeAspect="1"/>
           </p:cNvPicPr>
@@ -12421,7 +12421,7 @@
       </p:sp>
       <p:pic>
         <p:nvPicPr>
-          <p:cNvPr id="6" name="삽화:흐름_정기점검.svg" descr="illust_4451205026141842994_1791743711.png"/>
+          <p:cNvPr id="6" name="삽화:흐름_정기점검.svg" descr="illust_3798412647728601330_1791743711.png"/>
           <p:cNvPicPr>
             <a:picLocks noChangeAspect="1"/>
           </p:cNvPicPr>
@@ -13310,7 +13310,7 @@
       </p:sp>
       <p:pic>
         <p:nvPicPr>
-          <p:cNvPr id="6" name="삽화:흐름_재고보충.svg" descr="illust_2470626762497736301_1791743711.png"/>
+          <p:cNvPr id="6" name="삽화:흐름_재고보충.svg" descr="illust_7276496119659620086_1791743711.png"/>
           <p:cNvPicPr>
             <a:picLocks noChangeAspect="1"/>
           </p:cNvPicPr>
@@ -22770,7 +22770,7 @@
       </p:sp>
       <p:pic>
         <p:nvPicPr>
-          <p:cNvPr id="6" name="삽화:세층연결.svg" descr="illust_5076779661510445036_1791743711.png"/>
+          <p:cNvPr id="6" name="삽화:세층연결.svg" descr="illust_5347051959009341178_1791743711.png"/>
           <p:cNvPicPr>
             <a:picLocks noChangeAspect="1"/>
           </p:cNvPicPr>
@@ -25644,7 +25644,7 @@
                 <a:ea typeface="맑은 고딕"/>
                 <a:cs typeface="맑은 고딕"/>
               </a:rPr>
-              <a:t>쿨러 핀 오염으로 가려</a:t>
+              <a:t>쿨러 핀 오염으로</a:t>
             </a:r>
           </a:p>
           <a:p>
@@ -25665,7 +25665,7 @@
                 <a:ea typeface="맑은 고딕"/>
                 <a:cs typeface="맑은 고딕"/>
               </a:rPr>
-              <a:t>이 조치를 추천한다</a:t>
+              <a:t>가려 추천한다</a:t>
             </a:r>
           </a:p>
         </p:txBody>
@@ -26038,7 +26038,7 @@
                 <a:ea typeface="맑은 고딕"/>
                 <a:cs typeface="맑은 고딕"/>
               </a:rPr>
-              <a:t>팬 속도 100 % 명령</a:t>
+              <a:t>프로세스가</a:t>
             </a:r>
           </a:p>
           <a:p>
@@ -26059,7 +26059,28 @@
                 <a:ea typeface="맑은 고딕"/>
                 <a:cs typeface="맑은 고딕"/>
               </a:rPr>
-              <a:t>CMD-1010-0001-01d1</a:t>
+              <a:t>팬 속도 100 %</a:t>
+            </a:r>
+          </a:p>
+          <a:p>
+            <a:pPr algn="ctr">
+              <a:lnSpc>
+                <a:spcPct val="110000"/>
+              </a:lnSpc>
+              <a:spcAft>
+                <a:spcPts val="400"/>
+              </a:spcAft>
+            </a:pPr>
+            <a:r>
+              <a:rPr sz="1250" b="0">
+                <a:solidFill>
+                  <a:srgbClr val="1F2A3A"/>
+                </a:solidFill>
+                <a:latin typeface="맑은 고딕"/>
+                <a:ea typeface="맑은 고딕"/>
+                <a:cs typeface="맑은 고딕"/>
+              </a:rPr>
+              <a:t>명령을 낸다</a:t>
             </a:r>
           </a:p>
         </p:txBody>
@@ -28846,7 +28867,7 @@
                 <a:ea typeface="맑은 고딕"/>
                 <a:cs typeface="맑은 고딕"/>
               </a:rPr>
-              <a:t>• 에이전트가 읽고 따른다</a:t>
+              <a:t>• 이 처리 건의 호출이며 상황에 따라 달라진다</a:t>
             </a:r>
           </a:p>
           <a:p>
@@ -28867,7 +28888,7 @@
                 <a:ea typeface="맑은 고딕"/>
                 <a:cs typeface="맑은 고딕"/>
               </a:rPr>
-              <a:t>• 상황에 따라 호출이 달라질 수 있다</a:t>
+              <a:t>• 에이전트가 읽고 따른다</a:t>
             </a:r>
           </a:p>
         </p:txBody>
@@ -30259,7 +30280,7 @@
       </p:sp>
       <p:pic>
         <p:nvPicPr>
-          <p:cNvPr id="6" name="삽화:요소_복습.svg" descr="illust_6866595308511383913_1791743711.png"/>
+          <p:cNvPr id="6" name="삽화:요소_복습.svg" descr="illust_514128265356303084_1791743711.png"/>
           <p:cNvPicPr>
             <a:picLocks noChangeAspect="1"/>
           </p:cNvPicPr>
@@ -31085,7 +31106,7 @@
       </p:sp>
       <p:pic>
         <p:nvPicPr>
-          <p:cNvPr id="6" name="삽화:다섯자리.svg" descr="illust_6749070583625362994_1791743711.png"/>
+          <p:cNvPr id="6" name="삽화:다섯자리.svg" descr="illust_9052977979641863706_1791743711.png"/>
           <p:cNvPicPr>
             <a:picLocks noChangeAspect="1"/>
           </p:cNvPicPr>
@@ -31659,7 +31680,7 @@
       </p:sp>
       <p:pic>
         <p:nvPicPr>
-          <p:cNvPr id="6" name="삽화:주고받는것.svg" descr="illust_3871650435564229707_1791743711.png"/>
+          <p:cNvPr id="6" name="삽화:주고받는것.svg" descr="illust_7126913375011076761_1791743711.png"/>
           <p:cNvPicPr>
             <a:picLocks noChangeAspect="1"/>
           </p:cNvPicPr>
@@ -33691,8 +33712,8 @@
         </p:nvSpPr>
         <p:spPr>
           <a:xfrm>
-            <a:off x="548640" y="2511552"/>
-            <a:ext cx="3515258" cy="2959607"/>
+            <a:off x="548640" y="2620010"/>
+            <a:ext cx="3515258" cy="2742692"/>
           </a:xfrm>
           <a:prstGeom prst="roundRect">
             <a:avLst>
@@ -33724,7 +33745,7 @@
         </p:nvSpPr>
         <p:spPr>
           <a:xfrm>
-            <a:off x="777240" y="2712720"/>
+            <a:off x="777240" y="2821178"/>
             <a:ext cx="731520" cy="731520"/>
           </a:xfrm>
           <a:prstGeom prst="ellipse">
@@ -33761,7 +33782,7 @@
         </p:blipFill>
         <p:spPr>
           <a:xfrm>
-            <a:off x="930859" y="2866339"/>
+            <a:off x="930859" y="2974797"/>
             <a:ext cx="424281" cy="424281"/>
           </a:xfrm>
           <a:prstGeom prst="rect">
@@ -33777,8 +33798,8 @@
         </p:nvSpPr>
         <p:spPr>
           <a:xfrm>
-            <a:off x="713232" y="3535680"/>
-            <a:ext cx="3186074" cy="1432559"/>
+            <a:off x="713232" y="3644138"/>
+            <a:ext cx="3186074" cy="1215644"/>
           </a:xfrm>
           <a:prstGeom prst="rect">
             <a:avLst/>
@@ -33827,49 +33848,7 @@
                 <a:ea typeface="맑은 고딕"/>
                 <a:cs typeface="맑은 고딕"/>
               </a:rPr>
-              <a:t>• 설비 명령 앞의 경로에</a:t>
-            </a:r>
-          </a:p>
-          <a:p>
-            <a:pPr algn="l">
-              <a:lnSpc>
-                <a:spcPct val="110000"/>
-              </a:lnSpc>
-              <a:spcAft>
-                <a:spcPts val="400"/>
-              </a:spcAft>
-            </a:pPr>
-            <a:r>
-              <a:rPr sz="1400" b="0">
-                <a:solidFill>
-                  <a:srgbClr val="1F2A3A"/>
-                </a:solidFill>
-                <a:latin typeface="맑은 고딕"/>
-                <a:ea typeface="맑은 고딕"/>
-                <a:cs typeface="맑은 고딕"/>
-              </a:rPr>
-              <a:t>• 사람의 승인이 없으면</a:t>
-            </a:r>
-          </a:p>
-          <a:p>
-            <a:pPr algn="l">
-              <a:lnSpc>
-                <a:spcPct val="110000"/>
-              </a:lnSpc>
-              <a:spcAft>
-                <a:spcPts val="400"/>
-              </a:spcAft>
-            </a:pPr>
-            <a:r>
-              <a:rPr sz="1400" b="0">
-                <a:solidFill>
-                  <a:srgbClr val="1F2A3A"/>
-                </a:solidFill>
-                <a:latin typeface="맑은 고딕"/>
-                <a:ea typeface="맑은 고딕"/>
-                <a:cs typeface="맑은 고딕"/>
-              </a:rPr>
-              <a:t>• 등록하지 않는다</a:t>
+              <a:t>설비 명령 앞의 경로에 사람의 승인이 없으면 등록하지 않는다</a:t>
             </a:r>
           </a:p>
         </p:txBody>
@@ -33882,7 +33861,7 @@
         </p:nvSpPr>
         <p:spPr>
           <a:xfrm>
-            <a:off x="777240" y="5041392"/>
+            <a:off x="777240" y="4932934"/>
             <a:ext cx="1371600" cy="292608"/>
           </a:xfrm>
           <a:prstGeom prst="roundRect">
@@ -33913,7 +33892,7 @@
         </p:nvSpPr>
         <p:spPr>
           <a:xfrm>
-            <a:off x="777240" y="5041392"/>
+            <a:off x="777240" y="4932934"/>
             <a:ext cx="1371600" cy="292608"/>
           </a:xfrm>
           <a:prstGeom prst="rect">
@@ -33952,8 +33931,8 @@
         </p:nvSpPr>
         <p:spPr>
           <a:xfrm>
-            <a:off x="4338218" y="2511552"/>
-            <a:ext cx="3515258" cy="2959607"/>
+            <a:off x="4338218" y="2620010"/>
+            <a:ext cx="3515258" cy="2742692"/>
           </a:xfrm>
           <a:prstGeom prst="roundRect">
             <a:avLst>
@@ -33985,7 +33964,7 @@
         </p:nvSpPr>
         <p:spPr>
           <a:xfrm>
-            <a:off x="4566818" y="2712720"/>
+            <a:off x="4566818" y="2821178"/>
             <a:ext cx="731520" cy="731520"/>
           </a:xfrm>
           <a:prstGeom prst="ellipse">
@@ -34022,7 +34001,7 @@
         </p:blipFill>
         <p:spPr>
           <a:xfrm>
-            <a:off x="4720437" y="2866339"/>
+            <a:off x="4720437" y="2974797"/>
             <a:ext cx="424281" cy="424281"/>
           </a:xfrm>
           <a:prstGeom prst="rect">
@@ -34038,8 +34017,8 @@
         </p:nvSpPr>
         <p:spPr>
           <a:xfrm>
-            <a:off x="4502810" y="3535680"/>
-            <a:ext cx="3186074" cy="1432559"/>
+            <a:off x="4502810" y="3644138"/>
+            <a:ext cx="3186074" cy="1215644"/>
           </a:xfrm>
           <a:prstGeom prst="rect">
             <a:avLst/>
@@ -34088,49 +34067,7 @@
                 <a:ea typeface="맑은 고딕"/>
                 <a:cs typeface="맑은 고딕"/>
               </a:rPr>
-              <a:t>• 승인 조건의 선을 지나지 않고</a:t>
-            </a:r>
-          </a:p>
-          <a:p>
-            <a:pPr algn="l">
-              <a:lnSpc>
-                <a:spcPct val="110000"/>
-              </a:lnSpc>
-              <a:spcAft>
-                <a:spcPts val="400"/>
-              </a:spcAft>
-            </a:pPr>
-            <a:r>
-              <a:rPr sz="1400" b="0">
-                <a:solidFill>
-                  <a:srgbClr val="1F2A3A"/>
-                </a:solidFill>
-                <a:latin typeface="맑은 고딕"/>
-                <a:ea typeface="맑은 고딕"/>
-                <a:cs typeface="맑은 고딕"/>
-              </a:rPr>
-              <a:t>• 실행에 닿는 경로가 있으면</a:t>
-            </a:r>
-          </a:p>
-          <a:p>
-            <a:pPr algn="l">
-              <a:lnSpc>
-                <a:spcPct val="110000"/>
-              </a:lnSpc>
-              <a:spcAft>
-                <a:spcPts val="400"/>
-              </a:spcAft>
-            </a:pPr>
-            <a:r>
-              <a:rPr sz="1400" b="0">
-                <a:solidFill>
-                  <a:srgbClr val="1F2A3A"/>
-                </a:solidFill>
-                <a:latin typeface="맑은 고딕"/>
-                <a:ea typeface="맑은 고딕"/>
-                <a:cs typeface="맑은 고딕"/>
-              </a:rPr>
-              <a:t>• 등록하지 않는다</a:t>
+              <a:t>승인 조건의 선을 지나지 않고 실행에 닿는 경로가 있으면 등록하지 않는다</a:t>
             </a:r>
           </a:p>
         </p:txBody>
@@ -34143,7 +34080,7 @@
         </p:nvSpPr>
         <p:spPr>
           <a:xfrm>
-            <a:off x="4566818" y="5041392"/>
+            <a:off x="4566818" y="4932934"/>
             <a:ext cx="1371600" cy="292608"/>
           </a:xfrm>
           <a:prstGeom prst="roundRect">
@@ -34174,7 +34111,7 @@
         </p:nvSpPr>
         <p:spPr>
           <a:xfrm>
-            <a:off x="4566818" y="5041392"/>
+            <a:off x="4566818" y="4932934"/>
             <a:ext cx="1371600" cy="292608"/>
           </a:xfrm>
           <a:prstGeom prst="rect">
@@ -34213,8 +34150,8 @@
         </p:nvSpPr>
         <p:spPr>
           <a:xfrm>
-            <a:off x="8127796" y="2511552"/>
-            <a:ext cx="3515258" cy="2959607"/>
+            <a:off x="8127796" y="2620010"/>
+            <a:ext cx="3515258" cy="2742692"/>
           </a:xfrm>
           <a:prstGeom prst="roundRect">
             <a:avLst>
@@ -34246,7 +34183,7 @@
         </p:nvSpPr>
         <p:spPr>
           <a:xfrm>
-            <a:off x="8356396" y="2712720"/>
+            <a:off x="8356396" y="2821178"/>
             <a:ext cx="731520" cy="731520"/>
           </a:xfrm>
           <a:prstGeom prst="ellipse">
@@ -34283,7 +34220,7 @@
         </p:blipFill>
         <p:spPr>
           <a:xfrm>
-            <a:off x="8510016" y="2866339"/>
+            <a:off x="8510016" y="2974797"/>
             <a:ext cx="424281" cy="424281"/>
           </a:xfrm>
           <a:prstGeom prst="rect">
@@ -34299,8 +34236,8 @@
         </p:nvSpPr>
         <p:spPr>
           <a:xfrm>
-            <a:off x="8292388" y="3535680"/>
-            <a:ext cx="3186074" cy="1432559"/>
+            <a:off x="8292388" y="3644138"/>
+            <a:ext cx="3186074" cy="1215644"/>
           </a:xfrm>
           <a:prstGeom prst="rect">
             <a:avLst/>
@@ -34349,49 +34286,7 @@
                 <a:ea typeface="맑은 고딕"/>
                 <a:cs typeface="맑은 고딕"/>
               </a:rPr>
-              <a:t>• 그 조치의 승인 역할이 아닌</a:t>
-            </a:r>
-          </a:p>
-          <a:p>
-            <a:pPr algn="l">
-              <a:lnSpc>
-                <a:spcPct val="110000"/>
-              </a:lnSpc>
-              <a:spcAft>
-                <a:spcPts val="400"/>
-              </a:spcAft>
-            </a:pPr>
-            <a:r>
-              <a:rPr sz="1400" b="0">
-                <a:solidFill>
-                  <a:srgbClr val="1F2A3A"/>
-                </a:solidFill>
-                <a:latin typeface="맑은 고딕"/>
-                <a:ea typeface="맑은 고딕"/>
-                <a:cs typeface="맑은 고딕"/>
-              </a:rPr>
-              <a:t>• 쪽의 승인은 거부되고</a:t>
-            </a:r>
-          </a:p>
-          <a:p>
-            <a:pPr algn="l">
-              <a:lnSpc>
-                <a:spcPct val="110000"/>
-              </a:lnSpc>
-              <a:spcAft>
-                <a:spcPts val="400"/>
-              </a:spcAft>
-            </a:pPr>
-            <a:r>
-              <a:rPr sz="1400" b="0">
-                <a:solidFill>
-                  <a:srgbClr val="1F2A3A"/>
-                </a:solidFill>
-                <a:latin typeface="맑은 고딕"/>
-                <a:ea typeface="맑은 고딕"/>
-                <a:cs typeface="맑은 고딕"/>
-              </a:rPr>
-              <a:t>• 기록으로 남는다</a:t>
+              <a:t>그 조치의 승인 역할이 아닌 쪽의 승인은 거부되고 기록으로 남는다</a:t>
             </a:r>
           </a:p>
         </p:txBody>
@@ -34404,7 +34299,7 @@
         </p:nvSpPr>
         <p:spPr>
           <a:xfrm>
-            <a:off x="8356396" y="5041392"/>
+            <a:off x="8356396" y="4932934"/>
             <a:ext cx="1371600" cy="292608"/>
           </a:xfrm>
           <a:prstGeom prst="roundRect">
@@ -34435,7 +34330,7 @@
         </p:nvSpPr>
         <p:spPr>
           <a:xfrm>
-            <a:off x="8356396" y="5041392"/>
+            <a:off x="8356396" y="4932934"/>
             <a:ext cx="1371600" cy="292608"/>
           </a:xfrm>
           <a:prstGeom prst="rect">
@@ -34640,7 +34535,7 @@
       </p:sp>
       <p:pic>
         <p:nvPicPr>
-          <p:cNvPr id="6" name="삽화:시스템실행.svg" descr="illust_9102059608401492461_1791744928.png"/>
+          <p:cNvPr id="6" name="삽화:시스템실행.svg" descr="illust_3211333275089742961_1791744928.png"/>
           <p:cNvPicPr>
             <a:picLocks noChangeAspect="1"/>
           </p:cNvPicPr>
@@ -35193,7 +35088,7 @@
       </p:sp>
       <p:pic>
         <p:nvPicPr>
-          <p:cNvPr id="6" name="삽화:세종료.svg" descr="illust_8466367708034529462_1791743711.png"/>
+          <p:cNvPr id="6" name="삽화:세종료.svg" descr="illust_7715334567662070582_1791743711.png"/>
           <p:cNvPicPr>
             <a:picLocks noChangeAspect="1"/>
           </p:cNvPicPr>
@@ -40276,7 +40171,7 @@
       </p:sp>
       <p:pic>
         <p:nvPicPr>
-          <p:cNvPr id="6" name="삽화:세시작.svg" descr="illust_3637926550247103646_1791743711.png"/>
+          <p:cNvPr id="6" name="삽화:세시작.svg" descr="illust_5023678281945270164_1791743711.png"/>
           <p:cNvPicPr>
             <a:picLocks noChangeAspect="1"/>
           </p:cNvPicPr>
@@ -42058,7 +41953,7 @@
                 <a:ea typeface="맑은 고딕"/>
                 <a:cs typeface="맑은 고딕"/>
               </a:rPr>
-              <a:t>설비를 세우는 정비 오더는 효과를 내는 작업이므로 설비보전팀장의 승인 뒤에 둔다</a:t>
+              <a:t>정비 오더는 효과를 내는 작업이므로 설비보전팀장의 승인 뒤에 둔다</a:t>
             </a:r>
           </a:p>
         </p:txBody>
@@ -46438,7 +46333,7 @@
       </p:sp>
       <p:pic>
         <p:nvPicPr>
-          <p:cNvPr id="6" name="삽화:운전시간.svg" descr="illust_4220565076905993255_1791743711.png"/>
+          <p:cNvPr id="6" name="삽화:운전시간.svg" descr="illust_1591289300600594281_1791743711.png"/>
           <p:cNvPicPr>
             <a:picLocks noChangeAspect="1"/>
           </p:cNvPicPr>

--- a/docs/교재/통합반_오프라인/10회차/통합반_오프라인_10회차.pptx
+++ b/docs/교재/통합반_오프라인/10회차/통합반_오프라인_10회차.pptx
@@ -1114,7 +1114,7 @@
           <a:lstStyle/>
           <a:p>
             <a:r>
-              <a:t>첫 실습에서는 정기 점검 프로세스를 직접 그립니다. 정기 점검 도래로 시작해 정비 계획 에이전트의 제안으로 잇습니다. 승인을 받는 자리는 8회차에 그린 것과 같은 모양으로 놓고 승인 역할만 설비보전팀장으로 합니다. 승인 뒤에는 정비 오더와 생산팀 공지와 결과 보고를 놓습니다. 끝나면 이 프로세스의 BPMN 파일이 만들어집니다.</a:t>
+              <a:t>첫 실습에서는 정기 점검 프로세스를 직접 그립니다. 정기 점검 도래로 시작해 정비 계획 에이전트의 제안 작업으로 잇습니다. 승인을 받는 자리는 8회차에 그린 것과 같은 모양으로 놓고 승인 역할만 설비보전팀장으로 합니다. 승인 뒤에는 정비 오더 등록과 공지 메일을 한 작업으로, 그 뒤에 결과 보고를 놓습니다. 끝나면 이 프로세스의 BPMN 파일이 만들어집니다.</a:t>
             </a:r>
           </a:p>
         </p:txBody>
@@ -1184,7 +1184,7 @@
           <a:lstStyle/>
           <a:p>
             <a:r>
-              <a:t>둘째 실습에서는 그린 프로세스를 실제 업무로 실행합니다. 정기 점검 도래의 경보 패턴, 정비 계획 에이전트, 설비보전팀장 역할, CMMS와 공지 작업을 연결하고, 사전 검사를 거쳐 등록하고 배포합니다. 정기 점검이 도래하면 처리 건이 열리고 에이전트의 제안이 승인을 기다립니다. 승인한 뒤 정비 오더와 생산팀 공지와 종료 기록이 남았는지를 처리 건에서 확인합니다. 거절한 경우에는 정비 오더가 만들어지지 않고 거절 종결에 닿아 닫히는지를 확인합니다.</a:t>
+              <a:t>둘째 실습에서는 그린 프로세스를 실제 업무로 실행합니다. 정기 점검 도래의 경보 패턴, 정비 계획 에이전트, 설비보전팀장 역할, CMMS와 공지 작업을 연결하고, 사전 검사를 거쳐 등록하고 배포합니다. 정기 점검이 도래하면 처리 건이 열리고 에이전트의 추천안이 승인을 기다립니다. 승인한 뒤 정비 오더와 생산팀 공지와 종료 기록이 남았는지를 처리 건에서 확인합니다. 거절한 경우에는 정비 오더가 만들어지지 않고 거절 종결에 닿아 닫히는지를 확인합니다.</a:t>
             </a:r>
           </a:p>
         </p:txBody>
@@ -1254,7 +1254,7 @@
           <a:lstStyle/>
           <a:p>
             <a:r>
-              <a:t>셋째 실습에서는 재고 보충 프로세스를 그립니다. 재고 부족으로 시작해 구매 에이전트가 수량과 공급사를 제안하고, 구매 담당이 승인하거나 거절합니다. 승인 뒤에는 ERP 발주와 공급사 통지, 입고와 재고 반영, 결과 보고가 이어집니다. 끝나면 작업 일곱을 갖춘 BPMN 파일이 만들어집니다.</a:t>
+              <a:t>셋째 실습에서는 재고 보충 프로세스를 그립니다. 재고 부족으로 시작해 구매 에이전트가 수량과 공급사를 제안하고, 구매 담당이 승인하거나 거절합니다. 승인 뒤에는 ERP 발주와 공급사 메일을 한 작업으로 그리고, 입고와 재고 반영, 결과 보고를 잇습니다. 끝나면 작업 일곱을 갖춘 BPMN 파일이 만들어집니다.</a:t>
             </a:r>
           </a:p>
         </p:txBody>
@@ -1464,7 +1464,7 @@
           <a:lstStyle/>
           <a:p>
             <a:r>
-              <a:t>이 과정의 세 영역이 어떻게 이어지는지를 다시 봅니다. 1회차부터 4회차까지 만든 온톨로지는 원인과 증거와 조치와 규칙이라는 지식을 정하고, 현재 값이 어디에 있는지를 알려 줍니다. 5회차부터 7회차까지 다룬 에이전트는 그 지식과 값을 읽어 추천과 대안을 제안합니다. 8회차부터 오늘까지 다룬 프로세스는 그 제안을 순서와 책임과 승인과 실행과 기록으로 완결합니다.</a:t>
+              <a:t>이 과정의 세 영역이 어떻게 이어지는지를 다시 봅니다. 1회차부터 4회차까지 만든 온톨로지는 원인과 증거와 조치와 규칙이라는 지식을 정하고, 현재 값이 어디에 있는지를 알려 줍니다. 5회차부터 7회차까지 다룬 에이전트는 그 지식과 값을 읽어 추천과 대안을 제안합니다. 8회차부터 오늘까지 다룬 프로세스는 그 추천안을 순서와 책임과 승인과 실행과 기록으로 완결합니다.</a:t>
             </a:r>
           </a:p>
         </p:txBody>
@@ -1604,7 +1604,7 @@
           <a:lstStyle/>
           <a:p>
             <a:r>
-              <a:t>연결을 값 하나로 따라가 보겠습니다. 2회차에 조치 방법으로 적어 둔 SOP-COOL-11 팬 최대 운전이 출발점입니다. 에이전트가 이 조치를 지식 그래프에서 읽어 추천했고, 운전원이 승인했습니다. 프로세스가 승인된 조치를 팬 속도 100 % 명령으로 실행했고, 재관측에서 유온 51.3도를 확인했습니다. 지식에 적힌 한 줄이 세 영역을 지나 설비의 상태를 바꾸었습니다.</a:t>
+              <a:t>연결을 값 하나로 따라가 보겠습니다. 2회차에 조치 방법으로 적어 둔 SOP-COOL-11 팬 최대 운전이 출발점입니다. 8회차와 9회차에 기록을 읽은 긴급 대응 처리 건에서 에이전트가 이 조치를 지식 그래프에서 읽어 추천했고, 운전원이 승인했습니다. 프로세스가 승인된 조치를 팬 속도 100 % 명령으로 실행했고, 재관측에서 유온 51.3도를 확인했습니다. 지식에 적힌 한 줄이 세 영역을 지나 설비의 상태를 바꾸었습니다.</a:t>
             </a:r>
           </a:p>
         </p:txBody>
@@ -1674,7 +1674,7 @@
           <a:lstStyle/>
           <a:p>
             <a:r>
-              <a:t>긴급 대응 처리 건 한 건을 놓고, 5회차부터 10회차까지 배운 장치를 두 쪽으로 나누었습니다. 에이전트 실행과 스킬과 MCP, 그리고 명세와 시나리오는 에이전트가 제안 하나를 제대로 만들게 하는 장치입니다. 프로세스 정의와 인스턴스, 사람의 승인, 시스템 실행은 그 제안을 끝난 업무로 잇는 장치입니다. 두 쪽은 하는 일이 달라 서로를 대신하지 못합니다.</a:t>
+              <a:t>긴급 대응 처리 건 한 건을 놓고, 5회차부터 10회차까지 배운 장치를 두 쪽으로 나누었습니다. 에이전트 실행과 스킬과 MCP, 그리고 명세와 시나리오는 에이전트가 추천안 하나를 제대로 만들게 하는 장치입니다. 프로세스 정의와 인스턴스, 사람의 승인, 시스템 실행은 그 추천안을 끝난 업무로 잇는 장치입니다. 두 쪽은 하는 일이 달라 서로를 대신하지 못합니다.</a:t>
             </a:r>
           </a:p>
         </p:txBody>
@@ -1744,7 +1744,7 @@
           <a:lstStyle/>
           <a:p>
             <a:r>
-              <a:t>에이전트 쪽의 장치가 같은 처리 건에서 실제로 한 일입니다. 에이전트 agent:cooling은 도구를 10번 불렀고, 첫 호출이 스킬 문서를 읽는 것이었습니다. hyd-dmn과 enterprise라는 MCP 서버의 도구로 지식과 값을 읽었습니다. 맨 아래의 명세와 시나리오는 이 실행 안에서 일한 것이 아니라, 출력의 형식과 기대 행동을 실행에 앞서 정해 둔 것입니다.</a:t>
+              <a:t>두 쪽의 장치가 같은 처리 건에서 실제로 한 일을 줄 위에 놓았습니다. 파란 상자로 두른 둘째 자리가 에이전트 쪽입니다. agent:cooling은 이 한 자리에서 도구를 10번 불렀고, 첫 호출로 cooling-emergency-response 스킬 문서를 읽은 뒤 hyd-dmn과 enterprise라는 MCP 서버의 도구로 지식과 값을 읽었습니다. 왼쪽 아래의 명세와 시나리오는 이 실행 안에서 일한 것이 아니라 출력의 형식과 기대 행동을 실행에 앞서 정해 둔 것입니다. 위쪽은 프로세스 쪽으로, 정의 c3_cooling에서 열린 인스턴스가 경보에서 끝까지를 덮고, 승인은 운전원 역할의 승인 기록 APPROVAL_ACCEPTED로, 시스템 실행은 설비 명령과 작업지시로 남았습니다.</a:t>
             </a:r>
           </a:p>
         </p:txBody>
@@ -1814,7 +1814,7 @@
           <a:lstStyle/>
           <a:p>
             <a:r>
-              <a:t>프로세스 쪽의 장치가 같은 처리 건에서 남긴 것입니다. 프로세스 정의 c3_cooling은 작업 아홉과 갈림 둘, 타이머 하나를 가진 설계도입니다. 인스턴스는 그 설계도에서 열린 한 건으로, 경보에서 열려 끝 이벤트에서 닫혔습니다. 승인은 운전원 역할의 결정으로 기록되었고, 시스템 실행은 설비 명령 한 건과 작업지시 한 건으로 남았습니다.</a:t>
+              <a:t>순서를 적은 문서가 둘 있었습니다. 스킬은 에이전트가 읽는 지침으로 한 단계 안에서 어느 도구를 어떤 순서로 부를지를 적으며, 왼쪽에 적은 것은 이 처리 건의 실행 기록에 남은 호출 순서입니다. 프로세스 정의는 엔진이 읽는 설계도로, 단계와 단계 사이의 순서를 정합니다. 스킬에 승인을 받으라고 적어도 승인이 보장되지는 않습니다. 단계 사이의 순서는 엔진이 지키기 때문에 승인 없이는 명령으로 넘어가지 않습니다.</a:t>
             </a:r>
           </a:p>
         </p:txBody>
@@ -1884,7 +1884,7 @@
           <a:lstStyle/>
           <a:p>
             <a:r>
-              <a:t>순서를 적은 문서가 둘 있었습니다. 스킬은 에이전트가 읽는 지침으로 한 단계 안에서 어느 도구를 어떤 순서로 부를지를 적으며, 왼쪽에 적은 것은 이 처리 건의 실행 기록에 남은 호출 순서입니다. 프로세스 정의는 엔진이 읽는 설계도로, 단계와 단계 사이의 순서를 정합니다. 스킬에 승인을 받으라고 적어도 승인이 보장되지는 않습니다. 단계 사이의 순서는 엔진이 지키기 때문에 승인 없이는 명령으로 넘어가지 않습니다.</a:t>
+              <a:t>외부 시스템에 닿는 길도 두 쪽이 다릅니다. 에이전트에 연결된 MCP 도구는 지식과 값을 읽는 도구이고, 쓰기는 추천안을 제출하는 것 하나뿐입니다. 팬 속도를 바꾸는 명령과 작업지시의 등록처럼 설비와 업무 시스템을 실제로 바꾸는 쓰기는 프로세스의 서비스 작업에 있습니다. 그 작업은 승인이 전달된 뒤에만 열리므로, 에이전트가 잘못 판단해도 승인 없이는 아무것도 바뀌지 않습니다.</a:t>
             </a:r>
           </a:p>
         </p:txBody>
@@ -1954,7 +1954,7 @@
           <a:lstStyle/>
           <a:p>
             <a:r>
-              <a:t>외부 시스템에 닿는 길도 두 쪽이 다릅니다. 에이전트에 연결된 MCP 도구는 지식과 값을 읽는 도구이고, 쓰기는 판단을 제출하는 것 하나뿐입니다. 팬 속도를 바꾸는 명령과 작업지시의 등록처럼 설비와 업무 시스템을 실제로 바꾸는 쓰기는 프로세스의 서비스 작업에 있습니다. 그 작업은 승인이 전달된 뒤에만 열리므로, 에이전트가 잘못 판단해도 승인 없이는 아무것도 바뀌지 않습니다.</a:t>
+              <a:t>세 프로세스의 그림에 쓰인 기호는 일곱 가지입니다. 경보가 도착하면 여는 메시지 시작 이벤트, 에이전트에게 맡기는 작업, 사람이 수행하는 사용자 작업, 시스템이 수행하는 서비스 작업이 있습니다. 승인과 거절을 가르는 배타 게이트웨이, 승인 지연을 알리는 비중단형 경계 타이머, 갈래를 닫는 끝 이벤트가 나머지입니다. 세 그림은 작업과 게이트웨이의 수만 다르고 시작 이벤트 하나, 경계 타이머 하나, 끝 이벤트 셋은 같습니다.</a:t>
             </a:r>
           </a:p>
         </p:txBody>
@@ -2024,7 +2024,7 @@
           <a:lstStyle/>
           <a:p>
             <a:r>
-              <a:t>세 프로세스의 그림에 쓰인 기호는 일곱 가지입니다. 경보가 도착하면 여는 메시지 시작 이벤트, 에이전트에게 맡기는 작업, 사람이 수행하는 사용자 작업, 시스템이 수행하는 서비스 작업이 있습니다. 승인과 거절을 가르는 배타 게이트웨이, 승인 지연을 알리는 비중단형 경계 타이머, 갈래를 닫는 끝 이벤트가 나머지입니다. 세 그림은 작업과 게이트웨이의 수만 다르고 시작 이벤트 하나, 경계 타이머 하나, 끝 이벤트 셋은 같습니다.</a:t>
+              <a:t>세 업무를 되짚는 데 쓸 틀입니다. 처리 건 한 건은 다섯 자리를 지납니다. 사건이 경보로 도착하는 시작 이벤트, 에이전트의 판단, 사람의 승인 또는 거절, 시스템의 처리, 그리고 종료 기록입니다. 사람이 거절하면 아래의 선처럼 시스템의 처리를 지나지 않고 종료 기록으로 가며, 세 업무 모두에서 거절된 추천안은 설비 명령도 정비 오더도 발주도 만들지 않고 닫혔습니다.</a:t>
             </a:r>
           </a:p>
         </p:txBody>
@@ -2164,7 +2164,7 @@
           <a:lstStyle/>
           <a:p>
             <a:r>
-              <a:t>세 업무를 되짚는 데 쓸 틀입니다. 처리 건 한 건은 다섯 자리를 지납니다. 사건이 경보로 도착하는 시작 이벤트, 에이전트의 판단, 사람의 승인 또는 거절, 시스템의 처리, 그리고 종료 기록입니다. 사람이 거절하면 아래의 점선처럼 시스템의 처리를 지나지 않고 종료 기록으로 갑니다.</a:t>
+              <a:t>다섯 자리 사이에 무엇이 건너가는지를 보겠습니다. 시작 이벤트는 경보의 내용, 곧 설비와 경보 패턴을 에이전트에게 넘깁니다. 에이전트는 추천과 대안을 추천안으로 내고, 사람은 그 가운데 승인한 내용을 냅니다. 시스템은 승인된 내용만 받아 실행하고 그 결과를 결과 보고에 넘깁니다. 앞 자리가 낸 것이 없으면 다음 자리는 일할 수 없고, 이렇게 건너가는 값이 9회차에 본 프로세스 변수입니다.</a:t>
             </a:r>
           </a:p>
         </p:txBody>
@@ -2234,7 +2234,7 @@
           <a:lstStyle/>
           <a:p>
             <a:r>
-              <a:t>다섯 자리 사이에 무엇이 건너가는지를 보겠습니다. 시작 이벤트는 경보의 내용, 곧 설비와 경보 패턴을 에이전트에게 넘깁니다. 에이전트는 추천과 대안을 제안으로 내고, 사람은 그 가운데 승인한 내용을 냅니다. 시스템은 승인된 내용만 받아 실행하고 그 결과를 결과 보고에 넘깁니다. 앞 자리가 낸 것이 없으면 다음 자리는 일할 수 없고, 이렇게 건너가는 값이 9회차에 본 프로세스 변수입니다.</a:t>
+              <a:t>다섯 자리 가운데 둘째인 에이전트의 판단을 정기 점검의 처리 건에서 열어 봅니다. 정기 정비 계획 에이전트가 낸 추천안의 속입니다. 후보는 넷이었고, 이번 예정된 정비 시간에 한 대만 정비하는 안이 추천입니다. 지금 바로 세우는 안은 납기가 스무 시간 남은 생산 오더 때문에 감점되어 대안으로 남았습니다. 미루는 안과 두 대를 묶는 안은 판단 규칙이 제외했습니다. 설비보전팀장은 추천만이 아니라 지는 대안과 제외된 까닭까지 보고 승인했습니다.</a:t>
             </a:r>
           </a:p>
         </p:txBody>
@@ -2304,7 +2304,7 @@
           <a:lstStyle/>
           <a:p>
             <a:r>
-              <a:t>다섯 자리 가운데 사람의 자리를 다시 보겠습니다. 에이전트의 제안이 같아도 사람의 결정에 따라 결말이 갈립니다. 승인하면 게이트웨이가 승인의 갈래를 열어 시스템의 처리가 이어집니다. 거절하면 설비 명령도 정비 오더도 발주도 만들어지지 않고, 결과 보고가 거절의 사유와 하지 않은 일을 적은 뒤 닫힙니다. 세 업무 모두에서 그랬습니다.</a:t>
+              <a:t>재고 보충의 처리 건에서 예비품 구매 에이전트가 낸 추천안입니다. 후보는 공급사 셋에 대한 발주안이었습니다. 가장 싼 C트레이딩은 승인 공급사가 아니어서 판단 규칙이 제외했고, A정밀은 값이 싸고 납기가 빠르지만 불량률이 10 %를 넘어 전수 검사 비용을 더해 견주었습니다. 추천은 금액이 가장 큰 순정 공급사 B-OEM이었고, 구매 담당은 이 비교를 보고 승인했습니다.</a:t>
             </a:r>
           </a:p>
         </p:txBody>
@@ -2444,7 +2444,7 @@
           <a:lstStyle/>
           <a:p>
             <a:r>
-              <a:t>승인 뒤에 엔진이 연 서비스 작업 셋입니다. 첫째로 설비에 팬 속도 100 %의 명령을 냈고, 인터록 검사를 통과해 수행되었습니다. 둘째로 시계열 DB에서 유온을 다시 읽어 51.3 ℃로 기준 55 ℃ 아래임을 확인했습니다. 셋째로 CMMS에 작업지시를 등록했습니다. 가운데 화살표만 방향이 반대인 것은 재관측이 쓰는 일이 아니라 값을 읽어 오는 일이기 때문입니다.</a:t>
+              <a:t>승인 뒤에 엔진이 연 서비스 작업 셋입니다. 첫째로 SCADA를 거쳐 설비에 팬 속도 100 %의 명령을 냈고, 인터록 검사를 통과해 수행되었습니다. 둘째로 시계열 DB에서 유온을 다시 읽어 51.3 ℃로 기준 55 ℃ 아래임을 확인했습니다. 셋째로 CMMS에 작업지시를 등록했습니다. 가운데 화살표만 방향이 반대인 것은 재관측이 쓰는 일이 아니라 값을 읽어 오는 일이기 때문입니다.</a:t>
             </a:r>
           </a:p>
         </p:txBody>
@@ -2584,7 +2584,7 @@
           <a:lstStyle/>
           <a:p>
             <a:r>
-              <a:t>셋이 저마다 필요한 이유는 하나씩 빼 보면 분명해집니다. 지식이 없으면 에이전트가 읽을 곳이 없어 제안의 근거를 되짚을 수 없습니다. 에이전트가 없으면 경보가 올 때마다 사람이 지식과 값을 찾아 직접 견주어야 합니다. 프로세스가 없으면 추천이 나와도 누가 승인하고 누가 실행할지가 정해져 있지 않고, 진행과 결과가 한곳에 남지 않습니다.</a:t>
+              <a:t>셋이 저마다 필요한 이유는 하나씩 빼 보면 분명해집니다. 지식이 없으면 에이전트가 읽을 곳이 없어 추천안의 근거를 되짚을 수 없습니다. 에이전트가 없으면 경보가 올 때마다 사람이 지식과 값을 찾아 직접 견주어야 합니다. 프로세스가 없으면 추천이 나와도 누가 승인하고 누가 실행할지가 정해져 있지 않고, 진행과 결과가 한곳에 남지 않습니다.</a:t>
             </a:r>
           </a:p>
         </p:txBody>
@@ -2654,7 +2654,7 @@
           <a:lstStyle/>
           <a:p>
             <a:r>
-              <a:t>AI와 사람이 함께 일한다는 말의 뜻을 세 업무에서 확인합니다. AI 에이전트는 지식과 데이터를 읽고 후보를 견주어 제안하는 데까지 맡았습니다. 설비 명령이나 발주 같은 처리는 하지 않았습니다. 사람의 일은 세 가지였습니다. 순서와 승인 역할과 예외 경로를 프로세스로 정하는 일, 제안을 승인하거나 거절하는 일, 그리고 기록을 읽어 프로세스를 고치는 일입니다.</a:t>
+              <a:t>AI와 사람이 함께 일한다는 말의 뜻을 세 업무에서 확인합니다. AI 에이전트는 지식과 데이터를 읽고 후보를 견주어 제안하는 데까지 맡았습니다. 설비 명령이나 발주 같은 처리는 하지 않았습니다. 사람의 일은 세 가지였습니다. 순서와 승인 역할과 예외 경로를 프로세스로 정하는 일, 추천안을 승인하거나 거절하는 일, 그리고 기록을 읽어 프로세스를 고치는 일입니다.</a:t>
             </a:r>
           </a:p>
         </p:txBody>
@@ -2794,7 +2794,7 @@
           <a:lstStyle/>
           <a:p>
             <a:r>
-              <a:t>과정 전체를 정리합니다. 에이전트의 제안이 끝난 업무가 되려면 세 가지가 갖추어져야 합니다. 판단의 근거가 등록된 지식과 읽은 값에 닿아 있어야 하고, 판단이 명세가 정한 형식으로 제출되어야 하며, 정해진 역할이 승인하고 실행과 결과가 기록되어야 합니다. 새 업무를 맡았을 때에도 이 세 가지가 갖추어졌는지를 먼저 확인하시기 바랍니다.</a:t>
+              <a:t>과정 전체를 정리합니다. 에이전트의 추천안이 끝난 업무가 되려면 세 가지가 갖추어져야 합니다. 추천안의 근거가 등록된 지식과 읽은 값에 닿아 있어야 하고, 추천안이 명세가 정한 형식으로 제출되어야 하며, 정해진 역할이 승인하고 실행과 결과가 기록되어야 합니다. 새 업무를 맡았을 때에도 이 세 가지가 갖추어졌는지를 먼저 확인하시기 바랍니다.</a:t>
             </a:r>
           </a:p>
         </p:txBody>
@@ -2864,7 +2864,7 @@
           <a:lstStyle/>
           <a:p>
             <a:r>
-              <a:t>세 업무를 같은 네 가지 물음으로 견주어 보겠습니다. 무엇으로 시작하는가, 어느 에이전트가 판단하는가, 누가 승인하는가, 승인 뒤에 어느 시스템이 실행하는가입니다. 에이전트는 냉각 긴급 대응 에이전트, 정기 정비 계획 에이전트, 예비품 구매 에이전트로 서로 다르고, 읽는 정보와 제안하는 내용도 다릅니다. 그런데 에이전트가 제안하고 사람이 승인하고 시스템이 처리해 보고하는 순서는 세 업무가 같습니다. ERP는 구매와 재고를 관리하는 전사적 자원 관리 시스템입니다.</a:t>
+              <a:t>세 업무를 같은 네 가지 물음으로 견주어 보겠습니다. 무엇으로 시작하는가, 어느 에이전트가 판단하는가, 누가 승인하는가, 승인 뒤에 어느 시스템이 실행하는가입니다. 에이전트는 냉각 긴급 대응 에이전트, 정기 정비 계획 에이전트, 예비품 구매 에이전트로 서로 다르고, 추천 하나와 대안과 그 이유를 묶어 내는 추천안의 내용도 냉각 조치, 정비할 시점, 발주안으로 다릅니다. 그런데 에이전트가 제안하고 사람이 승인하고 시스템이 처리해 보고하는 순서는 세 업무가 같습니다. ERP는 구매와 재고를 관리하는 전사적 자원 관리 시스템입니다.</a:t>
             </a:r>
           </a:p>
         </p:txBody>
@@ -7196,7 +7196,7 @@
       </p:sp>
       <p:pic>
         <p:nvPicPr>
-          <p:cNvPr id="6" name="삽화:재고.svg" descr="illust_8993210460432460774_1791743711.png"/>
+          <p:cNvPr id="6" name="삽화:재고.svg" descr="illust_895450059837999180_1791743711.png"/>
           <p:cNvPicPr>
             <a:picLocks noChangeAspect="1"/>
           </p:cNvPicPr>
@@ -8317,7 +8317,7 @@
                 <a:ea typeface="맑은 고딕"/>
                 <a:cs typeface="맑은 고딕"/>
               </a:rPr>
-              <a:t>승인된 제안의 실행은 설비 명령이면 SCADA가, 정비 오더이면 CMMS가, 발주와 입고이면 ERP가 맡는다.</a:t>
+              <a:t>승인된 추천안의 실행은 설비 명령이면 SCADA가, 정비 오더이면 CMMS가, 발주와 입고이면 ERP가 맡는다.</a:t>
             </a:r>
           </a:p>
         </p:txBody>
@@ -8455,7 +8455,7 @@
                 <a:ea typeface="맑은 고딕"/>
                 <a:cs typeface="맑은 고딕"/>
               </a:rPr>
-              <a:t>승인된 제안</a:t>
+              <a:t>승인된 추천안</a:t>
             </a:r>
           </a:p>
         </p:txBody>
@@ -10004,7 +10004,7 @@
       </p:sp>
       <p:pic>
         <p:nvPicPr>
-          <p:cNvPr id="6" name="삽화:세흐름_나란히.svg" descr="illust_522036059381290669_1791743711.png"/>
+          <p:cNvPr id="6" name="삽화:세흐름_나란히.svg" descr="illust_2384168900132868414_1791743711.png"/>
           <p:cNvPicPr>
             <a:picLocks noChangeAspect="1"/>
           </p:cNvPicPr>
@@ -11490,7 +11490,7 @@
       </p:sp>
       <p:pic>
         <p:nvPicPr>
-          <p:cNvPr id="6" name="삽화:승인블록_자리.svg" descr="illust_8752792531328005031_1791743711.png"/>
+          <p:cNvPr id="6" name="삽화:승인블록_자리.svg" descr="illust_7564186825106726284_1791743711.png"/>
           <p:cNvPicPr>
             <a:picLocks noChangeAspect="1"/>
           </p:cNvPicPr>
@@ -12421,7 +12421,7 @@
       </p:sp>
       <p:pic>
         <p:nvPicPr>
-          <p:cNvPr id="6" name="삽화:흐름_정기점검.svg" descr="illust_3798412647728601330_1791743711.png"/>
+          <p:cNvPr id="6" name="삽화:흐름_정기점검.svg" descr="illust_4133770100786933770_1791743711.png"/>
           <p:cNvPicPr>
             <a:picLocks noChangeAspect="1"/>
           </p:cNvPicPr>
@@ -13310,7 +13310,7 @@
       </p:sp>
       <p:pic>
         <p:nvPicPr>
-          <p:cNvPr id="6" name="삽화:흐름_재고보충.svg" descr="illust_7276496119659620086_1791743711.png"/>
+          <p:cNvPr id="6" name="삽화:흐름_재고보충.svg" descr="illust_537293735982613688_1791743711.png"/>
           <p:cNvPicPr>
             <a:picLocks noChangeAspect="1"/>
           </p:cNvPicPr>
@@ -15378,7 +15378,7 @@
                 <a:ea typeface="맑은 고딕"/>
                 <a:cs typeface="맑은 고딕"/>
               </a:rPr>
-              <a:t>• 제안을 검토해 승인하거나 거절한다</a:t>
+              <a:t>• 추천안을 검토해 승인하거나 거절한다</a:t>
             </a:r>
           </a:p>
           <a:p>
@@ -17322,7 +17322,7 @@
                 <a:ea typeface="맑은 고딕"/>
                 <a:cs typeface="맑은 고딕"/>
               </a:rPr>
-              <a:t>이 실습을 마치면 승인 블록을 다시 쓴 정기 점검 프로세스의 BPMN 파일 하나가 만들어진다.</a:t>
+              <a:t>정기 점검 프로세스는 승인 블록을 그대로 두고 시작과 제안 작업, 승인 뒤의 작업만 새로 그려 BPMN 파일로 완성한다.</a:t>
             </a:r>
           </a:p>
         </p:txBody>
@@ -17977,7 +17977,7 @@
                 <a:ea typeface="맑은 고딕"/>
                 <a:cs typeface="맑은 고딕"/>
               </a:rPr>
-              <a:t>CMMS 정비 오더, 생산팀 공지, 결과 보고를 시스템 레인에 놓는다</a:t>
+              <a:t>정비 오더 등록 · 공지 메일(한 작업)과 결과 보고를 시스템 레인에 놓는다</a:t>
             </a:r>
           </a:p>
         </p:txBody>
@@ -19305,7 +19305,7 @@
                 <a:ea typeface="맑은 고딕"/>
                 <a:cs typeface="맑은 고딕"/>
               </a:rPr>
-              <a:t>제안이 승인을 기다린다</a:t>
+              <a:t>추천안이 승인을 기다린다</a:t>
             </a:r>
           </a:p>
         </p:txBody>
@@ -19871,7 +19871,7 @@
                 <a:ea typeface="맑은 고딕"/>
                 <a:cs typeface="맑은 고딕"/>
               </a:rPr>
-              <a:t>이 실습을 마치면 발주에서 입고와 재고 반영까지를 승인 뒤에 이은 재고 보충 프로세스의 BPMN 파일이 만들어진다.</a:t>
+              <a:t>재고 보충 프로세스의 BPMN 파일은 같은 승인 블록 뒤에 발주에서 입고와 재고 반영까지를 이어 그려 완성한다.</a:t>
             </a:r>
           </a:p>
         </p:txBody>
@@ -20526,7 +20526,7 @@
                 <a:ea typeface="맑은 고딕"/>
                 <a:cs typeface="맑은 고딕"/>
               </a:rPr>
-              <a:t>ERP 발주, 공급사 통지, 입고와 재고 반영, 결과 보고를 차례로 잇는다</a:t>
+              <a:t>ERP 발주 · 공급사 메일(한 작업), 입고 · 재고 반영, 결과 보고를 차례로 잇는다</a:t>
             </a:r>
           </a:p>
         </p:txBody>
@@ -21161,7 +21161,7 @@
                 <a:ea typeface="맑은 고딕"/>
                 <a:cs typeface="맑은 고딕"/>
               </a:rPr>
-              <a:t>이 실습을 마치면 발주와 입고가 처리되어 가용 재고가 재주문점 위로 올라간 처리 건과 그 종료 기록이 남는다.</a:t>
+              <a:t>직접 배포한 재고 보충 프로세스를 실행하면 발주와 입고가 처리되어 가용 재고가 재주문점 위로 올라간 처리 건이 남는다.</a:t>
             </a:r>
           </a:p>
         </p:txBody>
@@ -22695,7 +22695,7 @@
                 <a:ea typeface="맑은 고딕"/>
                 <a:cs typeface="맑은 고딕"/>
               </a:rPr>
-              <a:t>온톨로지가 판단의 재료를 정하고, 에이전트가 그것을 읽어 제안하며, 프로세스가 제안을 끝난 업무로 잇는다.</a:t>
+              <a:t>온톨로지가 판단의 재료를 정하고, 에이전트가 그것을 읽어 제안하며, 프로세스가 추천안을 끝난 업무로 잇는다.</a:t>
             </a:r>
           </a:p>
         </p:txBody>
@@ -22770,7 +22770,7 @@
       </p:sp>
       <p:pic>
         <p:nvPicPr>
-          <p:cNvPr id="6" name="삽화:세층연결.svg" descr="illust_5347051959009341178_1791743711.png"/>
+          <p:cNvPr id="6" name="삽화:세층연결.svg" descr="illust_1839498804498376977_1791743711.png"/>
           <p:cNvPicPr>
             <a:picLocks noChangeAspect="1"/>
           </p:cNvPicPr>
@@ -22976,7 +22976,7 @@
                 <a:ea typeface="맑은 고딕"/>
                 <a:cs typeface="맑은 고딕"/>
               </a:rPr>
-              <a:t>제안을 순서, 책임, 승인, 실행, 기록으로 완결한다</a:t>
+              <a:t>추천안을 순서, 책임, 승인, 실행, 기록으로 완결한다</a:t>
             </a:r>
           </a:p>
         </p:txBody>
@@ -26658,7 +26658,7 @@
                 <a:ea typeface="맑은 고딕"/>
                 <a:cs typeface="맑은 고딕"/>
               </a:rPr>
-              <a:t>• 한 단계 안에서 제안 하나를 만든다</a:t>
+              <a:t>• 한 단계 안에서 추천안 하나를 만든다</a:t>
             </a:r>
           </a:p>
         </p:txBody>
@@ -27140,7 +27140,7 @@
                 <a:ea typeface="맑은 고딕"/>
                 <a:cs typeface="맑은 고딕"/>
               </a:rPr>
-              <a:t>에이전트 쪽의 장치가 이 처리 건에서 한 일</a:t>
+              <a:t>두 쪽의 장치가 이 처리 건에서 한 일</a:t>
             </a:r>
           </a:p>
         </p:txBody>
@@ -27179,7 +27179,7 @@
                 <a:ea typeface="맑은 고딕"/>
                 <a:cs typeface="맑은 고딕"/>
               </a:rPr>
-              <a:t>에이전트 실행, 스킬, MCP는 에이전트 단계 하나 안에서 일했고, 명세와 시나리오는 그 실행보다 앞서 일을 마쳤다.</a:t>
+              <a:t>에이전트 쪽의 장치는 둘째 자리 하나에서 일했고, 프로세스 쪽의 장치는 경보에서 끝까지의 진행과 승인과 실행을 남겼다.</a:t>
             </a:r>
           </a:p>
         </p:txBody>
@@ -27252,37 +27252,30 @@
           </a:p>
         </p:txBody>
       </p:sp>
-      <p:sp>
-        <p:nvSpPr>
-          <p:cNvPr id="6" name="Rounded Rectangle 5"/>
-          <p:cNvSpPr/>
-          <p:nvPr/>
-        </p:nvSpPr>
-        <p:spPr>
-          <a:xfrm>
-            <a:off x="548640" y="1961387"/>
-            <a:ext cx="11094415" cy="347472"/>
-          </a:xfrm>
-          <a:prstGeom prst="roundRect">
-            <a:avLst>
-              <a:gd name="adj" fmla="val 12000"/>
-            </a:avLst>
-          </a:prstGeom>
-          <a:solidFill>
-            <a:srgbClr val="13294B"/>
-          </a:solidFill>
-          <a:ln>
-            <a:noFill/>
-          </a:ln>
-        </p:spPr>
-        <p:txBody>
-          <a:bodyPr rtlCol="0" anchor="ctr"/>
-          <a:lstStyle/>
-          <a:p>
-            <a:pPr algn="ctr"/>
-          </a:p>
-        </p:txBody>
-      </p:sp>
+      <p:pic>
+        <p:nvPicPr>
+          <p:cNvPr id="6" name="삽화:장치자리.svg" descr="illust_7021465128722940694_1791770880.png"/>
+          <p:cNvPicPr>
+            <a:picLocks noChangeAspect="1"/>
+          </p:cNvPicPr>
+          <p:nvPr/>
+        </p:nvPicPr>
+        <p:blipFill>
+          <a:blip r:embed="rId3"/>
+          <a:stretch>
+            <a:fillRect/>
+          </a:stretch>
+        </p:blipFill>
+        <p:spPr>
+          <a:xfrm>
+            <a:off x="641100" y="1627632"/>
+            <a:ext cx="10909495" cy="4727448"/>
+          </a:xfrm>
+          <a:prstGeom prst="rect">
+            <a:avLst/>
+          </a:prstGeom>
+        </p:spPr>
+      </p:pic>
       <p:sp>
         <p:nvSpPr>
           <p:cNvPr id="7" name="TextBox 6"/>
@@ -27291,33 +27284,57 @@
         </p:nvSpPr>
         <p:spPr>
           <a:xfrm>
-            <a:off x="685800" y="1961387"/>
-            <a:ext cx="2514600" cy="347472"/>
-          </a:xfrm>
-          <a:prstGeom prst="rect">
-            <a:avLst/>
-          </a:prstGeom>
-          <a:noFill/>
-        </p:spPr>
-        <p:txBody>
-          <a:bodyPr wrap="square" anchor="ctr"/>
-          <a:lstStyle/>
-          <a:p>
-            <a:pPr algn="l">
-              <a:lnSpc>
-                <a:spcPct val="110000"/>
-              </a:lnSpc>
-            </a:pPr>
-            <a:r>
-              <a:rPr sz="1300" b="1">
-                <a:solidFill>
-                  <a:srgbClr val="FFFFFF"/>
-                </a:solidFill>
-                <a:latin typeface="맑은 고딕"/>
-                <a:ea typeface="맑은 고딕"/>
-                <a:cs typeface="맑은 고딕"/>
-              </a:rPr>
-              <a:t>장치</a:t>
+            <a:off x="1404764" y="1627632"/>
+            <a:ext cx="9382165" cy="507618"/>
+          </a:xfrm>
+          <a:prstGeom prst="rect">
+            <a:avLst/>
+          </a:prstGeom>
+          <a:noFill/>
+        </p:spPr>
+        <p:txBody>
+          <a:bodyPr wrap="square" anchor="t"/>
+          <a:lstStyle/>
+          <a:p>
+            <a:pPr algn="ctr">
+              <a:lnSpc>
+                <a:spcPct val="110000"/>
+              </a:lnSpc>
+              <a:spcAft>
+                <a:spcPts val="100"/>
+              </a:spcAft>
+            </a:pPr>
+            <a:r>
+              <a:rPr sz="1350" b="1">
+                <a:solidFill>
+                  <a:srgbClr val="1A6FC4"/>
+                </a:solidFill>
+                <a:latin typeface="맑은 고딕"/>
+                <a:ea typeface="맑은 고딕"/>
+                <a:cs typeface="맑은 고딕"/>
+              </a:rPr>
+              <a:t>프로세스 정의와 인스턴스</a:t>
+            </a:r>
+          </a:p>
+          <a:p>
+            <a:pPr algn="ctr">
+              <a:lnSpc>
+                <a:spcPct val="110000"/>
+              </a:lnSpc>
+              <a:spcAft>
+                <a:spcPts val="100"/>
+              </a:spcAft>
+            </a:pPr>
+            <a:r>
+              <a:rPr sz="1100" b="0">
+                <a:solidFill>
+                  <a:srgbClr val="556175"/>
+                </a:solidFill>
+                <a:latin typeface="맑은 고딕"/>
+                <a:ea typeface="맑은 고딕"/>
+                <a:cs typeface="맑은 고딕"/>
+              </a:rPr>
+              <a:t>c3_cooling: 작업 9, 갈림 2, 타이머 1 · 경보 ALT-hyd01-0026-767a로 열려 E_end에서 닫힌 한 건</a:t>
             </a:r>
           </a:p>
         </p:txBody>
@@ -27330,65 +27347,121 @@
         </p:nvSpPr>
         <p:spPr>
           <a:xfrm>
-            <a:off x="3200400" y="1961387"/>
-            <a:ext cx="8442655" cy="347472"/>
-          </a:xfrm>
-          <a:prstGeom prst="rect">
-            <a:avLst/>
-          </a:prstGeom>
-          <a:noFill/>
-        </p:spPr>
-        <p:txBody>
-          <a:bodyPr wrap="square" anchor="ctr"/>
-          <a:lstStyle/>
-          <a:p>
-            <a:pPr algn="l">
-              <a:lnSpc>
-                <a:spcPct val="110000"/>
-              </a:lnSpc>
-            </a:pPr>
-            <a:r>
-              <a:rPr sz="1300" b="1">
-                <a:solidFill>
-                  <a:srgbClr val="FFFFFF"/>
-                </a:solidFill>
-                <a:latin typeface="맑은 고딕"/>
-                <a:ea typeface="맑은 고딕"/>
-                <a:cs typeface="맑은 고딕"/>
-              </a:rPr>
-              <a:t>이 처리 건에서 한 일</a:t>
-            </a:r>
-          </a:p>
-        </p:txBody>
-      </p:sp>
-      <p:sp>
-        <p:nvSpPr>
-          <p:cNvPr id="9" name="Rounded Rectangle 8"/>
-          <p:cNvSpPr/>
-          <p:nvPr/>
-        </p:nvSpPr>
-        <p:spPr>
-          <a:xfrm>
-            <a:off x="548640" y="2395727"/>
-            <a:ext cx="11094415" cy="850392"/>
-          </a:xfrm>
-          <a:prstGeom prst="roundRect">
-            <a:avLst>
-              <a:gd name="adj" fmla="val 8000"/>
-            </a:avLst>
-          </a:prstGeom>
-          <a:solidFill>
-            <a:srgbClr val="F3F6F9"/>
-          </a:solidFill>
-          <a:ln>
-            <a:noFill/>
-          </a:ln>
-        </p:spPr>
-        <p:txBody>
-          <a:bodyPr rtlCol="0" anchor="ctr"/>
-          <a:lstStyle/>
-          <a:p>
-            <a:pPr algn="ctr"/>
+            <a:off x="3232105" y="2431298"/>
+            <a:ext cx="1636424" cy="507618"/>
+          </a:xfrm>
+          <a:prstGeom prst="rect">
+            <a:avLst/>
+          </a:prstGeom>
+          <a:noFill/>
+        </p:spPr>
+        <p:txBody>
+          <a:bodyPr wrap="square" anchor="t"/>
+          <a:lstStyle/>
+          <a:p>
+            <a:pPr algn="ctr">
+              <a:lnSpc>
+                <a:spcPct val="110000"/>
+              </a:lnSpc>
+              <a:spcAft>
+                <a:spcPts val="100"/>
+              </a:spcAft>
+            </a:pPr>
+            <a:r>
+              <a:rPr sz="1350" b="1">
+                <a:solidFill>
+                  <a:srgbClr val="13294B"/>
+                </a:solidFill>
+                <a:latin typeface="맑은 고딕"/>
+                <a:ea typeface="맑은 고딕"/>
+                <a:cs typeface="맑은 고딕"/>
+              </a:rPr>
+              <a:t>승인 기록</a:t>
+            </a:r>
+          </a:p>
+          <a:p>
+            <a:pPr algn="ctr">
+              <a:lnSpc>
+                <a:spcPct val="110000"/>
+              </a:lnSpc>
+              <a:spcAft>
+                <a:spcPts val="100"/>
+              </a:spcAft>
+            </a:pPr>
+            <a:r>
+              <a:rPr sz="1100" b="0">
+                <a:solidFill>
+                  <a:srgbClr val="556175"/>
+                </a:solidFill>
+                <a:latin typeface="맑은 고딕"/>
+                <a:ea typeface="맑은 고딕"/>
+                <a:cs typeface="맑은 고딕"/>
+              </a:rPr>
+              <a:t>역할 role:operator</a:t>
+            </a:r>
+          </a:p>
+        </p:txBody>
+      </p:sp>
+      <p:sp>
+        <p:nvSpPr>
+          <p:cNvPr id="9" name="TextBox 8"/>
+          <p:cNvSpPr txBox="1"/>
+          <p:nvPr/>
+        </p:nvSpPr>
+        <p:spPr>
+          <a:xfrm>
+            <a:off x="5032171" y="2431298"/>
+            <a:ext cx="3491038" cy="507618"/>
+          </a:xfrm>
+          <a:prstGeom prst="rect">
+            <a:avLst/>
+          </a:prstGeom>
+          <a:noFill/>
+        </p:spPr>
+        <p:txBody>
+          <a:bodyPr wrap="square" anchor="t"/>
+          <a:lstStyle/>
+          <a:p>
+            <a:pPr algn="ctr">
+              <a:lnSpc>
+                <a:spcPct val="110000"/>
+              </a:lnSpc>
+              <a:spcAft>
+                <a:spcPts val="100"/>
+              </a:spcAft>
+            </a:pPr>
+            <a:r>
+              <a:rPr sz="1350" b="1">
+                <a:solidFill>
+                  <a:srgbClr val="13294B"/>
+                </a:solidFill>
+                <a:latin typeface="맑은 고딕"/>
+                <a:ea typeface="맑은 고딕"/>
+                <a:cs typeface="맑은 고딕"/>
+              </a:rPr>
+              <a:t>시스템 실행</a:t>
+            </a:r>
+          </a:p>
+          <a:p>
+            <a:pPr algn="ctr">
+              <a:lnSpc>
+                <a:spcPct val="110000"/>
+              </a:lnSpc>
+              <a:spcAft>
+                <a:spcPts val="100"/>
+              </a:spcAft>
+            </a:pPr>
+            <a:r>
+              <a:rPr sz="1100" b="0">
+                <a:solidFill>
+                  <a:srgbClr val="556175"/>
+                </a:solidFill>
+                <a:latin typeface="맑은 고딕"/>
+                <a:ea typeface="맑은 고딕"/>
+                <a:cs typeface="맑은 고딕"/>
+              </a:rPr>
+              <a:t>CMD-1010-0001-01d1 · WO-1010-1198</a:t>
+            </a:r>
           </a:p>
         </p:txBody>
       </p:sp>
@@ -27400,25 +27473,28 @@
         </p:nvSpPr>
         <p:spPr>
           <a:xfrm>
-            <a:off x="685800" y="2363723"/>
-            <a:ext cx="2514600" cy="914400"/>
-          </a:xfrm>
-          <a:prstGeom prst="rect">
-            <a:avLst/>
-          </a:prstGeom>
-          <a:noFill/>
-        </p:spPr>
-        <p:txBody>
-          <a:bodyPr wrap="square" anchor="ctr"/>
-          <a:lstStyle/>
-          <a:p>
-            <a:pPr algn="l">
-              <a:lnSpc>
-                <a:spcPct val="110000"/>
-              </a:lnSpc>
-            </a:pPr>
-            <a:r>
-              <a:rPr sz="1600" b="1">
+            <a:off x="777468" y="4582287"/>
+            <a:ext cx="1090949" cy="337185"/>
+          </a:xfrm>
+          <a:prstGeom prst="rect">
+            <a:avLst/>
+          </a:prstGeom>
+          <a:noFill/>
+        </p:spPr>
+        <p:txBody>
+          <a:bodyPr wrap="square" anchor="t"/>
+          <a:lstStyle/>
+          <a:p>
+            <a:pPr algn="ctr">
+              <a:lnSpc>
+                <a:spcPct val="110000"/>
+              </a:lnSpc>
+              <a:spcAft>
+                <a:spcPts val="100"/>
+              </a:spcAft>
+            </a:pPr>
+            <a:r>
+              <a:rPr sz="1350" b="1">
                 <a:solidFill>
                   <a:srgbClr val="13294B"/>
                 </a:solidFill>
@@ -27426,7 +27502,7 @@
                 <a:ea typeface="맑은 고딕"/>
                 <a:cs typeface="맑은 고딕"/>
               </a:rPr>
-              <a:t>에이전트 실행</a:t>
+              <a:t>경보</a:t>
             </a:r>
           </a:p>
         </p:txBody>
@@ -27439,65 +27515,79 @@
         </p:nvSpPr>
         <p:spPr>
           <a:xfrm>
-            <a:off x="3200400" y="2363723"/>
-            <a:ext cx="8351215" cy="914400"/>
-          </a:xfrm>
-          <a:prstGeom prst="rect">
-            <a:avLst/>
-          </a:prstGeom>
-          <a:noFill/>
-        </p:spPr>
-        <p:txBody>
-          <a:bodyPr wrap="square" anchor="ctr"/>
-          <a:lstStyle/>
-          <a:p>
-            <a:pPr algn="l">
-              <a:lnSpc>
-                <a:spcPct val="110000"/>
-              </a:lnSpc>
-            </a:pPr>
-            <a:r>
-              <a:rPr sz="1400" b="0">
-                <a:solidFill>
-                  <a:srgbClr val="1F2A3A"/>
-                </a:solidFill>
-                <a:latin typeface="맑은 고딕"/>
-                <a:ea typeface="맑은 고딕"/>
-                <a:cs typeface="맑은 고딕"/>
-              </a:rPr>
-              <a:t>agent:cooling이 도구를 10번 불러 추천안을 제출했다</a:t>
-            </a:r>
-          </a:p>
-        </p:txBody>
-      </p:sp>
-      <p:sp>
-        <p:nvSpPr>
-          <p:cNvPr id="12" name="Rounded Rectangle 11"/>
-          <p:cNvSpPr/>
-          <p:nvPr/>
-        </p:nvSpPr>
-        <p:spPr>
-          <a:xfrm>
-            <a:off x="548640" y="3310127"/>
-            <a:ext cx="11094415" cy="850392"/>
-          </a:xfrm>
-          <a:prstGeom prst="roundRect">
-            <a:avLst>
-              <a:gd name="adj" fmla="val 8000"/>
-            </a:avLst>
-          </a:prstGeom>
-          <a:solidFill>
-            <a:srgbClr val="F3F6F9"/>
-          </a:solidFill>
-          <a:ln>
-            <a:noFill/>
-          </a:ln>
-        </p:spPr>
-        <p:txBody>
-          <a:bodyPr rtlCol="0" anchor="ctr"/>
-          <a:lstStyle/>
-          <a:p>
-            <a:pPr algn="ctr"/>
+            <a:off x="2032060" y="4582287"/>
+            <a:ext cx="1309139" cy="337185"/>
+          </a:xfrm>
+          <a:prstGeom prst="rect">
+            <a:avLst/>
+          </a:prstGeom>
+          <a:noFill/>
+        </p:spPr>
+        <p:txBody>
+          <a:bodyPr wrap="square" anchor="t"/>
+          <a:lstStyle/>
+          <a:p>
+            <a:pPr algn="ctr">
+              <a:lnSpc>
+                <a:spcPct val="110000"/>
+              </a:lnSpc>
+              <a:spcAft>
+                <a:spcPts val="100"/>
+              </a:spcAft>
+            </a:pPr>
+            <a:r>
+              <a:rPr sz="1350" b="1">
+                <a:solidFill>
+                  <a:srgbClr val="13294B"/>
+                </a:solidFill>
+                <a:latin typeface="맑은 고딕"/>
+                <a:ea typeface="맑은 고딕"/>
+                <a:cs typeface="맑은 고딕"/>
+              </a:rPr>
+              <a:t>진단 · 제안</a:t>
+            </a:r>
+          </a:p>
+        </p:txBody>
+      </p:sp>
+      <p:sp>
+        <p:nvSpPr>
+          <p:cNvPr id="12" name="TextBox 11"/>
+          <p:cNvSpPr txBox="1"/>
+          <p:nvPr/>
+        </p:nvSpPr>
+        <p:spPr>
+          <a:xfrm>
+            <a:off x="3504842" y="4582287"/>
+            <a:ext cx="1090949" cy="337185"/>
+          </a:xfrm>
+          <a:prstGeom prst="rect">
+            <a:avLst/>
+          </a:prstGeom>
+          <a:noFill/>
+        </p:spPr>
+        <p:txBody>
+          <a:bodyPr wrap="square" anchor="t"/>
+          <a:lstStyle/>
+          <a:p>
+            <a:pPr algn="ctr">
+              <a:lnSpc>
+                <a:spcPct val="110000"/>
+              </a:lnSpc>
+              <a:spcAft>
+                <a:spcPts val="100"/>
+              </a:spcAft>
+            </a:pPr>
+            <a:r>
+              <a:rPr sz="1350" b="1">
+                <a:solidFill>
+                  <a:srgbClr val="13294B"/>
+                </a:solidFill>
+                <a:latin typeface="맑은 고딕"/>
+                <a:ea typeface="맑은 고딕"/>
+                <a:cs typeface="맑은 고딕"/>
+              </a:rPr>
+              <a:t>승인</a:t>
+            </a:r>
           </a:p>
         </p:txBody>
       </p:sp>
@@ -27509,25 +27599,28 @@
         </p:nvSpPr>
         <p:spPr>
           <a:xfrm>
-            <a:off x="685800" y="3278123"/>
-            <a:ext cx="2514600" cy="914400"/>
-          </a:xfrm>
-          <a:prstGeom prst="rect">
-            <a:avLst/>
-          </a:prstGeom>
-          <a:noFill/>
-        </p:spPr>
-        <p:txBody>
-          <a:bodyPr wrap="square" anchor="ctr"/>
-          <a:lstStyle/>
-          <a:p>
-            <a:pPr algn="l">
-              <a:lnSpc>
-                <a:spcPct val="110000"/>
-              </a:lnSpc>
-            </a:pPr>
-            <a:r>
-              <a:rPr sz="1600" b="1">
+            <a:off x="4759434" y="4582287"/>
+            <a:ext cx="1309139" cy="337185"/>
+          </a:xfrm>
+          <a:prstGeom prst="rect">
+            <a:avLst/>
+          </a:prstGeom>
+          <a:noFill/>
+        </p:spPr>
+        <p:txBody>
+          <a:bodyPr wrap="square" anchor="t"/>
+          <a:lstStyle/>
+          <a:p>
+            <a:pPr algn="ctr">
+              <a:lnSpc>
+                <a:spcPct val="110000"/>
+              </a:lnSpc>
+              <a:spcAft>
+                <a:spcPts val="100"/>
+              </a:spcAft>
+            </a:pPr>
+            <a:r>
+              <a:rPr sz="1350" b="1">
                 <a:solidFill>
                   <a:srgbClr val="13294B"/>
                 </a:solidFill>
@@ -27535,7 +27628,7 @@
                 <a:ea typeface="맑은 고딕"/>
                 <a:cs typeface="맑은 고딕"/>
               </a:rPr>
-              <a:t>스킬</a:t>
+              <a:t>냉각 명령</a:t>
             </a:r>
           </a:p>
         </p:txBody>
@@ -27548,65 +27641,79 @@
         </p:nvSpPr>
         <p:spPr>
           <a:xfrm>
-            <a:off x="3200400" y="3278123"/>
-            <a:ext cx="8351215" cy="914400"/>
-          </a:xfrm>
-          <a:prstGeom prst="rect">
-            <a:avLst/>
-          </a:prstGeom>
-          <a:noFill/>
-        </p:spPr>
-        <p:txBody>
-          <a:bodyPr wrap="square" anchor="ctr"/>
-          <a:lstStyle/>
-          <a:p>
-            <a:pPr algn="l">
-              <a:lnSpc>
-                <a:spcPct val="110000"/>
-              </a:lnSpc>
-            </a:pPr>
-            <a:r>
-              <a:rPr sz="1400" b="0">
-                <a:solidFill>
-                  <a:srgbClr val="1F2A3A"/>
-                </a:solidFill>
-                <a:latin typeface="맑은 고딕"/>
-                <a:ea typeface="맑은 고딕"/>
-                <a:cs typeface="맑은 고딕"/>
-              </a:rPr>
-              <a:t>첫 호출로 cooling-emergency-response 스킬을 읽어 일의 순서를 따랐다</a:t>
-            </a:r>
-          </a:p>
-        </p:txBody>
-      </p:sp>
-      <p:sp>
-        <p:nvSpPr>
-          <p:cNvPr id="15" name="Rounded Rectangle 14"/>
-          <p:cNvSpPr/>
-          <p:nvPr/>
-        </p:nvSpPr>
-        <p:spPr>
-          <a:xfrm>
-            <a:off x="548640" y="4224527"/>
-            <a:ext cx="11094415" cy="850392"/>
-          </a:xfrm>
-          <a:prstGeom prst="roundRect">
-            <a:avLst>
-              <a:gd name="adj" fmla="val 8000"/>
-            </a:avLst>
-          </a:prstGeom>
-          <a:solidFill>
-            <a:srgbClr val="F3F6F9"/>
-          </a:solidFill>
-          <a:ln>
-            <a:noFill/>
-          </a:ln>
-        </p:spPr>
-        <p:txBody>
-          <a:bodyPr rtlCol="0" anchor="ctr"/>
-          <a:lstStyle/>
-          <a:p>
-            <a:pPr algn="ctr"/>
+            <a:off x="6232216" y="4582287"/>
+            <a:ext cx="1090949" cy="337185"/>
+          </a:xfrm>
+          <a:prstGeom prst="rect">
+            <a:avLst/>
+          </a:prstGeom>
+          <a:noFill/>
+        </p:spPr>
+        <p:txBody>
+          <a:bodyPr wrap="square" anchor="t"/>
+          <a:lstStyle/>
+          <a:p>
+            <a:pPr algn="ctr">
+              <a:lnSpc>
+                <a:spcPct val="110000"/>
+              </a:lnSpc>
+              <a:spcAft>
+                <a:spcPts val="100"/>
+              </a:spcAft>
+            </a:pPr>
+            <a:r>
+              <a:rPr sz="1350" b="1">
+                <a:solidFill>
+                  <a:srgbClr val="13294B"/>
+                </a:solidFill>
+                <a:latin typeface="맑은 고딕"/>
+                <a:ea typeface="맑은 고딕"/>
+                <a:cs typeface="맑은 고딕"/>
+              </a:rPr>
+              <a:t>재관측</a:t>
+            </a:r>
+          </a:p>
+        </p:txBody>
+      </p:sp>
+      <p:sp>
+        <p:nvSpPr>
+          <p:cNvPr id="15" name="TextBox 14"/>
+          <p:cNvSpPr txBox="1"/>
+          <p:nvPr/>
+        </p:nvSpPr>
+        <p:spPr>
+          <a:xfrm>
+            <a:off x="7486808" y="4582287"/>
+            <a:ext cx="1309139" cy="337185"/>
+          </a:xfrm>
+          <a:prstGeom prst="rect">
+            <a:avLst/>
+          </a:prstGeom>
+          <a:noFill/>
+        </p:spPr>
+        <p:txBody>
+          <a:bodyPr wrap="square" anchor="t"/>
+          <a:lstStyle/>
+          <a:p>
+            <a:pPr algn="ctr">
+              <a:lnSpc>
+                <a:spcPct val="110000"/>
+              </a:lnSpc>
+              <a:spcAft>
+                <a:spcPts val="100"/>
+              </a:spcAft>
+            </a:pPr>
+            <a:r>
+              <a:rPr sz="1350" b="1">
+                <a:solidFill>
+                  <a:srgbClr val="13294B"/>
+                </a:solidFill>
+                <a:latin typeface="맑은 고딕"/>
+                <a:ea typeface="맑은 고딕"/>
+                <a:cs typeface="맑은 고딕"/>
+              </a:rPr>
+              <a:t>작업지시</a:t>
+            </a:r>
           </a:p>
         </p:txBody>
       </p:sp>
@@ -27618,25 +27725,28 @@
         </p:nvSpPr>
         <p:spPr>
           <a:xfrm>
-            <a:off x="685800" y="4192523"/>
-            <a:ext cx="2514600" cy="914400"/>
-          </a:xfrm>
-          <a:prstGeom prst="rect">
-            <a:avLst/>
-          </a:prstGeom>
-          <a:noFill/>
-        </p:spPr>
-        <p:txBody>
-          <a:bodyPr wrap="square" anchor="ctr"/>
-          <a:lstStyle/>
-          <a:p>
-            <a:pPr algn="l">
-              <a:lnSpc>
-                <a:spcPct val="110000"/>
-              </a:lnSpc>
-            </a:pPr>
-            <a:r>
-              <a:rPr sz="1600" b="1">
+            <a:off x="8850495" y="4582287"/>
+            <a:ext cx="1309139" cy="337185"/>
+          </a:xfrm>
+          <a:prstGeom prst="rect">
+            <a:avLst/>
+          </a:prstGeom>
+          <a:noFill/>
+        </p:spPr>
+        <p:txBody>
+          <a:bodyPr wrap="square" anchor="t"/>
+          <a:lstStyle/>
+          <a:p>
+            <a:pPr algn="ctr">
+              <a:lnSpc>
+                <a:spcPct val="110000"/>
+              </a:lnSpc>
+              <a:spcAft>
+                <a:spcPts val="100"/>
+              </a:spcAft>
+            </a:pPr>
+            <a:r>
+              <a:rPr sz="1350" b="1">
                 <a:solidFill>
                   <a:srgbClr val="13294B"/>
                 </a:solidFill>
@@ -27644,7 +27754,7 @@
                 <a:ea typeface="맑은 고딕"/>
                 <a:cs typeface="맑은 고딕"/>
               </a:rPr>
-              <a:t>MCP</a:t>
+              <a:t>결과 보고</a:t>
             </a:r>
           </a:p>
         </p:txBody>
@@ -27657,65 +27767,142 @@
         </p:nvSpPr>
         <p:spPr>
           <a:xfrm>
-            <a:off x="3200400" y="4192523"/>
-            <a:ext cx="8351215" cy="914400"/>
-          </a:xfrm>
-          <a:prstGeom prst="rect">
-            <a:avLst/>
-          </a:prstGeom>
-          <a:noFill/>
-        </p:spPr>
-        <p:txBody>
-          <a:bodyPr wrap="square" anchor="ctr"/>
-          <a:lstStyle/>
-          <a:p>
-            <a:pPr algn="l">
-              <a:lnSpc>
-                <a:spcPct val="110000"/>
-              </a:lnSpc>
-            </a:pPr>
-            <a:r>
-              <a:rPr sz="1400" b="0">
-                <a:solidFill>
-                  <a:srgbClr val="1F2A3A"/>
-                </a:solidFill>
-                <a:latin typeface="맑은 고딕"/>
-                <a:ea typeface="맑은 고딕"/>
-                <a:cs typeface="맑은 고딕"/>
-              </a:rPr>
-              <a:t>hyd-dmn과 enterprise 서버의 도구로 지식과 값을 읽었다</a:t>
-            </a:r>
-          </a:p>
-        </p:txBody>
-      </p:sp>
-      <p:sp>
-        <p:nvSpPr>
-          <p:cNvPr id="18" name="Rounded Rectangle 17"/>
-          <p:cNvSpPr/>
-          <p:nvPr/>
-        </p:nvSpPr>
-        <p:spPr>
-          <a:xfrm>
-            <a:off x="548640" y="5138927"/>
-            <a:ext cx="11094415" cy="850392"/>
-          </a:xfrm>
-          <a:prstGeom prst="roundRect">
-            <a:avLst>
-              <a:gd name="adj" fmla="val 8000"/>
-            </a:avLst>
-          </a:prstGeom>
-          <a:solidFill>
-            <a:srgbClr val="E7F3FD"/>
-          </a:solidFill>
-          <a:ln>
-            <a:noFill/>
-          </a:ln>
-        </p:spPr>
-        <p:txBody>
-          <a:bodyPr rtlCol="0" anchor="ctr"/>
-          <a:lstStyle/>
-          <a:p>
-            <a:pPr algn="ctr"/>
+            <a:off x="10432371" y="4582287"/>
+            <a:ext cx="872759" cy="337185"/>
+          </a:xfrm>
+          <a:prstGeom prst="rect">
+            <a:avLst/>
+          </a:prstGeom>
+          <a:noFill/>
+        </p:spPr>
+        <p:txBody>
+          <a:bodyPr wrap="square" anchor="t"/>
+          <a:lstStyle/>
+          <a:p>
+            <a:pPr algn="ctr">
+              <a:lnSpc>
+                <a:spcPct val="110000"/>
+              </a:lnSpc>
+              <a:spcAft>
+                <a:spcPts val="100"/>
+              </a:spcAft>
+            </a:pPr>
+            <a:r>
+              <a:rPr sz="1350" b="1">
+                <a:solidFill>
+                  <a:srgbClr val="13294B"/>
+                </a:solidFill>
+                <a:latin typeface="맑은 고딕"/>
+                <a:ea typeface="맑은 고딕"/>
+                <a:cs typeface="맑은 고딕"/>
+              </a:rPr>
+              <a:t>끝</a:t>
+            </a:r>
+          </a:p>
+        </p:txBody>
+      </p:sp>
+      <p:sp>
+        <p:nvSpPr>
+          <p:cNvPr id="18" name="TextBox 17"/>
+          <p:cNvSpPr txBox="1"/>
+          <p:nvPr/>
+        </p:nvSpPr>
+        <p:spPr>
+          <a:xfrm>
+            <a:off x="2441166" y="4913208"/>
+            <a:ext cx="2618278" cy="1018920"/>
+          </a:xfrm>
+          <a:prstGeom prst="rect">
+            <a:avLst/>
+          </a:prstGeom>
+          <a:noFill/>
+        </p:spPr>
+        <p:txBody>
+          <a:bodyPr wrap="square" anchor="t"/>
+          <a:lstStyle/>
+          <a:p>
+            <a:pPr algn="ctr">
+              <a:lnSpc>
+                <a:spcPct val="110000"/>
+              </a:lnSpc>
+              <a:spcAft>
+                <a:spcPts val="100"/>
+              </a:spcAft>
+            </a:pPr>
+            <a:r>
+              <a:rPr sz="1350" b="1">
+                <a:solidFill>
+                  <a:srgbClr val="1A6FC4"/>
+                </a:solidFill>
+                <a:latin typeface="맑은 고딕"/>
+                <a:ea typeface="맑은 고딕"/>
+                <a:cs typeface="맑은 고딕"/>
+              </a:rPr>
+              <a:t>에이전트 실행 · 스킬 · MCP</a:t>
+            </a:r>
+          </a:p>
+          <a:p>
+            <a:pPr algn="ctr">
+              <a:lnSpc>
+                <a:spcPct val="110000"/>
+              </a:lnSpc>
+              <a:spcAft>
+                <a:spcPts val="100"/>
+              </a:spcAft>
+            </a:pPr>
+            <a:r>
+              <a:rPr sz="1100" b="0">
+                <a:solidFill>
+                  <a:srgbClr val="556175"/>
+                </a:solidFill>
+                <a:latin typeface="맑은 고딕"/>
+                <a:ea typeface="맑은 고딕"/>
+                <a:cs typeface="맑은 고딕"/>
+              </a:rPr>
+              <a:t>agent:cooling이 도구를 10번 불렀다</a:t>
+            </a:r>
+          </a:p>
+          <a:p>
+            <a:pPr algn="ctr">
+              <a:lnSpc>
+                <a:spcPct val="110000"/>
+              </a:lnSpc>
+              <a:spcAft>
+                <a:spcPts val="100"/>
+              </a:spcAft>
+            </a:pPr>
+            <a:r>
+              <a:rPr sz="1100" b="0">
+                <a:solidFill>
+                  <a:srgbClr val="556175"/>
+                </a:solidFill>
+                <a:latin typeface="맑은 고딕"/>
+                <a:ea typeface="맑은 고딕"/>
+                <a:cs typeface="맑은 고딕"/>
+              </a:rPr>
+              <a:t>첫 호출로 스킬 문서를 읽었다</a:t>
+            </a:r>
+          </a:p>
+          <a:p>
+            <a:pPr algn="ctr">
+              <a:lnSpc>
+                <a:spcPct val="110000"/>
+              </a:lnSpc>
+              <a:spcAft>
+                <a:spcPts val="100"/>
+              </a:spcAft>
+            </a:pPr>
+            <a:r>
+              <a:rPr sz="1100" b="0">
+                <a:solidFill>
+                  <a:srgbClr val="556175"/>
+                </a:solidFill>
+                <a:latin typeface="맑은 고딕"/>
+                <a:ea typeface="맑은 고딕"/>
+                <a:cs typeface="맑은 고딕"/>
+              </a:rPr>
+              <a:t>hyd-dmn · enterprise의 도구로 읽었다</a:t>
+            </a:r>
           </a:p>
         </p:txBody>
       </p:sp>
@@ -27727,25 +27914,28 @@
         </p:nvSpPr>
         <p:spPr>
           <a:xfrm>
-            <a:off x="685800" y="5106923"/>
-            <a:ext cx="2514600" cy="914400"/>
-          </a:xfrm>
-          <a:prstGeom prst="rect">
-            <a:avLst/>
-          </a:prstGeom>
-          <a:noFill/>
-        </p:spPr>
-        <p:txBody>
-          <a:bodyPr wrap="square" anchor="ctr"/>
-          <a:lstStyle/>
-          <a:p>
-            <a:pPr algn="l">
-              <a:lnSpc>
-                <a:spcPct val="110000"/>
-              </a:lnSpc>
-            </a:pPr>
-            <a:r>
-              <a:rPr sz="1600" b="1">
+            <a:off x="695647" y="5787786"/>
+            <a:ext cx="1636424" cy="507618"/>
+          </a:xfrm>
+          <a:prstGeom prst="rect">
+            <a:avLst/>
+          </a:prstGeom>
+          <a:noFill/>
+        </p:spPr>
+        <p:txBody>
+          <a:bodyPr wrap="square" anchor="t"/>
+          <a:lstStyle/>
+          <a:p>
+            <a:pPr algn="ctr">
+              <a:lnSpc>
+                <a:spcPct val="110000"/>
+              </a:lnSpc>
+              <a:spcAft>
+                <a:spcPts val="100"/>
+              </a:spcAft>
+            </a:pPr>
+            <a:r>
+              <a:rPr sz="1350" b="1">
                 <a:solidFill>
                   <a:srgbClr val="13294B"/>
                 </a:solidFill>
@@ -27756,43 +27946,25 @@
               <a:t>명세와 시나리오</a:t>
             </a:r>
           </a:p>
-        </p:txBody>
-      </p:sp>
-      <p:sp>
-        <p:nvSpPr>
-          <p:cNvPr id="20" name="TextBox 19"/>
-          <p:cNvSpPr txBox="1"/>
-          <p:nvPr/>
-        </p:nvSpPr>
-        <p:spPr>
-          <a:xfrm>
-            <a:off x="3200400" y="5106923"/>
-            <a:ext cx="8351215" cy="914400"/>
-          </a:xfrm>
-          <a:prstGeom prst="rect">
-            <a:avLst/>
-          </a:prstGeom>
-          <a:noFill/>
-        </p:spPr>
-        <p:txBody>
-          <a:bodyPr wrap="square" anchor="ctr"/>
-          <a:lstStyle/>
-          <a:p>
-            <a:pPr algn="l">
-              <a:lnSpc>
-                <a:spcPct val="110000"/>
-              </a:lnSpc>
-            </a:pPr>
-            <a:r>
-              <a:rPr sz="1400" b="0">
-                <a:solidFill>
-                  <a:srgbClr val="1F2A3A"/>
-                </a:solidFill>
-                <a:latin typeface="맑은 고딕"/>
-                <a:ea typeface="맑은 고딕"/>
-                <a:cs typeface="맑은 고딕"/>
-              </a:rPr>
-              <a:t>이 실행에 앞서 출력의 형식과 기대 행동을 정해 두었다</a:t>
+          <a:p>
+            <a:pPr algn="ctr">
+              <a:lnSpc>
+                <a:spcPct val="110000"/>
+              </a:lnSpc>
+              <a:spcAft>
+                <a:spcPts val="100"/>
+              </a:spcAft>
+            </a:pPr>
+            <a:r>
+              <a:rPr sz="1100" b="0">
+                <a:solidFill>
+                  <a:srgbClr val="556175"/>
+                </a:solidFill>
+                <a:latin typeface="맑은 고딕"/>
+                <a:ea typeface="맑은 고딕"/>
+                <a:cs typeface="맑은 고딕"/>
+              </a:rPr>
+              <a:t>실행에 앞서 정했다</a:t>
             </a:r>
           </a:p>
         </p:txBody>
@@ -27857,7 +28029,7 @@
                 <a:ea typeface="맑은 고딕"/>
                 <a:cs typeface="맑은 고딕"/>
               </a:rPr>
-              <a:t>프로세스 쪽의 장치가 이 처리 건에서 한 일</a:t>
+              <a:t>스킬이 정한 순서와 프로세스 정의가 정한 순서</a:t>
             </a:r>
           </a:p>
         </p:txBody>
@@ -27896,7 +28068,7 @@
                 <a:ea typeface="맑은 고딕"/>
                 <a:cs typeface="맑은 고딕"/>
               </a:rPr>
-              <a:t>프로세스 정의는 설계도로, 인스턴스는 진행의 기록으로, 승인은 사람의 결정으로, 시스템 실행은 실제 효과로 남았다.</a:t>
+              <a:t>스킬은 에이전트 단계 안에서 도구를 부르는 순서를, 프로세스 정의는 단계와 단계 사이의 순서를 정한다.</a:t>
             </a:r>
           </a:p>
         </p:txBody>
@@ -27977,13 +28149,567 @@
         </p:nvSpPr>
         <p:spPr>
           <a:xfrm>
-            <a:off x="548640" y="1961387"/>
-            <a:ext cx="11094415" cy="347472"/>
+            <a:off x="548640" y="2579941"/>
+            <a:ext cx="5181447" cy="2822829"/>
           </a:xfrm>
           <a:prstGeom prst="roundRect">
             <a:avLst>
-              <a:gd name="adj" fmla="val 12000"/>
+              <a:gd name="adj" fmla="val 4000"/>
             </a:avLst>
+          </a:prstGeom>
+          <a:solidFill>
+            <a:srgbClr val="F3F6F9"/>
+          </a:solidFill>
+          <a:ln>
+            <a:noFill/>
+          </a:ln>
+        </p:spPr>
+        <p:txBody>
+          <a:bodyPr rtlCol="0" anchor="ctr"/>
+          <a:lstStyle/>
+          <a:p>
+            <a:pPr algn="ctr"/>
+          </a:p>
+        </p:txBody>
+      </p:sp>
+      <p:sp>
+        <p:nvSpPr>
+          <p:cNvPr id="7" name="Oval 6"/>
+          <p:cNvSpPr/>
+          <p:nvPr/>
+        </p:nvSpPr>
+        <p:spPr>
+          <a:xfrm>
+            <a:off x="822959" y="2781109"/>
+            <a:ext cx="731520" cy="731520"/>
+          </a:xfrm>
+          <a:prstGeom prst="ellipse">
+            <a:avLst/>
+          </a:prstGeom>
+          <a:solidFill>
+            <a:srgbClr val="FFFFFF"/>
+          </a:solidFill>
+          <a:ln>
+            <a:noFill/>
+          </a:ln>
+        </p:spPr>
+        <p:txBody>
+          <a:bodyPr rtlCol="0" anchor="ctr"/>
+          <a:lstStyle/>
+          <a:p>
+            <a:pPr algn="ctr"/>
+          </a:p>
+        </p:txBody>
+      </p:sp>
+      <p:pic>
+        <p:nvPicPr>
+          <p:cNvPr id="8" name="아이콘:file-text" descr="file-text_13294B_1.6.png"/>
+          <p:cNvPicPr>
+            <a:picLocks noChangeAspect="1"/>
+          </p:cNvPicPr>
+          <p:nvPr/>
+        </p:nvPicPr>
+        <p:blipFill>
+          <a:blip r:embed="rId3"/>
+          <a:stretch>
+            <a:fillRect/>
+          </a:stretch>
+        </p:blipFill>
+        <p:spPr>
+          <a:xfrm>
+            <a:off x="976579" y="2934728"/>
+            <a:ext cx="424281" cy="424281"/>
+          </a:xfrm>
+          <a:prstGeom prst="rect">
+            <a:avLst/>
+          </a:prstGeom>
+        </p:spPr>
+      </p:pic>
+      <p:sp>
+        <p:nvSpPr>
+          <p:cNvPr id="9" name="TextBox 8"/>
+          <p:cNvSpPr txBox="1"/>
+          <p:nvPr/>
+        </p:nvSpPr>
+        <p:spPr>
+          <a:xfrm>
+            <a:off x="1691640" y="2781109"/>
+            <a:ext cx="3855567" cy="731520"/>
+          </a:xfrm>
+          <a:prstGeom prst="rect">
+            <a:avLst/>
+          </a:prstGeom>
+          <a:noFill/>
+        </p:spPr>
+        <p:txBody>
+          <a:bodyPr wrap="square" anchor="ctr"/>
+          <a:lstStyle/>
+          <a:p>
+            <a:pPr algn="l">
+              <a:lnSpc>
+                <a:spcPct val="110000"/>
+              </a:lnSpc>
+            </a:pPr>
+            <a:r>
+              <a:rPr sz="2000" b="1">
+                <a:solidFill>
+                  <a:srgbClr val="13294B"/>
+                </a:solidFill>
+                <a:latin typeface="맑은 고딕"/>
+                <a:ea typeface="맑은 고딕"/>
+                <a:cs typeface="맑은 고딕"/>
+              </a:rPr>
+              <a:t>스킬</a:t>
+            </a:r>
+          </a:p>
+        </p:txBody>
+      </p:sp>
+      <p:sp>
+        <p:nvSpPr>
+          <p:cNvPr id="10" name="TextBox 9"/>
+          <p:cNvSpPr txBox="1"/>
+          <p:nvPr/>
+        </p:nvSpPr>
+        <p:spPr>
+          <a:xfrm>
+            <a:off x="822959" y="3631501"/>
+            <a:ext cx="4632807" cy="1222629"/>
+          </a:xfrm>
+          <a:prstGeom prst="rect">
+            <a:avLst/>
+          </a:prstGeom>
+          <a:noFill/>
+        </p:spPr>
+        <p:txBody>
+          <a:bodyPr wrap="square" anchor="t"/>
+          <a:lstStyle/>
+          <a:p>
+            <a:pPr algn="l">
+              <a:lnSpc>
+                <a:spcPct val="110000"/>
+              </a:lnSpc>
+              <a:spcAft>
+                <a:spcPts val="600"/>
+              </a:spcAft>
+            </a:pPr>
+            <a:r>
+              <a:rPr sz="1450" b="0">
+                <a:solidFill>
+                  <a:srgbClr val="1F2A3A"/>
+                </a:solidFill>
+                <a:latin typeface="맑은 고딕"/>
+                <a:ea typeface="맑은 고딕"/>
+                <a:cs typeface="맑은 고딕"/>
+              </a:rPr>
+              <a:t>• 진단 → 대안 평가 → 업무 값 조회 → 제출</a:t>
+            </a:r>
+          </a:p>
+          <a:p>
+            <a:pPr algn="l">
+              <a:lnSpc>
+                <a:spcPct val="110000"/>
+              </a:lnSpc>
+              <a:spcAft>
+                <a:spcPts val="600"/>
+              </a:spcAft>
+            </a:pPr>
+            <a:r>
+              <a:rPr sz="1450" b="0">
+                <a:solidFill>
+                  <a:srgbClr val="1F2A3A"/>
+                </a:solidFill>
+                <a:latin typeface="맑은 고딕"/>
+                <a:ea typeface="맑은 고딕"/>
+                <a:cs typeface="맑은 고딕"/>
+              </a:rPr>
+              <a:t>• 이 처리 건의 호출이며 상황에 따라 달라진다</a:t>
+            </a:r>
+          </a:p>
+          <a:p>
+            <a:pPr algn="l">
+              <a:lnSpc>
+                <a:spcPct val="110000"/>
+              </a:lnSpc>
+              <a:spcAft>
+                <a:spcPts val="600"/>
+              </a:spcAft>
+            </a:pPr>
+            <a:r>
+              <a:rPr sz="1450" b="0">
+                <a:solidFill>
+                  <a:srgbClr val="1F2A3A"/>
+                </a:solidFill>
+                <a:latin typeface="맑은 고딕"/>
+                <a:ea typeface="맑은 고딕"/>
+                <a:cs typeface="맑은 고딕"/>
+              </a:rPr>
+              <a:t>• 에이전트가 읽고 따른다</a:t>
+            </a:r>
+          </a:p>
+        </p:txBody>
+      </p:sp>
+      <p:sp>
+        <p:nvSpPr>
+          <p:cNvPr id="11" name="Rounded Rectangle 10"/>
+          <p:cNvSpPr/>
+          <p:nvPr/>
+        </p:nvSpPr>
+        <p:spPr>
+          <a:xfrm>
+            <a:off x="868680" y="4945570"/>
+            <a:ext cx="1371600" cy="292608"/>
+          </a:xfrm>
+          <a:prstGeom prst="roundRect">
+            <a:avLst>
+              <a:gd name="adj" fmla="val 50000"/>
+            </a:avLst>
+          </a:prstGeom>
+          <a:solidFill>
+            <a:srgbClr val="D3D9E1"/>
+          </a:solidFill>
+          <a:ln>
+            <a:noFill/>
+          </a:ln>
+        </p:spPr>
+        <p:txBody>
+          <a:bodyPr rtlCol="0" anchor="ctr"/>
+          <a:lstStyle/>
+          <a:p>
+            <a:pPr algn="ctr"/>
+          </a:p>
+        </p:txBody>
+      </p:sp>
+      <p:sp>
+        <p:nvSpPr>
+          <p:cNvPr id="12" name="TextBox 11"/>
+          <p:cNvSpPr txBox="1"/>
+          <p:nvPr/>
+        </p:nvSpPr>
+        <p:spPr>
+          <a:xfrm>
+            <a:off x="868680" y="4945570"/>
+            <a:ext cx="1371600" cy="292608"/>
+          </a:xfrm>
+          <a:prstGeom prst="rect">
+            <a:avLst/>
+          </a:prstGeom>
+          <a:noFill/>
+        </p:spPr>
+        <p:txBody>
+          <a:bodyPr wrap="square" anchor="ctr"/>
+          <a:lstStyle/>
+          <a:p>
+            <a:pPr algn="ctr">
+              <a:lnSpc>
+                <a:spcPct val="110000"/>
+              </a:lnSpc>
+            </a:pPr>
+            <a:r>
+              <a:rPr sz="1200" b="1">
+                <a:solidFill>
+                  <a:srgbClr val="13294B"/>
+                </a:solidFill>
+                <a:latin typeface="맑은 고딕"/>
+                <a:ea typeface="맑은 고딕"/>
+                <a:cs typeface="맑은 고딕"/>
+              </a:rPr>
+              <a:t>단계 안의 순서</a:t>
+            </a:r>
+          </a:p>
+        </p:txBody>
+      </p:sp>
+      <p:sp>
+        <p:nvSpPr>
+          <p:cNvPr id="13" name="Rounded Rectangle 12"/>
+          <p:cNvSpPr/>
+          <p:nvPr/>
+        </p:nvSpPr>
+        <p:spPr>
+          <a:xfrm>
+            <a:off x="6461607" y="2579941"/>
+            <a:ext cx="5181447" cy="2822829"/>
+          </a:xfrm>
+          <a:prstGeom prst="roundRect">
+            <a:avLst>
+              <a:gd name="adj" fmla="val 4000"/>
+            </a:avLst>
+          </a:prstGeom>
+          <a:solidFill>
+            <a:srgbClr val="E7F3FD"/>
+          </a:solidFill>
+          <a:ln w="28575">
+            <a:solidFill>
+              <a:srgbClr val="5CB8F2"/>
+            </a:solidFill>
+          </a:ln>
+        </p:spPr>
+        <p:txBody>
+          <a:bodyPr rtlCol="0" anchor="ctr"/>
+          <a:lstStyle/>
+          <a:p>
+            <a:pPr algn="ctr"/>
+          </a:p>
+        </p:txBody>
+      </p:sp>
+      <p:sp>
+        <p:nvSpPr>
+          <p:cNvPr id="14" name="Oval 13"/>
+          <p:cNvSpPr/>
+          <p:nvPr/>
+        </p:nvSpPr>
+        <p:spPr>
+          <a:xfrm>
+            <a:off x="6735927" y="2781109"/>
+            <a:ext cx="731520" cy="731520"/>
+          </a:xfrm>
+          <a:prstGeom prst="ellipse">
+            <a:avLst/>
+          </a:prstGeom>
+          <a:solidFill>
+            <a:srgbClr val="5CB8F2"/>
+          </a:solidFill>
+          <a:ln>
+            <a:noFill/>
+          </a:ln>
+        </p:spPr>
+        <p:txBody>
+          <a:bodyPr rtlCol="0" anchor="ctr"/>
+          <a:lstStyle/>
+          <a:p>
+            <a:pPr algn="ctr"/>
+          </a:p>
+        </p:txBody>
+      </p:sp>
+      <p:pic>
+        <p:nvPicPr>
+          <p:cNvPr id="15" name="아이콘:sitemap" descr="sitemap_13294B_1.6.png"/>
+          <p:cNvPicPr>
+            <a:picLocks noChangeAspect="1"/>
+          </p:cNvPicPr>
+          <p:nvPr/>
+        </p:nvPicPr>
+        <p:blipFill>
+          <a:blip r:embed="rId4"/>
+          <a:stretch>
+            <a:fillRect/>
+          </a:stretch>
+        </p:blipFill>
+        <p:spPr>
+          <a:xfrm>
+            <a:off x="6889546" y="2934728"/>
+            <a:ext cx="424281" cy="424281"/>
+          </a:xfrm>
+          <a:prstGeom prst="rect">
+            <a:avLst/>
+          </a:prstGeom>
+        </p:spPr>
+      </p:pic>
+      <p:sp>
+        <p:nvSpPr>
+          <p:cNvPr id="16" name="TextBox 15"/>
+          <p:cNvSpPr txBox="1"/>
+          <p:nvPr/>
+        </p:nvSpPr>
+        <p:spPr>
+          <a:xfrm>
+            <a:off x="7604607" y="2781109"/>
+            <a:ext cx="3855567" cy="731520"/>
+          </a:xfrm>
+          <a:prstGeom prst="rect">
+            <a:avLst/>
+          </a:prstGeom>
+          <a:noFill/>
+        </p:spPr>
+        <p:txBody>
+          <a:bodyPr wrap="square" anchor="ctr"/>
+          <a:lstStyle/>
+          <a:p>
+            <a:pPr algn="l">
+              <a:lnSpc>
+                <a:spcPct val="110000"/>
+              </a:lnSpc>
+            </a:pPr>
+            <a:r>
+              <a:rPr sz="2000" b="1">
+                <a:solidFill>
+                  <a:srgbClr val="13294B"/>
+                </a:solidFill>
+                <a:latin typeface="맑은 고딕"/>
+                <a:ea typeface="맑은 고딕"/>
+                <a:cs typeface="맑은 고딕"/>
+              </a:rPr>
+              <a:t>프로세스 정의</a:t>
+            </a:r>
+          </a:p>
+        </p:txBody>
+      </p:sp>
+      <p:sp>
+        <p:nvSpPr>
+          <p:cNvPr id="17" name="TextBox 16"/>
+          <p:cNvSpPr txBox="1"/>
+          <p:nvPr/>
+        </p:nvSpPr>
+        <p:spPr>
+          <a:xfrm>
+            <a:off x="6735927" y="3631501"/>
+            <a:ext cx="4632807" cy="1222629"/>
+          </a:xfrm>
+          <a:prstGeom prst="rect">
+            <a:avLst/>
+          </a:prstGeom>
+          <a:noFill/>
+        </p:spPr>
+        <p:txBody>
+          <a:bodyPr wrap="square" anchor="t"/>
+          <a:lstStyle/>
+          <a:p>
+            <a:pPr algn="l">
+              <a:lnSpc>
+                <a:spcPct val="110000"/>
+              </a:lnSpc>
+              <a:spcAft>
+                <a:spcPts val="600"/>
+              </a:spcAft>
+            </a:pPr>
+            <a:r>
+              <a:rPr sz="1450" b="0">
+                <a:solidFill>
+                  <a:srgbClr val="1F2A3A"/>
+                </a:solidFill>
+                <a:latin typeface="맑은 고딕"/>
+                <a:ea typeface="맑은 고딕"/>
+                <a:cs typeface="맑은 고딕"/>
+              </a:rPr>
+              <a:t>• 제안 → 승인 → 명령 → 재관측 → 작업지시</a:t>
+            </a:r>
+          </a:p>
+          <a:p>
+            <a:pPr algn="l">
+              <a:lnSpc>
+                <a:spcPct val="110000"/>
+              </a:lnSpc>
+              <a:spcAft>
+                <a:spcPts val="600"/>
+              </a:spcAft>
+            </a:pPr>
+            <a:r>
+              <a:rPr sz="1450" b="0">
+                <a:solidFill>
+                  <a:srgbClr val="1F2A3A"/>
+                </a:solidFill>
+                <a:latin typeface="맑은 고딕"/>
+                <a:ea typeface="맑은 고딕"/>
+                <a:cs typeface="맑은 고딕"/>
+              </a:rPr>
+              <a:t>• 엔진이 읽고 실행한다</a:t>
+            </a:r>
+          </a:p>
+          <a:p>
+            <a:pPr algn="l">
+              <a:lnSpc>
+                <a:spcPct val="110000"/>
+              </a:lnSpc>
+              <a:spcAft>
+                <a:spcPts val="600"/>
+              </a:spcAft>
+            </a:pPr>
+            <a:r>
+              <a:rPr sz="1450" b="0">
+                <a:solidFill>
+                  <a:srgbClr val="1F2A3A"/>
+                </a:solidFill>
+                <a:latin typeface="맑은 고딕"/>
+                <a:ea typeface="맑은 고딕"/>
+                <a:cs typeface="맑은 고딕"/>
+              </a:rPr>
+              <a:t>• 승인이 없으면 다음으로 넘어가지 않는다</a:t>
+            </a:r>
+          </a:p>
+        </p:txBody>
+      </p:sp>
+      <p:sp>
+        <p:nvSpPr>
+          <p:cNvPr id="18" name="Rounded Rectangle 17"/>
+          <p:cNvSpPr/>
+          <p:nvPr/>
+        </p:nvSpPr>
+        <p:spPr>
+          <a:xfrm>
+            <a:off x="6781647" y="4945570"/>
+            <a:ext cx="1523999" cy="292608"/>
+          </a:xfrm>
+          <a:prstGeom prst="roundRect">
+            <a:avLst>
+              <a:gd name="adj" fmla="val 50000"/>
+            </a:avLst>
+          </a:prstGeom>
+          <a:solidFill>
+            <a:srgbClr val="5CB8F2"/>
+          </a:solidFill>
+          <a:ln>
+            <a:noFill/>
+          </a:ln>
+        </p:spPr>
+        <p:txBody>
+          <a:bodyPr rtlCol="0" anchor="ctr"/>
+          <a:lstStyle/>
+          <a:p>
+            <a:pPr algn="ctr"/>
+          </a:p>
+        </p:txBody>
+      </p:sp>
+      <p:sp>
+        <p:nvSpPr>
+          <p:cNvPr id="19" name="TextBox 18"/>
+          <p:cNvSpPr txBox="1"/>
+          <p:nvPr/>
+        </p:nvSpPr>
+        <p:spPr>
+          <a:xfrm>
+            <a:off x="6781647" y="4945570"/>
+            <a:ext cx="1523999" cy="292608"/>
+          </a:xfrm>
+          <a:prstGeom prst="rect">
+            <a:avLst/>
+          </a:prstGeom>
+          <a:noFill/>
+        </p:spPr>
+        <p:txBody>
+          <a:bodyPr wrap="square" anchor="ctr"/>
+          <a:lstStyle/>
+          <a:p>
+            <a:pPr algn="ctr">
+              <a:lnSpc>
+                <a:spcPct val="110000"/>
+              </a:lnSpc>
+            </a:pPr>
+            <a:r>
+              <a:rPr sz="1200" b="1">
+                <a:solidFill>
+                  <a:srgbClr val="13294B"/>
+                </a:solidFill>
+                <a:latin typeface="맑은 고딕"/>
+                <a:ea typeface="맑은 고딕"/>
+                <a:cs typeface="맑은 고딕"/>
+              </a:rPr>
+              <a:t>단계 사이의 순서</a:t>
+            </a:r>
+          </a:p>
+        </p:txBody>
+      </p:sp>
+      <p:sp>
+        <p:nvSpPr>
+          <p:cNvPr id="20" name="Oval 19"/>
+          <p:cNvSpPr/>
+          <p:nvPr/>
+        </p:nvSpPr>
+        <p:spPr>
+          <a:xfrm>
+            <a:off x="5821527" y="3717036"/>
+            <a:ext cx="548640" cy="548640"/>
+          </a:xfrm>
+          <a:prstGeom prst="ellipse">
+            <a:avLst/>
           </a:prstGeom>
           <a:solidFill>
             <a:srgbClr val="13294B"/>
@@ -28002,14 +28728,14 @@
       </p:sp>
       <p:sp>
         <p:nvSpPr>
-          <p:cNvPr id="7" name="TextBox 6"/>
-          <p:cNvSpPr txBox="1"/>
-          <p:nvPr/>
-        </p:nvSpPr>
-        <p:spPr>
-          <a:xfrm>
-            <a:off x="685800" y="1961387"/>
-            <a:ext cx="2514600" cy="347472"/>
+          <p:cNvPr id="21" name="TextBox 20"/>
+          <p:cNvSpPr txBox="1"/>
+          <p:nvPr/>
+        </p:nvSpPr>
+        <p:spPr>
+          <a:xfrm>
+            <a:off x="5821527" y="3717036"/>
+            <a:ext cx="548640" cy="548640"/>
           </a:xfrm>
           <a:prstGeom prst="rect">
             <a:avLst/>
@@ -28020,13 +28746,13 @@
           <a:bodyPr wrap="square" anchor="ctr"/>
           <a:lstStyle/>
           <a:p>
-            <a:pPr algn="l">
-              <a:lnSpc>
-                <a:spcPct val="110000"/>
-              </a:lnSpc>
-            </a:pPr>
-            <a:r>
-              <a:rPr sz="1300" b="1">
+            <a:pPr algn="ctr">
+              <a:lnSpc>
+                <a:spcPct val="110000"/>
+              </a:lnSpc>
+            </a:pPr>
+            <a:r>
+              <a:rPr sz="1400" b="1">
                 <a:solidFill>
                   <a:srgbClr val="FFFFFF"/>
                 </a:solidFill>
@@ -28034,482 +28760,7 @@
                 <a:ea typeface="맑은 고딕"/>
                 <a:cs typeface="맑은 고딕"/>
               </a:rPr>
-              <a:t>장치</a:t>
-            </a:r>
-          </a:p>
-        </p:txBody>
-      </p:sp>
-      <p:sp>
-        <p:nvSpPr>
-          <p:cNvPr id="8" name="TextBox 7"/>
-          <p:cNvSpPr txBox="1"/>
-          <p:nvPr/>
-        </p:nvSpPr>
-        <p:spPr>
-          <a:xfrm>
-            <a:off x="3200400" y="1961387"/>
-            <a:ext cx="8442655" cy="347472"/>
-          </a:xfrm>
-          <a:prstGeom prst="rect">
-            <a:avLst/>
-          </a:prstGeom>
-          <a:noFill/>
-        </p:spPr>
-        <p:txBody>
-          <a:bodyPr wrap="square" anchor="ctr"/>
-          <a:lstStyle/>
-          <a:p>
-            <a:pPr algn="l">
-              <a:lnSpc>
-                <a:spcPct val="110000"/>
-              </a:lnSpc>
-            </a:pPr>
-            <a:r>
-              <a:rPr sz="1300" b="1">
-                <a:solidFill>
-                  <a:srgbClr val="FFFFFF"/>
-                </a:solidFill>
-                <a:latin typeface="맑은 고딕"/>
-                <a:ea typeface="맑은 고딕"/>
-                <a:cs typeface="맑은 고딕"/>
-              </a:rPr>
-              <a:t>이 처리 건에서 남은 것</a:t>
-            </a:r>
-          </a:p>
-        </p:txBody>
-      </p:sp>
-      <p:sp>
-        <p:nvSpPr>
-          <p:cNvPr id="9" name="Rounded Rectangle 8"/>
-          <p:cNvSpPr/>
-          <p:nvPr/>
-        </p:nvSpPr>
-        <p:spPr>
-          <a:xfrm>
-            <a:off x="548640" y="2395727"/>
-            <a:ext cx="11094415" cy="850392"/>
-          </a:xfrm>
-          <a:prstGeom prst="roundRect">
-            <a:avLst>
-              <a:gd name="adj" fmla="val 8000"/>
-            </a:avLst>
-          </a:prstGeom>
-          <a:solidFill>
-            <a:srgbClr val="F3F6F9"/>
-          </a:solidFill>
-          <a:ln>
-            <a:noFill/>
-          </a:ln>
-        </p:spPr>
-        <p:txBody>
-          <a:bodyPr rtlCol="0" anchor="ctr"/>
-          <a:lstStyle/>
-          <a:p>
-            <a:pPr algn="ctr"/>
-          </a:p>
-        </p:txBody>
-      </p:sp>
-      <p:sp>
-        <p:nvSpPr>
-          <p:cNvPr id="10" name="TextBox 9"/>
-          <p:cNvSpPr txBox="1"/>
-          <p:nvPr/>
-        </p:nvSpPr>
-        <p:spPr>
-          <a:xfrm>
-            <a:off x="685800" y="2363723"/>
-            <a:ext cx="2514600" cy="914400"/>
-          </a:xfrm>
-          <a:prstGeom prst="rect">
-            <a:avLst/>
-          </a:prstGeom>
-          <a:noFill/>
-        </p:spPr>
-        <p:txBody>
-          <a:bodyPr wrap="square" anchor="ctr"/>
-          <a:lstStyle/>
-          <a:p>
-            <a:pPr algn="l">
-              <a:lnSpc>
-                <a:spcPct val="110000"/>
-              </a:lnSpc>
-            </a:pPr>
-            <a:r>
-              <a:rPr sz="1600" b="1">
-                <a:solidFill>
-                  <a:srgbClr val="13294B"/>
-                </a:solidFill>
-                <a:latin typeface="맑은 고딕"/>
-                <a:ea typeface="맑은 고딕"/>
-                <a:cs typeface="맑은 고딕"/>
-              </a:rPr>
-              <a:t>프로세스 정의</a:t>
-            </a:r>
-          </a:p>
-        </p:txBody>
-      </p:sp>
-      <p:sp>
-        <p:nvSpPr>
-          <p:cNvPr id="11" name="TextBox 10"/>
-          <p:cNvSpPr txBox="1"/>
-          <p:nvPr/>
-        </p:nvSpPr>
-        <p:spPr>
-          <a:xfrm>
-            <a:off x="3200400" y="2363723"/>
-            <a:ext cx="8351215" cy="914400"/>
-          </a:xfrm>
-          <a:prstGeom prst="rect">
-            <a:avLst/>
-          </a:prstGeom>
-          <a:noFill/>
-        </p:spPr>
-        <p:txBody>
-          <a:bodyPr wrap="square" anchor="ctr"/>
-          <a:lstStyle/>
-          <a:p>
-            <a:pPr algn="l">
-              <a:lnSpc>
-                <a:spcPct val="110000"/>
-              </a:lnSpc>
-            </a:pPr>
-            <a:r>
-              <a:rPr sz="1400" b="0">
-                <a:solidFill>
-                  <a:srgbClr val="1F2A3A"/>
-                </a:solidFill>
-                <a:latin typeface="맑은 고딕"/>
-                <a:ea typeface="맑은 고딕"/>
-                <a:cs typeface="맑은 고딕"/>
-              </a:rPr>
-              <a:t>c3_cooling: 작업 9, 갈림 2, 타이머 1을 가진 설계도</a:t>
-            </a:r>
-          </a:p>
-        </p:txBody>
-      </p:sp>
-      <p:sp>
-        <p:nvSpPr>
-          <p:cNvPr id="12" name="Rounded Rectangle 11"/>
-          <p:cNvSpPr/>
-          <p:nvPr/>
-        </p:nvSpPr>
-        <p:spPr>
-          <a:xfrm>
-            <a:off x="548640" y="3310127"/>
-            <a:ext cx="11094415" cy="850392"/>
-          </a:xfrm>
-          <a:prstGeom prst="roundRect">
-            <a:avLst>
-              <a:gd name="adj" fmla="val 8000"/>
-            </a:avLst>
-          </a:prstGeom>
-          <a:solidFill>
-            <a:srgbClr val="F3F6F9"/>
-          </a:solidFill>
-          <a:ln>
-            <a:noFill/>
-          </a:ln>
-        </p:spPr>
-        <p:txBody>
-          <a:bodyPr rtlCol="0" anchor="ctr"/>
-          <a:lstStyle/>
-          <a:p>
-            <a:pPr algn="ctr"/>
-          </a:p>
-        </p:txBody>
-      </p:sp>
-      <p:sp>
-        <p:nvSpPr>
-          <p:cNvPr id="13" name="TextBox 12"/>
-          <p:cNvSpPr txBox="1"/>
-          <p:nvPr/>
-        </p:nvSpPr>
-        <p:spPr>
-          <a:xfrm>
-            <a:off x="685800" y="3278123"/>
-            <a:ext cx="2514600" cy="914400"/>
-          </a:xfrm>
-          <a:prstGeom prst="rect">
-            <a:avLst/>
-          </a:prstGeom>
-          <a:noFill/>
-        </p:spPr>
-        <p:txBody>
-          <a:bodyPr wrap="square" anchor="ctr"/>
-          <a:lstStyle/>
-          <a:p>
-            <a:pPr algn="l">
-              <a:lnSpc>
-                <a:spcPct val="110000"/>
-              </a:lnSpc>
-            </a:pPr>
-            <a:r>
-              <a:rPr sz="1600" b="1">
-                <a:solidFill>
-                  <a:srgbClr val="13294B"/>
-                </a:solidFill>
-                <a:latin typeface="맑은 고딕"/>
-                <a:ea typeface="맑은 고딕"/>
-                <a:cs typeface="맑은 고딕"/>
-              </a:rPr>
-              <a:t>인스턴스(처리 건)</a:t>
-            </a:r>
-          </a:p>
-        </p:txBody>
-      </p:sp>
-      <p:sp>
-        <p:nvSpPr>
-          <p:cNvPr id="14" name="TextBox 13"/>
-          <p:cNvSpPr txBox="1"/>
-          <p:nvPr/>
-        </p:nvSpPr>
-        <p:spPr>
-          <a:xfrm>
-            <a:off x="3200400" y="3278123"/>
-            <a:ext cx="8351215" cy="914400"/>
-          </a:xfrm>
-          <a:prstGeom prst="rect">
-            <a:avLst/>
-          </a:prstGeom>
-          <a:noFill/>
-        </p:spPr>
-        <p:txBody>
-          <a:bodyPr wrap="square" anchor="ctr"/>
-          <a:lstStyle/>
-          <a:p>
-            <a:pPr algn="l">
-              <a:lnSpc>
-                <a:spcPct val="110000"/>
-              </a:lnSpc>
-            </a:pPr>
-            <a:r>
-              <a:rPr sz="1400" b="0">
-                <a:solidFill>
-                  <a:srgbClr val="1F2A3A"/>
-                </a:solidFill>
-                <a:latin typeface="맑은 고딕"/>
-                <a:ea typeface="맑은 고딕"/>
-                <a:cs typeface="맑은 고딕"/>
-              </a:rPr>
-              <a:t>경보 ALT-hyd01-0026-767a로 열려 끝 이벤트 E_end에서 닫힌 한 건</a:t>
-            </a:r>
-          </a:p>
-        </p:txBody>
-      </p:sp>
-      <p:sp>
-        <p:nvSpPr>
-          <p:cNvPr id="15" name="Rounded Rectangle 14"/>
-          <p:cNvSpPr/>
-          <p:nvPr/>
-        </p:nvSpPr>
-        <p:spPr>
-          <a:xfrm>
-            <a:off x="548640" y="4224527"/>
-            <a:ext cx="11094415" cy="850392"/>
-          </a:xfrm>
-          <a:prstGeom prst="roundRect">
-            <a:avLst>
-              <a:gd name="adj" fmla="val 8000"/>
-            </a:avLst>
-          </a:prstGeom>
-          <a:solidFill>
-            <a:srgbClr val="F3F6F9"/>
-          </a:solidFill>
-          <a:ln>
-            <a:noFill/>
-          </a:ln>
-        </p:spPr>
-        <p:txBody>
-          <a:bodyPr rtlCol="0" anchor="ctr"/>
-          <a:lstStyle/>
-          <a:p>
-            <a:pPr algn="ctr"/>
-          </a:p>
-        </p:txBody>
-      </p:sp>
-      <p:sp>
-        <p:nvSpPr>
-          <p:cNvPr id="16" name="TextBox 15"/>
-          <p:cNvSpPr txBox="1"/>
-          <p:nvPr/>
-        </p:nvSpPr>
-        <p:spPr>
-          <a:xfrm>
-            <a:off x="685800" y="4192523"/>
-            <a:ext cx="2514600" cy="914400"/>
-          </a:xfrm>
-          <a:prstGeom prst="rect">
-            <a:avLst/>
-          </a:prstGeom>
-          <a:noFill/>
-        </p:spPr>
-        <p:txBody>
-          <a:bodyPr wrap="square" anchor="ctr"/>
-          <a:lstStyle/>
-          <a:p>
-            <a:pPr algn="l">
-              <a:lnSpc>
-                <a:spcPct val="110000"/>
-              </a:lnSpc>
-            </a:pPr>
-            <a:r>
-              <a:rPr sz="1600" b="1">
-                <a:solidFill>
-                  <a:srgbClr val="13294B"/>
-                </a:solidFill>
-                <a:latin typeface="맑은 고딕"/>
-                <a:ea typeface="맑은 고딕"/>
-                <a:cs typeface="맑은 고딕"/>
-              </a:rPr>
-              <a:t>승인</a:t>
-            </a:r>
-          </a:p>
-        </p:txBody>
-      </p:sp>
-      <p:sp>
-        <p:nvSpPr>
-          <p:cNvPr id="17" name="TextBox 16"/>
-          <p:cNvSpPr txBox="1"/>
-          <p:nvPr/>
-        </p:nvSpPr>
-        <p:spPr>
-          <a:xfrm>
-            <a:off x="3200400" y="4192523"/>
-            <a:ext cx="8351215" cy="914400"/>
-          </a:xfrm>
-          <a:prstGeom prst="rect">
-            <a:avLst/>
-          </a:prstGeom>
-          <a:noFill/>
-        </p:spPr>
-        <p:txBody>
-          <a:bodyPr wrap="square" anchor="ctr"/>
-          <a:lstStyle/>
-          <a:p>
-            <a:pPr algn="l">
-              <a:lnSpc>
-                <a:spcPct val="110000"/>
-              </a:lnSpc>
-            </a:pPr>
-            <a:r>
-              <a:rPr sz="1400" b="0">
-                <a:solidFill>
-                  <a:srgbClr val="1F2A3A"/>
-                </a:solidFill>
-                <a:latin typeface="맑은 고딕"/>
-                <a:ea typeface="맑은 고딕"/>
-                <a:cs typeface="맑은 고딕"/>
-              </a:rPr>
-              <a:t>APPROVAL_ACCEPTED: 역할 role:operator의 결정</a:t>
-            </a:r>
-          </a:p>
-        </p:txBody>
-      </p:sp>
-      <p:sp>
-        <p:nvSpPr>
-          <p:cNvPr id="18" name="Rounded Rectangle 17"/>
-          <p:cNvSpPr/>
-          <p:nvPr/>
-        </p:nvSpPr>
-        <p:spPr>
-          <a:xfrm>
-            <a:off x="548640" y="5138927"/>
-            <a:ext cx="11094415" cy="850392"/>
-          </a:xfrm>
-          <a:prstGeom prst="roundRect">
-            <a:avLst>
-              <a:gd name="adj" fmla="val 8000"/>
-            </a:avLst>
-          </a:prstGeom>
-          <a:solidFill>
-            <a:srgbClr val="E7F3FD"/>
-          </a:solidFill>
-          <a:ln>
-            <a:noFill/>
-          </a:ln>
-        </p:spPr>
-        <p:txBody>
-          <a:bodyPr rtlCol="0" anchor="ctr"/>
-          <a:lstStyle/>
-          <a:p>
-            <a:pPr algn="ctr"/>
-          </a:p>
-        </p:txBody>
-      </p:sp>
-      <p:sp>
-        <p:nvSpPr>
-          <p:cNvPr id="19" name="TextBox 18"/>
-          <p:cNvSpPr txBox="1"/>
-          <p:nvPr/>
-        </p:nvSpPr>
-        <p:spPr>
-          <a:xfrm>
-            <a:off x="685800" y="5106923"/>
-            <a:ext cx="2514600" cy="914400"/>
-          </a:xfrm>
-          <a:prstGeom prst="rect">
-            <a:avLst/>
-          </a:prstGeom>
-          <a:noFill/>
-        </p:spPr>
-        <p:txBody>
-          <a:bodyPr wrap="square" anchor="ctr"/>
-          <a:lstStyle/>
-          <a:p>
-            <a:pPr algn="l">
-              <a:lnSpc>
-                <a:spcPct val="110000"/>
-              </a:lnSpc>
-            </a:pPr>
-            <a:r>
-              <a:rPr sz="1600" b="1">
-                <a:solidFill>
-                  <a:srgbClr val="13294B"/>
-                </a:solidFill>
-                <a:latin typeface="맑은 고딕"/>
-                <a:ea typeface="맑은 고딕"/>
-                <a:cs typeface="맑은 고딕"/>
-              </a:rPr>
-              <a:t>시스템 실행</a:t>
-            </a:r>
-          </a:p>
-        </p:txBody>
-      </p:sp>
-      <p:sp>
-        <p:nvSpPr>
-          <p:cNvPr id="20" name="TextBox 19"/>
-          <p:cNvSpPr txBox="1"/>
-          <p:nvPr/>
-        </p:nvSpPr>
-        <p:spPr>
-          <a:xfrm>
-            <a:off x="3200400" y="5106923"/>
-            <a:ext cx="8351215" cy="914400"/>
-          </a:xfrm>
-          <a:prstGeom prst="rect">
-            <a:avLst/>
-          </a:prstGeom>
-          <a:noFill/>
-        </p:spPr>
-        <p:txBody>
-          <a:bodyPr wrap="square" anchor="ctr"/>
-          <a:lstStyle/>
-          <a:p>
-            <a:pPr algn="l">
-              <a:lnSpc>
-                <a:spcPct val="110000"/>
-              </a:lnSpc>
-            </a:pPr>
-            <a:r>
-              <a:rPr sz="1400" b="0">
-                <a:solidFill>
-                  <a:srgbClr val="1F2A3A"/>
-                </a:solidFill>
-                <a:latin typeface="맑은 고딕"/>
-                <a:ea typeface="맑은 고딕"/>
-                <a:cs typeface="맑은 고딕"/>
-              </a:rPr>
-              <a:t>설비 명령 CMD-1010-0001-01d1과 작업지시 WO-1010-1198</a:t>
+              <a:t>vs</a:t>
             </a:r>
           </a:p>
         </p:txBody>
@@ -28574,7 +28825,7 @@
                 <a:ea typeface="맑은 고딕"/>
                 <a:cs typeface="맑은 고딕"/>
               </a:rPr>
-              <a:t>스킬이 정한 순서와 프로세스 정의가 정한 순서</a:t>
+              <a:t>MCP의 읽기와 프로세스의 쓰기</a:t>
             </a:r>
           </a:p>
         </p:txBody>
@@ -28613,7 +28864,7 @@
                 <a:ea typeface="맑은 고딕"/>
                 <a:cs typeface="맑은 고딕"/>
               </a:rPr>
-              <a:t>스킬은 에이전트 단계 안에서 도구를 부르는 순서를, 프로세스 정의는 단계와 단계 사이의 순서를 정한다.</a:t>
+              <a:t>에이전트에 연결된 MCP 도구는 읽는 데 쓰이고, 설비와 업무 시스템을 바꾸는 쓰기는 승인 뒤의 서비스 작업에만 있다.</a:t>
             </a:r>
           </a:p>
         </p:txBody>
@@ -28748,7 +28999,7 @@
       </p:sp>
       <p:pic>
         <p:nvPicPr>
-          <p:cNvPr id="8" name="아이콘:file-text" descr="file-text_13294B_1.6.png"/>
+          <p:cNvPr id="8" name="아이콘:eye" descr="eye_13294B_1.6.png"/>
           <p:cNvPicPr>
             <a:picLocks noChangeAspect="1"/>
           </p:cNvPicPr>
@@ -28804,7 +29055,7 @@
                 <a:ea typeface="맑은 고딕"/>
                 <a:cs typeface="맑은 고딕"/>
               </a:rPr>
-              <a:t>스킬</a:t>
+              <a:t>에이전트의 MCP 도구</a:t>
             </a:r>
           </a:p>
         </p:txBody>
@@ -28846,7 +29097,7 @@
                 <a:ea typeface="맑은 고딕"/>
                 <a:cs typeface="맑은 고딕"/>
               </a:rPr>
-              <a:t>• 진단 → 조치 평가 → 업무 값 조회 → 제출</a:t>
+              <a:t>• diagnose, evaluate_cards</a:t>
             </a:r>
           </a:p>
           <a:p>
@@ -28867,7 +29118,7 @@
                 <a:ea typeface="맑은 고딕"/>
                 <a:cs typeface="맑은 고딕"/>
               </a:rPr>
-              <a:t>• 이 처리 건의 호출이며 상황에 따라 달라진다</a:t>
+              <a:t>• mes_orders, qms_lots</a:t>
             </a:r>
           </a:p>
           <a:p>
@@ -28888,7 +29139,7 @@
                 <a:ea typeface="맑은 고딕"/>
                 <a:cs typeface="맑은 고딕"/>
               </a:rPr>
-              <a:t>• 에이전트가 읽고 따른다</a:t>
+              <a:t>• 쓰기는 추천안의 제출 하나뿐이다</a:t>
             </a:r>
           </a:p>
         </p:txBody>
@@ -28902,7 +29153,7 @@
         <p:spPr>
           <a:xfrm>
             <a:off x="868680" y="4945570"/>
-            <a:ext cx="1371600" cy="292608"/>
+            <a:ext cx="822960" cy="292608"/>
           </a:xfrm>
           <a:prstGeom prst="roundRect">
             <a:avLst>
@@ -28933,7 +29184,7 @@
         <p:spPr>
           <a:xfrm>
             <a:off x="868680" y="4945570"/>
-            <a:ext cx="1371600" cy="292608"/>
+            <a:ext cx="822960" cy="292608"/>
           </a:xfrm>
           <a:prstGeom prst="rect">
             <a:avLst/>
@@ -28958,7 +29209,7 @@
                 <a:ea typeface="맑은 고딕"/>
                 <a:cs typeface="맑은 고딕"/>
               </a:rPr>
-              <a:t>단계 안의 순서</a:t>
+              <a:t>읽기</a:t>
             </a:r>
           </a:p>
         </p:txBody>
@@ -29027,7 +29278,7 @@
       </p:sp>
       <p:pic>
         <p:nvPicPr>
-          <p:cNvPr id="15" name="아이콘:sitemap" descr="sitemap_13294B_1.6.png"/>
+          <p:cNvPr id="15" name="아이콘:bolt" descr="bolt_13294B_1.6.png"/>
           <p:cNvPicPr>
             <a:picLocks noChangeAspect="1"/>
           </p:cNvPicPr>
@@ -29083,7 +29334,7 @@
                 <a:ea typeface="맑은 고딕"/>
                 <a:cs typeface="맑은 고딕"/>
               </a:rPr>
-              <a:t>프로세스 정의</a:t>
+              <a:t>프로세스의 서비스 작업</a:t>
             </a:r>
           </a:p>
         </p:txBody>
@@ -29125,7 +29376,7 @@
                 <a:ea typeface="맑은 고딕"/>
                 <a:cs typeface="맑은 고딕"/>
               </a:rPr>
-              <a:t>• 제안 → 승인 → 명령 → 재관측 → 작업지시</a:t>
+              <a:t>• 냉각 명령: 팬 속도 100 %</a:t>
             </a:r>
           </a:p>
           <a:p>
@@ -29146,7 +29397,7 @@
                 <a:ea typeface="맑은 고딕"/>
                 <a:cs typeface="맑은 고딕"/>
               </a:rPr>
-              <a:t>• 엔진이 읽고 실행한다</a:t>
+              <a:t>• 작업지시 등록: WO-1010-1198</a:t>
             </a:r>
           </a:p>
           <a:p>
@@ -29167,7 +29418,7 @@
                 <a:ea typeface="맑은 고딕"/>
                 <a:cs typeface="맑은 고딕"/>
               </a:rPr>
-              <a:t>• 승인이 없으면 다음으로 넘어가지 않는다</a:t>
+              <a:t>• 승인이 전달된 뒤에만 열린다</a:t>
             </a:r>
           </a:p>
         </p:txBody>
@@ -29181,7 +29432,7 @@
         <p:spPr>
           <a:xfrm>
             <a:off x="6781647" y="4945570"/>
-            <a:ext cx="1523999" cy="292608"/>
+            <a:ext cx="822960" cy="292608"/>
           </a:xfrm>
           <a:prstGeom prst="roundRect">
             <a:avLst>
@@ -29212,7 +29463,7 @@
         <p:spPr>
           <a:xfrm>
             <a:off x="6781647" y="4945570"/>
-            <a:ext cx="1523999" cy="292608"/>
+            <a:ext cx="822960" cy="292608"/>
           </a:xfrm>
           <a:prstGeom prst="rect">
             <a:avLst/>
@@ -29237,7 +29488,7 @@
                 <a:ea typeface="맑은 고딕"/>
                 <a:cs typeface="맑은 고딕"/>
               </a:rPr>
-              <a:t>단계 사이의 순서</a:t>
+              <a:t>쓰기</a:t>
             </a:r>
           </a:p>
         </p:txBody>
@@ -29370,7 +29621,7 @@
                 <a:ea typeface="맑은 고딕"/>
                 <a:cs typeface="맑은 고딕"/>
               </a:rPr>
-              <a:t>MCP의 읽기와 프로세스의 쓰기</a:t>
+              <a:t>세 그림을 그리는 데 쓴 BPMN 요소</a:t>
             </a:r>
           </a:p>
         </p:txBody>
@@ -29409,7 +29660,7 @@
                 <a:ea typeface="맑은 고딕"/>
                 <a:cs typeface="맑은 고딕"/>
               </a:rPr>
-              <a:t>에이전트에 연결된 MCP 도구는 읽는 데 쓰이고, 설비와 업무 시스템을 바꾸는 쓰기는 승인 뒤의 서비스 작업에만 있다.</a:t>
+              <a:t>세 프로세스는 일곱 가지 기호만으로 그려져, 이 기호를 읽으면 세 업무의 순서와 책임과 예외 경로를 따라갈 수 있다.</a:t>
             </a:r>
           </a:p>
         </p:txBody>
@@ -29482,69 +29733,9 @@
           </a:p>
         </p:txBody>
       </p:sp>
-      <p:sp>
-        <p:nvSpPr>
-          <p:cNvPr id="6" name="Rounded Rectangle 5"/>
-          <p:cNvSpPr/>
-          <p:nvPr/>
-        </p:nvSpPr>
-        <p:spPr>
-          <a:xfrm>
-            <a:off x="548640" y="2579941"/>
-            <a:ext cx="5181447" cy="2822829"/>
-          </a:xfrm>
-          <a:prstGeom prst="roundRect">
-            <a:avLst>
-              <a:gd name="adj" fmla="val 4000"/>
-            </a:avLst>
-          </a:prstGeom>
-          <a:solidFill>
-            <a:srgbClr val="F3F6F9"/>
-          </a:solidFill>
-          <a:ln>
-            <a:noFill/>
-          </a:ln>
-        </p:spPr>
-        <p:txBody>
-          <a:bodyPr rtlCol="0" anchor="ctr"/>
-          <a:lstStyle/>
-          <a:p>
-            <a:pPr algn="ctr"/>
-          </a:p>
-        </p:txBody>
-      </p:sp>
-      <p:sp>
-        <p:nvSpPr>
-          <p:cNvPr id="7" name="Oval 6"/>
-          <p:cNvSpPr/>
-          <p:nvPr/>
-        </p:nvSpPr>
-        <p:spPr>
-          <a:xfrm>
-            <a:off x="822959" y="2781109"/>
-            <a:ext cx="731520" cy="731520"/>
-          </a:xfrm>
-          <a:prstGeom prst="ellipse">
-            <a:avLst/>
-          </a:prstGeom>
-          <a:solidFill>
-            <a:srgbClr val="FFFFFF"/>
-          </a:solidFill>
-          <a:ln>
-            <a:noFill/>
-          </a:ln>
-        </p:spPr>
-        <p:txBody>
-          <a:bodyPr rtlCol="0" anchor="ctr"/>
-          <a:lstStyle/>
-          <a:p>
-            <a:pPr algn="ctr"/>
-          </a:p>
-        </p:txBody>
-      </p:sp>
       <p:pic>
         <p:nvPicPr>
-          <p:cNvPr id="8" name="아이콘:eye" descr="eye_13294B_1.6.png"/>
+          <p:cNvPr id="6" name="삽화:요소_복습.svg" descr="illust_2936756098066877527_1791743711.png"/>
           <p:cNvPicPr>
             <a:picLocks noChangeAspect="1"/>
           </p:cNvPicPr>
@@ -29558,8 +29749,8 @@
         </p:blipFill>
         <p:spPr>
           <a:xfrm>
-            <a:off x="976579" y="2934728"/>
-            <a:ext cx="424281" cy="424281"/>
+            <a:off x="641100" y="1627632"/>
+            <a:ext cx="10909495" cy="4727448"/>
           </a:xfrm>
           <a:prstGeom prst="rect">
             <a:avLst/>
@@ -29568,31 +29759,160 @@
       </p:pic>
       <p:sp>
         <p:nvSpPr>
+          <p:cNvPr id="7" name="TextBox 6"/>
+          <p:cNvSpPr txBox="1"/>
+          <p:nvPr/>
+        </p:nvSpPr>
+        <p:spPr>
+          <a:xfrm>
+            <a:off x="766559" y="3849532"/>
+            <a:ext cx="1472781" cy="1026668"/>
+          </a:xfrm>
+          <a:prstGeom prst="rect">
+            <a:avLst/>
+          </a:prstGeom>
+          <a:noFill/>
+        </p:spPr>
+        <p:txBody>
+          <a:bodyPr wrap="square" anchor="t"/>
+          <a:lstStyle/>
+          <a:p>
+            <a:pPr algn="ctr">
+              <a:lnSpc>
+                <a:spcPct val="110000"/>
+              </a:lnSpc>
+              <a:spcAft>
+                <a:spcPts val="100"/>
+              </a:spcAft>
+            </a:pPr>
+            <a:r>
+              <a:rPr sz="1600" b="1">
+                <a:solidFill>
+                  <a:srgbClr val="13294B"/>
+                </a:solidFill>
+                <a:latin typeface="맑은 고딕"/>
+                <a:ea typeface="맑은 고딕"/>
+                <a:cs typeface="맑은 고딕"/>
+              </a:rPr>
+              <a:t>메시지 시작 이벤트</a:t>
+            </a:r>
+          </a:p>
+          <a:p>
+            <a:pPr algn="ctr">
+              <a:lnSpc>
+                <a:spcPct val="110000"/>
+              </a:lnSpc>
+              <a:spcAft>
+                <a:spcPts val="100"/>
+              </a:spcAft>
+            </a:pPr>
+            <a:r>
+              <a:rPr sz="1300" b="0">
+                <a:solidFill>
+                  <a:srgbClr val="556175"/>
+                </a:solidFill>
+                <a:latin typeface="맑은 고딕"/>
+                <a:ea typeface="맑은 고딕"/>
+                <a:cs typeface="맑은 고딕"/>
+              </a:rPr>
+              <a:t>경보가 도착하면 연다</a:t>
+            </a:r>
+          </a:p>
+        </p:txBody>
+      </p:sp>
+      <p:sp>
+        <p:nvSpPr>
+          <p:cNvPr id="8" name="TextBox 7"/>
+          <p:cNvSpPr txBox="1"/>
+          <p:nvPr/>
+        </p:nvSpPr>
+        <p:spPr>
+          <a:xfrm>
+            <a:off x="2293888" y="3849532"/>
+            <a:ext cx="1472781" cy="577342"/>
+          </a:xfrm>
+          <a:prstGeom prst="rect">
+            <a:avLst/>
+          </a:prstGeom>
+          <a:noFill/>
+        </p:spPr>
+        <p:txBody>
+          <a:bodyPr wrap="square" anchor="t"/>
+          <a:lstStyle/>
+          <a:p>
+            <a:pPr algn="ctr">
+              <a:lnSpc>
+                <a:spcPct val="110000"/>
+              </a:lnSpc>
+              <a:spcAft>
+                <a:spcPts val="100"/>
+              </a:spcAft>
+            </a:pPr>
+            <a:r>
+              <a:rPr sz="1600" b="1">
+                <a:solidFill>
+                  <a:srgbClr val="13294B"/>
+                </a:solidFill>
+                <a:latin typeface="맑은 고딕"/>
+                <a:ea typeface="맑은 고딕"/>
+                <a:cs typeface="맑은 고딕"/>
+              </a:rPr>
+              <a:t>작업</a:t>
+            </a:r>
+          </a:p>
+          <a:p>
+            <a:pPr algn="ctr">
+              <a:lnSpc>
+                <a:spcPct val="110000"/>
+              </a:lnSpc>
+              <a:spcAft>
+                <a:spcPts val="100"/>
+              </a:spcAft>
+            </a:pPr>
+            <a:r>
+              <a:rPr sz="1300" b="0">
+                <a:solidFill>
+                  <a:srgbClr val="556175"/>
+                </a:solidFill>
+                <a:latin typeface="맑은 고딕"/>
+                <a:ea typeface="맑은 고딕"/>
+                <a:cs typeface="맑은 고딕"/>
+              </a:rPr>
+              <a:t>에이전트의 제안</a:t>
+            </a:r>
+          </a:p>
+        </p:txBody>
+      </p:sp>
+      <p:sp>
+        <p:nvSpPr>
           <p:cNvPr id="9" name="TextBox 8"/>
           <p:cNvSpPr txBox="1"/>
           <p:nvPr/>
         </p:nvSpPr>
         <p:spPr>
           <a:xfrm>
-            <a:off x="1691640" y="2781109"/>
-            <a:ext cx="3855567" cy="731520"/>
-          </a:xfrm>
-          <a:prstGeom prst="rect">
-            <a:avLst/>
-          </a:prstGeom>
-          <a:noFill/>
-        </p:spPr>
-        <p:txBody>
-          <a:bodyPr wrap="square" anchor="ctr"/>
-          <a:lstStyle/>
-          <a:p>
-            <a:pPr algn="l">
-              <a:lnSpc>
-                <a:spcPct val="110000"/>
-              </a:lnSpc>
-            </a:pPr>
-            <a:r>
-              <a:rPr sz="2000" b="1">
+            <a:off x="3821217" y="3849532"/>
+            <a:ext cx="1472781" cy="577342"/>
+          </a:xfrm>
+          <a:prstGeom prst="rect">
+            <a:avLst/>
+          </a:prstGeom>
+          <a:noFill/>
+        </p:spPr>
+        <p:txBody>
+          <a:bodyPr wrap="square" anchor="t"/>
+          <a:lstStyle/>
+          <a:p>
+            <a:pPr algn="ctr">
+              <a:lnSpc>
+                <a:spcPct val="110000"/>
+              </a:lnSpc>
+              <a:spcAft>
+                <a:spcPts val="100"/>
+              </a:spcAft>
+            </a:pPr>
+            <a:r>
+              <a:rPr sz="1600" b="1">
                 <a:solidFill>
                   <a:srgbClr val="13294B"/>
                 </a:solidFill>
@@ -29600,7 +29920,28 @@
                 <a:ea typeface="맑은 고딕"/>
                 <a:cs typeface="맑은 고딕"/>
               </a:rPr>
-              <a:t>에이전트의 MCP 도구</a:t>
+              <a:t>사용자 작업</a:t>
+            </a:r>
+          </a:p>
+          <a:p>
+            <a:pPr algn="ctr">
+              <a:lnSpc>
+                <a:spcPct val="110000"/>
+              </a:lnSpc>
+              <a:spcAft>
+                <a:spcPts val="100"/>
+              </a:spcAft>
+            </a:pPr>
+            <a:r>
+              <a:rPr sz="1300" b="0">
+                <a:solidFill>
+                  <a:srgbClr val="556175"/>
+                </a:solidFill>
+                <a:latin typeface="맑은 고딕"/>
+                <a:ea typeface="맑은 고딕"/>
+                <a:cs typeface="맑은 고딕"/>
+              </a:rPr>
+              <a:t>사람의 승인</a:t>
             </a:r>
           </a:p>
         </p:txBody>
@@ -29613,8 +29954,8 @@
         </p:nvSpPr>
         <p:spPr>
           <a:xfrm>
-            <a:off x="822959" y="3631501"/>
-            <a:ext cx="4632807" cy="1222629"/>
+            <a:off x="5348547" y="3849532"/>
+            <a:ext cx="1472781" cy="778764"/>
           </a:xfrm>
           <a:prstGeom prst="rect">
             <a:avLst/>
@@ -29625,98 +29966,109 @@
           <a:bodyPr wrap="square" anchor="t"/>
           <a:lstStyle/>
           <a:p>
-            <a:pPr algn="l">
+            <a:pPr algn="ctr">
               <a:lnSpc>
                 <a:spcPct val="110000"/>
               </a:lnSpc>
               <a:spcAft>
-                <a:spcPts val="600"/>
+                <a:spcPts val="100"/>
               </a:spcAft>
             </a:pPr>
             <a:r>
-              <a:rPr sz="1450" b="0">
-                <a:solidFill>
-                  <a:srgbClr val="1F2A3A"/>
-                </a:solidFill>
-                <a:latin typeface="맑은 고딕"/>
-                <a:ea typeface="맑은 고딕"/>
-                <a:cs typeface="맑은 고딕"/>
-              </a:rPr>
-              <a:t>• diagnose, evaluate_cards</a:t>
-            </a:r>
-          </a:p>
-          <a:p>
-            <a:pPr algn="l">
+              <a:rPr sz="1600" b="1">
+                <a:solidFill>
+                  <a:srgbClr val="13294B"/>
+                </a:solidFill>
+                <a:latin typeface="맑은 고딕"/>
+                <a:ea typeface="맑은 고딕"/>
+                <a:cs typeface="맑은 고딕"/>
+              </a:rPr>
+              <a:t>서비스 작업</a:t>
+            </a:r>
+          </a:p>
+          <a:p>
+            <a:pPr algn="ctr">
               <a:lnSpc>
                 <a:spcPct val="110000"/>
               </a:lnSpc>
               <a:spcAft>
-                <a:spcPts val="600"/>
+                <a:spcPts val="100"/>
               </a:spcAft>
             </a:pPr>
             <a:r>
-              <a:rPr sz="1450" b="0">
-                <a:solidFill>
-                  <a:srgbClr val="1F2A3A"/>
-                </a:solidFill>
-                <a:latin typeface="맑은 고딕"/>
-                <a:ea typeface="맑은 고딕"/>
-                <a:cs typeface="맑은 고딕"/>
-              </a:rPr>
-              <a:t>• mes_orders, qms_lots</a:t>
-            </a:r>
-          </a:p>
-          <a:p>
-            <a:pPr algn="l">
+              <a:rPr sz="1300" b="0">
+                <a:solidFill>
+                  <a:srgbClr val="556175"/>
+                </a:solidFill>
+                <a:latin typeface="맑은 고딕"/>
+                <a:ea typeface="맑은 고딕"/>
+                <a:cs typeface="맑은 고딕"/>
+              </a:rPr>
+              <a:t>시스템의 처리와 결과 보고</a:t>
+            </a:r>
+          </a:p>
+        </p:txBody>
+      </p:sp>
+      <p:sp>
+        <p:nvSpPr>
+          <p:cNvPr id="11" name="TextBox 10"/>
+          <p:cNvSpPr txBox="1"/>
+          <p:nvPr/>
+        </p:nvSpPr>
+        <p:spPr>
+          <a:xfrm>
+            <a:off x="6875876" y="3849532"/>
+            <a:ext cx="1472781" cy="1026668"/>
+          </a:xfrm>
+          <a:prstGeom prst="rect">
+            <a:avLst/>
+          </a:prstGeom>
+          <a:noFill/>
+        </p:spPr>
+        <p:txBody>
+          <a:bodyPr wrap="square" anchor="t"/>
+          <a:lstStyle/>
+          <a:p>
+            <a:pPr algn="ctr">
               <a:lnSpc>
                 <a:spcPct val="110000"/>
               </a:lnSpc>
               <a:spcAft>
-                <a:spcPts val="600"/>
+                <a:spcPts val="100"/>
               </a:spcAft>
             </a:pPr>
             <a:r>
-              <a:rPr sz="1450" b="0">
-                <a:solidFill>
-                  <a:srgbClr val="1F2A3A"/>
-                </a:solidFill>
-                <a:latin typeface="맑은 고딕"/>
-                <a:ea typeface="맑은 고딕"/>
-                <a:cs typeface="맑은 고딕"/>
-              </a:rPr>
-              <a:t>• 쓰기는 판단의 제출 하나뿐이다</a:t>
-            </a:r>
-          </a:p>
-        </p:txBody>
-      </p:sp>
-      <p:sp>
-        <p:nvSpPr>
-          <p:cNvPr id="11" name="Rounded Rectangle 10"/>
-          <p:cNvSpPr/>
-          <p:nvPr/>
-        </p:nvSpPr>
-        <p:spPr>
-          <a:xfrm>
-            <a:off x="868680" y="4945570"/>
-            <a:ext cx="822960" cy="292608"/>
-          </a:xfrm>
-          <a:prstGeom prst="roundRect">
-            <a:avLst>
-              <a:gd name="adj" fmla="val 50000"/>
-            </a:avLst>
-          </a:prstGeom>
-          <a:solidFill>
-            <a:srgbClr val="D3D9E1"/>
-          </a:solidFill>
-          <a:ln>
-            <a:noFill/>
-          </a:ln>
-        </p:spPr>
-        <p:txBody>
-          <a:bodyPr rtlCol="0" anchor="ctr"/>
-          <a:lstStyle/>
-          <a:p>
-            <a:pPr algn="ctr"/>
+              <a:rPr sz="1600" b="1">
+                <a:solidFill>
+                  <a:srgbClr val="13294B"/>
+                </a:solidFill>
+                <a:latin typeface="맑은 고딕"/>
+                <a:ea typeface="맑은 고딕"/>
+                <a:cs typeface="맑은 고딕"/>
+              </a:rPr>
+              <a:t>배타 게이트웨이</a:t>
+            </a:r>
+          </a:p>
+          <a:p>
+            <a:pPr algn="ctr">
+              <a:lnSpc>
+                <a:spcPct val="110000"/>
+              </a:lnSpc>
+              <a:spcAft>
+                <a:spcPts val="100"/>
+              </a:spcAft>
+            </a:pPr>
+            <a:r>
+              <a:rPr sz="1300" b="0">
+                <a:solidFill>
+                  <a:srgbClr val="556175"/>
+                </a:solidFill>
+                <a:latin typeface="맑은 고딕"/>
+                <a:ea typeface="맑은 고딕"/>
+                <a:cs typeface="맑은 고딕"/>
+              </a:rPr>
+              <a:t>승인과 거절의 갈림</a:t>
+            </a:r>
           </a:p>
         </p:txBody>
       </p:sp>
@@ -29728,25 +30080,28 @@
         </p:nvSpPr>
         <p:spPr>
           <a:xfrm>
-            <a:off x="868680" y="4945570"/>
-            <a:ext cx="822960" cy="292608"/>
-          </a:xfrm>
-          <a:prstGeom prst="rect">
-            <a:avLst/>
-          </a:prstGeom>
-          <a:noFill/>
-        </p:spPr>
-        <p:txBody>
-          <a:bodyPr wrap="square" anchor="ctr"/>
+            <a:off x="8403205" y="3849532"/>
+            <a:ext cx="1472781" cy="825246"/>
+          </a:xfrm>
+          <a:prstGeom prst="rect">
+            <a:avLst/>
+          </a:prstGeom>
+          <a:noFill/>
+        </p:spPr>
+        <p:txBody>
+          <a:bodyPr wrap="square" anchor="t"/>
           <a:lstStyle/>
           <a:p>
             <a:pPr algn="ctr">
               <a:lnSpc>
                 <a:spcPct val="110000"/>
               </a:lnSpc>
-            </a:pPr>
-            <a:r>
-              <a:rPr sz="1200" b="1">
+              <a:spcAft>
+                <a:spcPts val="100"/>
+              </a:spcAft>
+            </a:pPr>
+            <a:r>
+              <a:rPr sz="1600" b="1">
                 <a:solidFill>
                   <a:srgbClr val="13294B"/>
                 </a:solidFill>
@@ -29754,97 +30109,221 @@
                 <a:ea typeface="맑은 고딕"/>
                 <a:cs typeface="맑은 고딕"/>
               </a:rPr>
-              <a:t>읽기</a:t>
-            </a:r>
-          </a:p>
-        </p:txBody>
-      </p:sp>
-      <p:sp>
-        <p:nvSpPr>
-          <p:cNvPr id="13" name="Rounded Rectangle 12"/>
-          <p:cNvSpPr/>
-          <p:nvPr/>
-        </p:nvSpPr>
-        <p:spPr>
-          <a:xfrm>
-            <a:off x="6461607" y="2579941"/>
-            <a:ext cx="5181447" cy="2822829"/>
-          </a:xfrm>
-          <a:prstGeom prst="roundRect">
-            <a:avLst>
-              <a:gd name="adj" fmla="val 4000"/>
-            </a:avLst>
-          </a:prstGeom>
-          <a:solidFill>
-            <a:srgbClr val="E7F3FD"/>
-          </a:solidFill>
-          <a:ln w="28575">
-            <a:solidFill>
-              <a:srgbClr val="5CB8F2"/>
-            </a:solidFill>
-          </a:ln>
-        </p:spPr>
-        <p:txBody>
-          <a:bodyPr rtlCol="0" anchor="ctr"/>
-          <a:lstStyle/>
-          <a:p>
-            <a:pPr algn="ctr"/>
-          </a:p>
-        </p:txBody>
-      </p:sp>
-      <p:sp>
-        <p:nvSpPr>
-          <p:cNvPr id="14" name="Oval 13"/>
-          <p:cNvSpPr/>
-          <p:nvPr/>
-        </p:nvSpPr>
-        <p:spPr>
-          <a:xfrm>
-            <a:off x="6735927" y="2781109"/>
-            <a:ext cx="731520" cy="731520"/>
-          </a:xfrm>
-          <a:prstGeom prst="ellipse">
-            <a:avLst/>
-          </a:prstGeom>
-          <a:solidFill>
-            <a:srgbClr val="5CB8F2"/>
-          </a:solidFill>
-          <a:ln>
-            <a:noFill/>
-          </a:ln>
-        </p:spPr>
-        <p:txBody>
-          <a:bodyPr rtlCol="0" anchor="ctr"/>
-          <a:lstStyle/>
-          <a:p>
-            <a:pPr algn="ctr"/>
-          </a:p>
-        </p:txBody>
-      </p:sp>
-      <p:pic>
-        <p:nvPicPr>
-          <p:cNvPr id="15" name="아이콘:bolt" descr="bolt_13294B_1.6.png"/>
-          <p:cNvPicPr>
-            <a:picLocks noChangeAspect="1"/>
-          </p:cNvPicPr>
-          <p:nvPr/>
-        </p:nvPicPr>
-        <p:blipFill>
-          <a:blip r:embed="rId4"/>
-          <a:stretch>
-            <a:fillRect/>
-          </a:stretch>
-        </p:blipFill>
-        <p:spPr>
-          <a:xfrm>
-            <a:off x="6889546" y="2934728"/>
-            <a:ext cx="424281" cy="424281"/>
-          </a:xfrm>
-          <a:prstGeom prst="rect">
-            <a:avLst/>
-          </a:prstGeom>
-        </p:spPr>
-      </p:pic>
+              <a:t>비중단형 경계 타이머</a:t>
+            </a:r>
+          </a:p>
+          <a:p>
+            <a:pPr algn="ctr">
+              <a:lnSpc>
+                <a:spcPct val="110000"/>
+              </a:lnSpc>
+              <a:spcAft>
+                <a:spcPts val="100"/>
+              </a:spcAft>
+            </a:pPr>
+            <a:r>
+              <a:rPr sz="1300" b="0">
+                <a:solidFill>
+                  <a:srgbClr val="556175"/>
+                </a:solidFill>
+                <a:latin typeface="맑은 고딕"/>
+                <a:ea typeface="맑은 고딕"/>
+                <a:cs typeface="맑은 고딕"/>
+              </a:rPr>
+              <a:t>승인 지연의 알림</a:t>
+            </a:r>
+          </a:p>
+        </p:txBody>
+      </p:sp>
+      <p:sp>
+        <p:nvSpPr>
+          <p:cNvPr id="13" name="TextBox 12"/>
+          <p:cNvSpPr txBox="1"/>
+          <p:nvPr/>
+        </p:nvSpPr>
+        <p:spPr>
+          <a:xfrm>
+            <a:off x="9930535" y="3849532"/>
+            <a:ext cx="1472781" cy="778764"/>
+          </a:xfrm>
+          <a:prstGeom prst="rect">
+            <a:avLst/>
+          </a:prstGeom>
+          <a:noFill/>
+        </p:spPr>
+        <p:txBody>
+          <a:bodyPr wrap="square" anchor="t"/>
+          <a:lstStyle/>
+          <a:p>
+            <a:pPr algn="ctr">
+              <a:lnSpc>
+                <a:spcPct val="110000"/>
+              </a:lnSpc>
+              <a:spcAft>
+                <a:spcPts val="100"/>
+              </a:spcAft>
+            </a:pPr>
+            <a:r>
+              <a:rPr sz="1600" b="1">
+                <a:solidFill>
+                  <a:srgbClr val="13294B"/>
+                </a:solidFill>
+                <a:latin typeface="맑은 고딕"/>
+                <a:ea typeface="맑은 고딕"/>
+                <a:cs typeface="맑은 고딕"/>
+              </a:rPr>
+              <a:t>끝 이벤트</a:t>
+            </a:r>
+          </a:p>
+          <a:p>
+            <a:pPr algn="ctr">
+              <a:lnSpc>
+                <a:spcPct val="110000"/>
+              </a:lnSpc>
+              <a:spcAft>
+                <a:spcPts val="100"/>
+              </a:spcAft>
+            </a:pPr>
+            <a:r>
+              <a:rPr sz="1300" b="0">
+                <a:solidFill>
+                  <a:srgbClr val="556175"/>
+                </a:solidFill>
+                <a:latin typeface="맑은 고딕"/>
+                <a:ea typeface="맑은 고딕"/>
+                <a:cs typeface="맑은 고딕"/>
+              </a:rPr>
+              <a:t>끝, 거절 종결, 알림</a:t>
+            </a:r>
+          </a:p>
+        </p:txBody>
+      </p:sp>
+      <p:sp>
+        <p:nvSpPr>
+          <p:cNvPr id="14" name="TextBox 13"/>
+          <p:cNvSpPr txBox="1"/>
+          <p:nvPr/>
+        </p:nvSpPr>
+        <p:spPr>
+          <a:xfrm>
+            <a:off x="1732049" y="5504139"/>
+            <a:ext cx="2618278" cy="577342"/>
+          </a:xfrm>
+          <a:prstGeom prst="rect">
+            <a:avLst/>
+          </a:prstGeom>
+          <a:noFill/>
+        </p:spPr>
+        <p:txBody>
+          <a:bodyPr wrap="square" anchor="t"/>
+          <a:lstStyle/>
+          <a:p>
+            <a:pPr algn="ctr">
+              <a:lnSpc>
+                <a:spcPct val="110000"/>
+              </a:lnSpc>
+              <a:spcAft>
+                <a:spcPts val="100"/>
+              </a:spcAft>
+            </a:pPr>
+            <a:r>
+              <a:rPr sz="1600" b="1">
+                <a:solidFill>
+                  <a:srgbClr val="13294B"/>
+                </a:solidFill>
+                <a:latin typeface="맑은 고딕"/>
+                <a:ea typeface="맑은 고딕"/>
+                <a:cs typeface="맑은 고딕"/>
+              </a:rPr>
+              <a:t>긴급 대응</a:t>
+            </a:r>
+          </a:p>
+          <a:p>
+            <a:pPr algn="ctr">
+              <a:lnSpc>
+                <a:spcPct val="110000"/>
+              </a:lnSpc>
+              <a:spcAft>
+                <a:spcPts val="100"/>
+              </a:spcAft>
+            </a:pPr>
+            <a:r>
+              <a:rPr sz="1300" b="0">
+                <a:solidFill>
+                  <a:srgbClr val="556175"/>
+                </a:solidFill>
+                <a:latin typeface="맑은 고딕"/>
+                <a:ea typeface="맑은 고딕"/>
+                <a:cs typeface="맑은 고딕"/>
+              </a:rPr>
+              <a:t>작업 9 · 게이트웨이 2</a:t>
+            </a:r>
+          </a:p>
+        </p:txBody>
+      </p:sp>
+      <p:sp>
+        <p:nvSpPr>
+          <p:cNvPr id="15" name="TextBox 14"/>
+          <p:cNvSpPr txBox="1"/>
+          <p:nvPr/>
+        </p:nvSpPr>
+        <p:spPr>
+          <a:xfrm>
+            <a:off x="4786708" y="5504139"/>
+            <a:ext cx="2618278" cy="577342"/>
+          </a:xfrm>
+          <a:prstGeom prst="rect">
+            <a:avLst/>
+          </a:prstGeom>
+          <a:noFill/>
+        </p:spPr>
+        <p:txBody>
+          <a:bodyPr wrap="square" anchor="t"/>
+          <a:lstStyle/>
+          <a:p>
+            <a:pPr algn="ctr">
+              <a:lnSpc>
+                <a:spcPct val="110000"/>
+              </a:lnSpc>
+              <a:spcAft>
+                <a:spcPts val="100"/>
+              </a:spcAft>
+            </a:pPr>
+            <a:r>
+              <a:rPr sz="1600" b="1">
+                <a:solidFill>
+                  <a:srgbClr val="13294B"/>
+                </a:solidFill>
+                <a:latin typeface="맑은 고딕"/>
+                <a:ea typeface="맑은 고딕"/>
+                <a:cs typeface="맑은 고딕"/>
+              </a:rPr>
+              <a:t>정기 점검</a:t>
+            </a:r>
+          </a:p>
+          <a:p>
+            <a:pPr algn="ctr">
+              <a:lnSpc>
+                <a:spcPct val="110000"/>
+              </a:lnSpc>
+              <a:spcAft>
+                <a:spcPts val="100"/>
+              </a:spcAft>
+            </a:pPr>
+            <a:r>
+              <a:rPr sz="1300" b="0">
+                <a:solidFill>
+                  <a:srgbClr val="556175"/>
+                </a:solidFill>
+                <a:latin typeface="맑은 고딕"/>
+                <a:ea typeface="맑은 고딕"/>
+                <a:cs typeface="맑은 고딕"/>
+              </a:rPr>
+              <a:t>작업 6 · 게이트웨이 1</a:t>
+            </a:r>
+          </a:p>
+        </p:txBody>
+      </p:sp>
       <p:sp>
         <p:nvSpPr>
           <p:cNvPr id="16" name="TextBox 15"/>
@@ -29853,25 +30332,28 @@
         </p:nvSpPr>
         <p:spPr>
           <a:xfrm>
-            <a:off x="7604607" y="2781109"/>
-            <a:ext cx="3855567" cy="731520"/>
-          </a:xfrm>
-          <a:prstGeom prst="rect">
-            <a:avLst/>
-          </a:prstGeom>
-          <a:noFill/>
-        </p:spPr>
-        <p:txBody>
-          <a:bodyPr wrap="square" anchor="ctr"/>
-          <a:lstStyle/>
-          <a:p>
-            <a:pPr algn="l">
-              <a:lnSpc>
-                <a:spcPct val="110000"/>
-              </a:lnSpc>
-            </a:pPr>
-            <a:r>
-              <a:rPr sz="2000" b="1">
+            <a:off x="7841366" y="5504139"/>
+            <a:ext cx="2618278" cy="577342"/>
+          </a:xfrm>
+          <a:prstGeom prst="rect">
+            <a:avLst/>
+          </a:prstGeom>
+          <a:noFill/>
+        </p:spPr>
+        <p:txBody>
+          <a:bodyPr wrap="square" anchor="t"/>
+          <a:lstStyle/>
+          <a:p>
+            <a:pPr algn="ctr">
+              <a:lnSpc>
+                <a:spcPct val="110000"/>
+              </a:lnSpc>
+              <a:spcAft>
+                <a:spcPts val="100"/>
+              </a:spcAft>
+            </a:pPr>
+            <a:r>
+              <a:rPr sz="1600" b="1">
                 <a:solidFill>
                   <a:srgbClr val="13294B"/>
                 </a:solidFill>
@@ -29879,229 +30361,28 @@
                 <a:ea typeface="맑은 고딕"/>
                 <a:cs typeface="맑은 고딕"/>
               </a:rPr>
-              <a:t>프로세스의 서비스 작업</a:t>
-            </a:r>
-          </a:p>
-        </p:txBody>
-      </p:sp>
-      <p:sp>
-        <p:nvSpPr>
-          <p:cNvPr id="17" name="TextBox 16"/>
-          <p:cNvSpPr txBox="1"/>
-          <p:nvPr/>
-        </p:nvSpPr>
-        <p:spPr>
-          <a:xfrm>
-            <a:off x="6735927" y="3631501"/>
-            <a:ext cx="4632807" cy="1222629"/>
-          </a:xfrm>
-          <a:prstGeom prst="rect">
-            <a:avLst/>
-          </a:prstGeom>
-          <a:noFill/>
-        </p:spPr>
-        <p:txBody>
-          <a:bodyPr wrap="square" anchor="t"/>
-          <a:lstStyle/>
-          <a:p>
-            <a:pPr algn="l">
+              <a:t>재고 보충</a:t>
+            </a:r>
+          </a:p>
+          <a:p>
+            <a:pPr algn="ctr">
               <a:lnSpc>
                 <a:spcPct val="110000"/>
               </a:lnSpc>
               <a:spcAft>
-                <a:spcPts val="600"/>
+                <a:spcPts val="100"/>
               </a:spcAft>
             </a:pPr>
             <a:r>
-              <a:rPr sz="1450" b="0">
-                <a:solidFill>
-                  <a:srgbClr val="1F2A3A"/>
-                </a:solidFill>
-                <a:latin typeface="맑은 고딕"/>
-                <a:ea typeface="맑은 고딕"/>
-                <a:cs typeface="맑은 고딕"/>
-              </a:rPr>
-              <a:t>• 냉각 명령: 팬 속도 100 %</a:t>
-            </a:r>
-          </a:p>
-          <a:p>
-            <a:pPr algn="l">
-              <a:lnSpc>
-                <a:spcPct val="110000"/>
-              </a:lnSpc>
-              <a:spcAft>
-                <a:spcPts val="600"/>
-              </a:spcAft>
-            </a:pPr>
-            <a:r>
-              <a:rPr sz="1450" b="0">
-                <a:solidFill>
-                  <a:srgbClr val="1F2A3A"/>
-                </a:solidFill>
-                <a:latin typeface="맑은 고딕"/>
-                <a:ea typeface="맑은 고딕"/>
-                <a:cs typeface="맑은 고딕"/>
-              </a:rPr>
-              <a:t>• 작업지시 등록: WO-1010-1198</a:t>
-            </a:r>
-          </a:p>
-          <a:p>
-            <a:pPr algn="l">
-              <a:lnSpc>
-                <a:spcPct val="110000"/>
-              </a:lnSpc>
-              <a:spcAft>
-                <a:spcPts val="600"/>
-              </a:spcAft>
-            </a:pPr>
-            <a:r>
-              <a:rPr sz="1450" b="0">
-                <a:solidFill>
-                  <a:srgbClr val="1F2A3A"/>
-                </a:solidFill>
-                <a:latin typeface="맑은 고딕"/>
-                <a:ea typeface="맑은 고딕"/>
-                <a:cs typeface="맑은 고딕"/>
-              </a:rPr>
-              <a:t>• 승인이 전달된 뒤에만 열린다</a:t>
-            </a:r>
-          </a:p>
-        </p:txBody>
-      </p:sp>
-      <p:sp>
-        <p:nvSpPr>
-          <p:cNvPr id="18" name="Rounded Rectangle 17"/>
-          <p:cNvSpPr/>
-          <p:nvPr/>
-        </p:nvSpPr>
-        <p:spPr>
-          <a:xfrm>
-            <a:off x="6781647" y="4945570"/>
-            <a:ext cx="822960" cy="292608"/>
-          </a:xfrm>
-          <a:prstGeom prst="roundRect">
-            <a:avLst>
-              <a:gd name="adj" fmla="val 50000"/>
-            </a:avLst>
-          </a:prstGeom>
-          <a:solidFill>
-            <a:srgbClr val="5CB8F2"/>
-          </a:solidFill>
-          <a:ln>
-            <a:noFill/>
-          </a:ln>
-        </p:spPr>
-        <p:txBody>
-          <a:bodyPr rtlCol="0" anchor="ctr"/>
-          <a:lstStyle/>
-          <a:p>
-            <a:pPr algn="ctr"/>
-          </a:p>
-        </p:txBody>
-      </p:sp>
-      <p:sp>
-        <p:nvSpPr>
-          <p:cNvPr id="19" name="TextBox 18"/>
-          <p:cNvSpPr txBox="1"/>
-          <p:nvPr/>
-        </p:nvSpPr>
-        <p:spPr>
-          <a:xfrm>
-            <a:off x="6781647" y="4945570"/>
-            <a:ext cx="822960" cy="292608"/>
-          </a:xfrm>
-          <a:prstGeom prst="rect">
-            <a:avLst/>
-          </a:prstGeom>
-          <a:noFill/>
-        </p:spPr>
-        <p:txBody>
-          <a:bodyPr wrap="square" anchor="ctr"/>
-          <a:lstStyle/>
-          <a:p>
-            <a:pPr algn="ctr">
-              <a:lnSpc>
-                <a:spcPct val="110000"/>
-              </a:lnSpc>
-            </a:pPr>
-            <a:r>
-              <a:rPr sz="1200" b="1">
-                <a:solidFill>
-                  <a:srgbClr val="13294B"/>
-                </a:solidFill>
-                <a:latin typeface="맑은 고딕"/>
-                <a:ea typeface="맑은 고딕"/>
-                <a:cs typeface="맑은 고딕"/>
-              </a:rPr>
-              <a:t>쓰기</a:t>
-            </a:r>
-          </a:p>
-        </p:txBody>
-      </p:sp>
-      <p:sp>
-        <p:nvSpPr>
-          <p:cNvPr id="20" name="Oval 19"/>
-          <p:cNvSpPr/>
-          <p:nvPr/>
-        </p:nvSpPr>
-        <p:spPr>
-          <a:xfrm>
-            <a:off x="5821527" y="3717036"/>
-            <a:ext cx="548640" cy="548640"/>
-          </a:xfrm>
-          <a:prstGeom prst="ellipse">
-            <a:avLst/>
-          </a:prstGeom>
-          <a:solidFill>
-            <a:srgbClr val="13294B"/>
-          </a:solidFill>
-          <a:ln>
-            <a:noFill/>
-          </a:ln>
-        </p:spPr>
-        <p:txBody>
-          <a:bodyPr rtlCol="0" anchor="ctr"/>
-          <a:lstStyle/>
-          <a:p>
-            <a:pPr algn="ctr"/>
-          </a:p>
-        </p:txBody>
-      </p:sp>
-      <p:sp>
-        <p:nvSpPr>
-          <p:cNvPr id="21" name="TextBox 20"/>
-          <p:cNvSpPr txBox="1"/>
-          <p:nvPr/>
-        </p:nvSpPr>
-        <p:spPr>
-          <a:xfrm>
-            <a:off x="5821527" y="3717036"/>
-            <a:ext cx="548640" cy="548640"/>
-          </a:xfrm>
-          <a:prstGeom prst="rect">
-            <a:avLst/>
-          </a:prstGeom>
-          <a:noFill/>
-        </p:spPr>
-        <p:txBody>
-          <a:bodyPr wrap="square" anchor="ctr"/>
-          <a:lstStyle/>
-          <a:p>
-            <a:pPr algn="ctr">
-              <a:lnSpc>
-                <a:spcPct val="110000"/>
-              </a:lnSpc>
-            </a:pPr>
-            <a:r>
-              <a:rPr sz="1400" b="1">
-                <a:solidFill>
-                  <a:srgbClr val="FFFFFF"/>
-                </a:solidFill>
-                <a:latin typeface="맑은 고딕"/>
-                <a:ea typeface="맑은 고딕"/>
-                <a:cs typeface="맑은 고딕"/>
-              </a:rPr>
-              <a:t>vs</a:t>
+              <a:rPr sz="1300" b="0">
+                <a:solidFill>
+                  <a:srgbClr val="556175"/>
+                </a:solidFill>
+                <a:latin typeface="맑은 고딕"/>
+                <a:ea typeface="맑은 고딕"/>
+                <a:cs typeface="맑은 고딕"/>
+              </a:rPr>
+              <a:t>작업 7 · 게이트웨이 1</a:t>
             </a:r>
           </a:p>
         </p:txBody>
@@ -30166,7 +30447,7 @@
                 <a:ea typeface="맑은 고딕"/>
                 <a:cs typeface="맑은 고딕"/>
               </a:rPr>
-              <a:t>세 그림을 그리는 데 쓴 BPMN 요소</a:t>
+              <a:t>처리 건이 지나는 다섯 자리</a:t>
             </a:r>
           </a:p>
         </p:txBody>
@@ -30205,7 +30486,7 @@
                 <a:ea typeface="맑은 고딕"/>
                 <a:cs typeface="맑은 고딕"/>
               </a:rPr>
-              <a:t>세 프로세스는 일곱 가지 기호만으로 그려져, 이 기호를 읽으면 세 업무의 순서와 책임과 예외 경로를 따라갈 수 있다.</a:t>
+              <a:t>어느 업무든 승인된 처리 건은 시작 이벤트, 에이전트의 판단, 사람의 승인, 시스템의 처리, 종료 기록을 차례로 지난다.</a:t>
             </a:r>
           </a:p>
         </p:txBody>
@@ -30280,7 +30561,7 @@
       </p:sp>
       <p:pic>
         <p:nvPicPr>
-          <p:cNvPr id="6" name="삽화:요소_복습.svg" descr="illust_514128265356303084_1791743711.png"/>
+          <p:cNvPr id="6" name="삽화:다섯자리.svg" descr="illust_1085505173167016964_1791743711.png"/>
           <p:cNvPicPr>
             <a:picLocks noChangeAspect="1"/>
           </p:cNvPicPr>
@@ -30310,8 +30591,8 @@
         </p:nvSpPr>
         <p:spPr>
           <a:xfrm>
-            <a:off x="766559" y="3849532"/>
-            <a:ext cx="1472781" cy="1026668"/>
+            <a:off x="837471" y="1769455"/>
+            <a:ext cx="1963709" cy="577342"/>
           </a:xfrm>
           <a:prstGeom prst="rect">
             <a:avLst/>
@@ -30339,7 +30620,7 @@
                 <a:ea typeface="맑은 고딕"/>
                 <a:cs typeface="맑은 고딕"/>
               </a:rPr>
-              <a:t>메시지 시작 이벤트</a:t>
+              <a:t>시작 이벤트</a:t>
             </a:r>
           </a:p>
           <a:p>
@@ -30360,7 +30641,7 @@
                 <a:ea typeface="맑은 고딕"/>
                 <a:cs typeface="맑은 고딕"/>
               </a:rPr>
-              <a:t>경보가 도착하면 연다</a:t>
+              <a:t>사건이 경보로 도착한다</a:t>
             </a:r>
           </a:p>
         </p:txBody>
@@ -30373,8 +30654,8 @@
         </p:nvSpPr>
         <p:spPr>
           <a:xfrm>
-            <a:off x="2293888" y="3849532"/>
-            <a:ext cx="1472781" cy="577342"/>
+            <a:off x="2975732" y="1769455"/>
+            <a:ext cx="1963709" cy="577342"/>
           </a:xfrm>
           <a:prstGeom prst="rect">
             <a:avLst/>
@@ -30402,7 +30683,7 @@
                 <a:ea typeface="맑은 고딕"/>
                 <a:cs typeface="맑은 고딕"/>
               </a:rPr>
-              <a:t>작업</a:t>
+              <a:t>에이전트의 판단</a:t>
             </a:r>
           </a:p>
           <a:p>
@@ -30423,7 +30704,7 @@
                 <a:ea typeface="맑은 고딕"/>
                 <a:cs typeface="맑은 고딕"/>
               </a:rPr>
-              <a:t>에이전트의 제안</a:t>
+              <a:t>읽고 견주어 제안한다</a:t>
             </a:r>
           </a:p>
         </p:txBody>
@@ -30436,8 +30717,8 @@
         </p:nvSpPr>
         <p:spPr>
           <a:xfrm>
-            <a:off x="3821217" y="3849532"/>
-            <a:ext cx="1472781" cy="577342"/>
+            <a:off x="5059445" y="1769455"/>
+            <a:ext cx="2072804" cy="577342"/>
           </a:xfrm>
           <a:prstGeom prst="rect">
             <a:avLst/>
@@ -30459,13 +30740,13 @@
             <a:r>
               <a:rPr sz="1600" b="1">
                 <a:solidFill>
-                  <a:srgbClr val="13294B"/>
-                </a:solidFill>
-                <a:latin typeface="맑은 고딕"/>
-                <a:ea typeface="맑은 고딕"/>
-                <a:cs typeface="맑은 고딕"/>
-              </a:rPr>
-              <a:t>사용자 작업</a:t>
+                  <a:srgbClr val="1A6FC4"/>
+                </a:solidFill>
+                <a:latin typeface="맑은 고딕"/>
+                <a:ea typeface="맑은 고딕"/>
+                <a:cs typeface="맑은 고딕"/>
+              </a:rPr>
+              <a:t>사람의 승인 · 거절</a:t>
             </a:r>
           </a:p>
           <a:p>
@@ -30486,7 +30767,7 @@
                 <a:ea typeface="맑은 고딕"/>
                 <a:cs typeface="맑은 고딕"/>
               </a:rPr>
-              <a:t>사람의 승인</a:t>
+              <a:t>정해진 역할이 결정한다</a:t>
             </a:r>
           </a:p>
         </p:txBody>
@@ -30499,8 +30780,8 @@
         </p:nvSpPr>
         <p:spPr>
           <a:xfrm>
-            <a:off x="5348547" y="3849532"/>
-            <a:ext cx="1472781" cy="778764"/>
+            <a:off x="7252254" y="1769455"/>
+            <a:ext cx="1963709" cy="577342"/>
           </a:xfrm>
           <a:prstGeom prst="rect">
             <a:avLst/>
@@ -30528,7 +30809,7 @@
                 <a:ea typeface="맑은 고딕"/>
                 <a:cs typeface="맑은 고딕"/>
               </a:rPr>
-              <a:t>서비스 작업</a:t>
+              <a:t>시스템의 처리</a:t>
             </a:r>
           </a:p>
           <a:p>
@@ -30549,7 +30830,7 @@
                 <a:ea typeface="맑은 고딕"/>
                 <a:cs typeface="맑은 고딕"/>
               </a:rPr>
-              <a:t>시스템의 처리와 결과 보고</a:t>
+              <a:t>승인된 내용을 실행한다</a:t>
             </a:r>
           </a:p>
         </p:txBody>
@@ -30562,8 +30843,8 @@
         </p:nvSpPr>
         <p:spPr>
           <a:xfrm>
-            <a:off x="6875876" y="3849532"/>
-            <a:ext cx="1472781" cy="1026668"/>
+            <a:off x="9390515" y="1769455"/>
+            <a:ext cx="1963709" cy="577342"/>
           </a:xfrm>
           <a:prstGeom prst="rect">
             <a:avLst/>
@@ -30591,7 +30872,7 @@
                 <a:ea typeface="맑은 고딕"/>
                 <a:cs typeface="맑은 고딕"/>
               </a:rPr>
-              <a:t>배타 게이트웨이</a:t>
+              <a:t>종료 기록</a:t>
             </a:r>
           </a:p>
           <a:p>
@@ -30612,7 +30893,7 @@
                 <a:ea typeface="맑은 고딕"/>
                 <a:cs typeface="맑은 고딕"/>
               </a:rPr>
-              <a:t>승인과 거절의 갈림</a:t>
+              <a:t>끝 이벤트와 결과 보고</a:t>
             </a:r>
           </a:p>
         </p:txBody>
@@ -30625,8 +30906,8 @@
         </p:nvSpPr>
         <p:spPr>
           <a:xfrm>
-            <a:off x="8403205" y="3849532"/>
-            <a:ext cx="1472781" cy="825246"/>
+            <a:off x="5615829" y="5409590"/>
+            <a:ext cx="5236557" cy="778764"/>
           </a:xfrm>
           <a:prstGeom prst="rect">
             <a:avLst/>
@@ -30654,7 +30935,7 @@
                 <a:ea typeface="맑은 고딕"/>
                 <a:cs typeface="맑은 고딕"/>
               </a:rPr>
-              <a:t>비중단형 경계 타이머</a:t>
+              <a:t>거절</a:t>
             </a:r>
           </a:p>
           <a:p>
@@ -30675,30 +30956,9 @@
                 <a:ea typeface="맑은 고딕"/>
                 <a:cs typeface="맑은 고딕"/>
               </a:rPr>
-              <a:t>승인 지연의 알림</a:t>
-            </a:r>
-          </a:p>
-        </p:txBody>
-      </p:sp>
-      <p:sp>
-        <p:nvSpPr>
-          <p:cNvPr id="13" name="TextBox 12"/>
-          <p:cNvSpPr txBox="1"/>
-          <p:nvPr/>
-        </p:nvSpPr>
-        <p:spPr>
-          <a:xfrm>
-            <a:off x="9930535" y="3849532"/>
-            <a:ext cx="1472781" cy="778764"/>
-          </a:xfrm>
-          <a:prstGeom prst="rect">
-            <a:avLst/>
-          </a:prstGeom>
-          <a:noFill/>
-        </p:spPr>
-        <p:txBody>
-          <a:bodyPr wrap="square" anchor="t"/>
-          <a:lstStyle/>
+              <a:t>시스템의 처리를 지나지 않고 종료 기록으로 간다</a:t>
+            </a:r>
+          </a:p>
           <a:p>
             <a:pPr algn="ctr">
               <a:lnSpc>
@@ -30709,27 +30969,6 @@
               </a:spcAft>
             </a:pPr>
             <a:r>
-              <a:rPr sz="1600" b="1">
-                <a:solidFill>
-                  <a:srgbClr val="13294B"/>
-                </a:solidFill>
-                <a:latin typeface="맑은 고딕"/>
-                <a:ea typeface="맑은 고딕"/>
-                <a:cs typeface="맑은 고딕"/>
-              </a:rPr>
-              <a:t>끝 이벤트</a:t>
-            </a:r>
-          </a:p>
-          <a:p>
-            <a:pPr algn="ctr">
-              <a:lnSpc>
-                <a:spcPct val="110000"/>
-              </a:lnSpc>
-              <a:spcAft>
-                <a:spcPts val="100"/>
-              </a:spcAft>
-            </a:pPr>
-            <a:r>
               <a:rPr sz="1300" b="0">
                 <a:solidFill>
                   <a:srgbClr val="556175"/>
@@ -30738,196 +30977,7 @@
                 <a:ea typeface="맑은 고딕"/>
                 <a:cs typeface="맑은 고딕"/>
               </a:rPr>
-              <a:t>끝, 거절 종결, 알림</a:t>
-            </a:r>
-          </a:p>
-        </p:txBody>
-      </p:sp>
-      <p:sp>
-        <p:nvSpPr>
-          <p:cNvPr id="14" name="TextBox 13"/>
-          <p:cNvSpPr txBox="1"/>
-          <p:nvPr/>
-        </p:nvSpPr>
-        <p:spPr>
-          <a:xfrm>
-            <a:off x="1732049" y="5504139"/>
-            <a:ext cx="2618278" cy="577342"/>
-          </a:xfrm>
-          <a:prstGeom prst="rect">
-            <a:avLst/>
-          </a:prstGeom>
-          <a:noFill/>
-        </p:spPr>
-        <p:txBody>
-          <a:bodyPr wrap="square" anchor="t"/>
-          <a:lstStyle/>
-          <a:p>
-            <a:pPr algn="ctr">
-              <a:lnSpc>
-                <a:spcPct val="110000"/>
-              </a:lnSpc>
-              <a:spcAft>
-                <a:spcPts val="100"/>
-              </a:spcAft>
-            </a:pPr>
-            <a:r>
-              <a:rPr sz="1600" b="1">
-                <a:solidFill>
-                  <a:srgbClr val="13294B"/>
-                </a:solidFill>
-                <a:latin typeface="맑은 고딕"/>
-                <a:ea typeface="맑은 고딕"/>
-                <a:cs typeface="맑은 고딕"/>
-              </a:rPr>
-              <a:t>긴급 대응</a:t>
-            </a:r>
-          </a:p>
-          <a:p>
-            <a:pPr algn="ctr">
-              <a:lnSpc>
-                <a:spcPct val="110000"/>
-              </a:lnSpc>
-              <a:spcAft>
-                <a:spcPts val="100"/>
-              </a:spcAft>
-            </a:pPr>
-            <a:r>
-              <a:rPr sz="1300" b="0">
-                <a:solidFill>
-                  <a:srgbClr val="556175"/>
-                </a:solidFill>
-                <a:latin typeface="맑은 고딕"/>
-                <a:ea typeface="맑은 고딕"/>
-                <a:cs typeface="맑은 고딕"/>
-              </a:rPr>
-              <a:t>작업 9 · 게이트웨이 2</a:t>
-            </a:r>
-          </a:p>
-        </p:txBody>
-      </p:sp>
-      <p:sp>
-        <p:nvSpPr>
-          <p:cNvPr id="15" name="TextBox 14"/>
-          <p:cNvSpPr txBox="1"/>
-          <p:nvPr/>
-        </p:nvSpPr>
-        <p:spPr>
-          <a:xfrm>
-            <a:off x="4786708" y="5504139"/>
-            <a:ext cx="2618278" cy="577342"/>
-          </a:xfrm>
-          <a:prstGeom prst="rect">
-            <a:avLst/>
-          </a:prstGeom>
-          <a:noFill/>
-        </p:spPr>
-        <p:txBody>
-          <a:bodyPr wrap="square" anchor="t"/>
-          <a:lstStyle/>
-          <a:p>
-            <a:pPr algn="ctr">
-              <a:lnSpc>
-                <a:spcPct val="110000"/>
-              </a:lnSpc>
-              <a:spcAft>
-                <a:spcPts val="100"/>
-              </a:spcAft>
-            </a:pPr>
-            <a:r>
-              <a:rPr sz="1600" b="1">
-                <a:solidFill>
-                  <a:srgbClr val="13294B"/>
-                </a:solidFill>
-                <a:latin typeface="맑은 고딕"/>
-                <a:ea typeface="맑은 고딕"/>
-                <a:cs typeface="맑은 고딕"/>
-              </a:rPr>
-              <a:t>정기 점검</a:t>
-            </a:r>
-          </a:p>
-          <a:p>
-            <a:pPr algn="ctr">
-              <a:lnSpc>
-                <a:spcPct val="110000"/>
-              </a:lnSpc>
-              <a:spcAft>
-                <a:spcPts val="100"/>
-              </a:spcAft>
-            </a:pPr>
-            <a:r>
-              <a:rPr sz="1300" b="0">
-                <a:solidFill>
-                  <a:srgbClr val="556175"/>
-                </a:solidFill>
-                <a:latin typeface="맑은 고딕"/>
-                <a:ea typeface="맑은 고딕"/>
-                <a:cs typeface="맑은 고딕"/>
-              </a:rPr>
-              <a:t>작업 6 · 게이트웨이 1</a:t>
-            </a:r>
-          </a:p>
-        </p:txBody>
-      </p:sp>
-      <p:sp>
-        <p:nvSpPr>
-          <p:cNvPr id="16" name="TextBox 15"/>
-          <p:cNvSpPr txBox="1"/>
-          <p:nvPr/>
-        </p:nvSpPr>
-        <p:spPr>
-          <a:xfrm>
-            <a:off x="7841366" y="5504139"/>
-            <a:ext cx="2618278" cy="577342"/>
-          </a:xfrm>
-          <a:prstGeom prst="rect">
-            <a:avLst/>
-          </a:prstGeom>
-          <a:noFill/>
-        </p:spPr>
-        <p:txBody>
-          <a:bodyPr wrap="square" anchor="t"/>
-          <a:lstStyle/>
-          <a:p>
-            <a:pPr algn="ctr">
-              <a:lnSpc>
-                <a:spcPct val="110000"/>
-              </a:lnSpc>
-              <a:spcAft>
-                <a:spcPts val="100"/>
-              </a:spcAft>
-            </a:pPr>
-            <a:r>
-              <a:rPr sz="1600" b="1">
-                <a:solidFill>
-                  <a:srgbClr val="13294B"/>
-                </a:solidFill>
-                <a:latin typeface="맑은 고딕"/>
-                <a:ea typeface="맑은 고딕"/>
-                <a:cs typeface="맑은 고딕"/>
-              </a:rPr>
-              <a:t>재고 보충</a:t>
-            </a:r>
-          </a:p>
-          <a:p>
-            <a:pPr algn="ctr">
-              <a:lnSpc>
-                <a:spcPct val="110000"/>
-              </a:lnSpc>
-              <a:spcAft>
-                <a:spcPts val="100"/>
-              </a:spcAft>
-            </a:pPr>
-            <a:r>
-              <a:rPr sz="1300" b="0">
-                <a:solidFill>
-                  <a:srgbClr val="556175"/>
-                </a:solidFill>
-                <a:latin typeface="맑은 고딕"/>
-                <a:ea typeface="맑은 고딕"/>
-                <a:cs typeface="맑은 고딕"/>
-              </a:rPr>
-              <a:t>작업 7 · 게이트웨이 1</a:t>
+              <a:t>세 업무 모두 거절된 추천안은 시스템의 실행 없이 닫혔다</a:t>
             </a:r>
           </a:p>
         </p:txBody>
@@ -30992,7 +31042,7 @@
                 <a:ea typeface="맑은 고딕"/>
                 <a:cs typeface="맑은 고딕"/>
               </a:rPr>
-              <a:t>처리 건이 지나는 다섯 자리</a:t>
+              <a:t>한 처리 건 안에서 주고받는 것</a:t>
             </a:r>
           </a:p>
         </p:txBody>
@@ -31031,7 +31081,7 @@
                 <a:ea typeface="맑은 고딕"/>
                 <a:cs typeface="맑은 고딕"/>
               </a:rPr>
-              <a:t>어느 업무든 승인된 처리 건은 시작 이벤트, 에이전트의 판단, 사람의 승인, 시스템의 처리, 종료 기록을 차례로 지난다.</a:t>
+              <a:t>다섯 자리는 앞 자리가 낸 것을 받아 일하므로, 경보는 추천안이 되고 추천안은 승인된 내용이 되어 기록으로 이어진다.</a:t>
             </a:r>
           </a:p>
         </p:txBody>
@@ -31106,7 +31156,7 @@
       </p:sp>
       <p:pic>
         <p:nvPicPr>
-          <p:cNvPr id="6" name="삽화:다섯자리.svg" descr="illust_9052977979641863706_1791743711.png"/>
+          <p:cNvPr id="6" name="삽화:주고받는것.svg" descr="illust_8686692510619145217_1791743711.png"/>
           <p:cNvPicPr>
             <a:picLocks noChangeAspect="1"/>
           </p:cNvPicPr>
@@ -31136,8 +31186,8 @@
         </p:nvSpPr>
         <p:spPr>
           <a:xfrm>
-            <a:off x="837471" y="1769455"/>
-            <a:ext cx="1963709" cy="577342"/>
+            <a:off x="881108" y="1627632"/>
+            <a:ext cx="1527329" cy="375920"/>
           </a:xfrm>
           <a:prstGeom prst="rect">
             <a:avLst/>
@@ -31168,6 +31218,27 @@
               <a:t>시작 이벤트</a:t>
             </a:r>
           </a:p>
+        </p:txBody>
+      </p:sp>
+      <p:sp>
+        <p:nvSpPr>
+          <p:cNvPr id="8" name="TextBox 7"/>
+          <p:cNvSpPr txBox="1"/>
+          <p:nvPr/>
+        </p:nvSpPr>
+        <p:spPr>
+          <a:xfrm>
+            <a:off x="3106645" y="1627632"/>
+            <a:ext cx="1527329" cy="375920"/>
+          </a:xfrm>
+          <a:prstGeom prst="rect">
+            <a:avLst/>
+          </a:prstGeom>
+          <a:noFill/>
+        </p:spPr>
+        <p:txBody>
+          <a:bodyPr wrap="square" anchor="t"/>
+          <a:lstStyle/>
           <a:p>
             <a:pPr algn="ctr">
               <a:lnSpc>
@@ -31178,29 +31249,29 @@
               </a:spcAft>
             </a:pPr>
             <a:r>
-              <a:rPr sz="1300" b="0">
-                <a:solidFill>
-                  <a:srgbClr val="556175"/>
-                </a:solidFill>
-                <a:latin typeface="맑은 고딕"/>
-                <a:ea typeface="맑은 고딕"/>
-                <a:cs typeface="맑은 고딕"/>
-              </a:rPr>
-              <a:t>사건이 경보로 도착한다</a:t>
-            </a:r>
-          </a:p>
-        </p:txBody>
-      </p:sp>
-      <p:sp>
-        <p:nvSpPr>
-          <p:cNvPr id="8" name="TextBox 7"/>
-          <p:cNvSpPr txBox="1"/>
-          <p:nvPr/>
-        </p:nvSpPr>
-        <p:spPr>
-          <a:xfrm>
-            <a:off x="2975732" y="1769455"/>
-            <a:ext cx="1963709" cy="577342"/>
+              <a:rPr sz="1600" b="1">
+                <a:solidFill>
+                  <a:srgbClr val="13294B"/>
+                </a:solidFill>
+                <a:latin typeface="맑은 고딕"/>
+                <a:ea typeface="맑은 고딕"/>
+                <a:cs typeface="맑은 고딕"/>
+              </a:rPr>
+              <a:t>에이전트</a:t>
+            </a:r>
+          </a:p>
+        </p:txBody>
+      </p:sp>
+      <p:sp>
+        <p:nvSpPr>
+          <p:cNvPr id="9" name="TextBox 8"/>
+          <p:cNvSpPr txBox="1"/>
+          <p:nvPr/>
+        </p:nvSpPr>
+        <p:spPr>
+          <a:xfrm>
+            <a:off x="5332182" y="1627632"/>
+            <a:ext cx="1527329" cy="375920"/>
           </a:xfrm>
           <a:prstGeom prst="rect">
             <a:avLst/>
@@ -31228,9 +31299,30 @@
                 <a:ea typeface="맑은 고딕"/>
                 <a:cs typeface="맑은 고딕"/>
               </a:rPr>
-              <a:t>에이전트의 판단</a:t>
-            </a:r>
-          </a:p>
+              <a:t>사람</a:t>
+            </a:r>
+          </a:p>
+        </p:txBody>
+      </p:sp>
+      <p:sp>
+        <p:nvSpPr>
+          <p:cNvPr id="10" name="TextBox 9"/>
+          <p:cNvSpPr txBox="1"/>
+          <p:nvPr/>
+        </p:nvSpPr>
+        <p:spPr>
+          <a:xfrm>
+            <a:off x="7557719" y="1627632"/>
+            <a:ext cx="1527329" cy="375920"/>
+          </a:xfrm>
+          <a:prstGeom prst="rect">
+            <a:avLst/>
+          </a:prstGeom>
+          <a:noFill/>
+        </p:spPr>
+        <p:txBody>
+          <a:bodyPr wrap="square" anchor="t"/>
+          <a:lstStyle/>
           <a:p>
             <a:pPr algn="ctr">
               <a:lnSpc>
@@ -31241,29 +31333,29 @@
               </a:spcAft>
             </a:pPr>
             <a:r>
-              <a:rPr sz="1300" b="0">
-                <a:solidFill>
-                  <a:srgbClr val="556175"/>
-                </a:solidFill>
-                <a:latin typeface="맑은 고딕"/>
-                <a:ea typeface="맑은 고딕"/>
-                <a:cs typeface="맑은 고딕"/>
-              </a:rPr>
-              <a:t>읽고 견주어 제안한다</a:t>
-            </a:r>
-          </a:p>
-        </p:txBody>
-      </p:sp>
-      <p:sp>
-        <p:nvSpPr>
-          <p:cNvPr id="9" name="TextBox 8"/>
-          <p:cNvSpPr txBox="1"/>
-          <p:nvPr/>
-        </p:nvSpPr>
-        <p:spPr>
-          <a:xfrm>
-            <a:off x="5059445" y="1769455"/>
-            <a:ext cx="2072804" cy="577342"/>
+              <a:rPr sz="1600" b="1">
+                <a:solidFill>
+                  <a:srgbClr val="13294B"/>
+                </a:solidFill>
+                <a:latin typeface="맑은 고딕"/>
+                <a:ea typeface="맑은 고딕"/>
+                <a:cs typeface="맑은 고딕"/>
+              </a:rPr>
+              <a:t>시스템</a:t>
+            </a:r>
+          </a:p>
+        </p:txBody>
+      </p:sp>
+      <p:sp>
+        <p:nvSpPr>
+          <p:cNvPr id="11" name="TextBox 10"/>
+          <p:cNvSpPr txBox="1"/>
+          <p:nvPr/>
+        </p:nvSpPr>
+        <p:spPr>
+          <a:xfrm>
+            <a:off x="9783256" y="1627632"/>
+            <a:ext cx="1527329" cy="375920"/>
           </a:xfrm>
           <a:prstGeom prst="rect">
             <a:avLst/>
@@ -31285,15 +31377,36 @@
             <a:r>
               <a:rPr sz="1600" b="1">
                 <a:solidFill>
-                  <a:srgbClr val="1A6FC4"/>
-                </a:solidFill>
-                <a:latin typeface="맑은 고딕"/>
-                <a:ea typeface="맑은 고딕"/>
-                <a:cs typeface="맑은 고딕"/>
-              </a:rPr>
-              <a:t>사람의 승인 · 거절</a:t>
-            </a:r>
-          </a:p>
+                  <a:srgbClr val="13294B"/>
+                </a:solidFill>
+                <a:latin typeface="맑은 고딕"/>
+                <a:ea typeface="맑은 고딕"/>
+                <a:cs typeface="맑은 고딕"/>
+              </a:rPr>
+              <a:t>결과 보고</a:t>
+            </a:r>
+          </a:p>
+        </p:txBody>
+      </p:sp>
+      <p:sp>
+        <p:nvSpPr>
+          <p:cNvPr id="12" name="TextBox 11"/>
+          <p:cNvSpPr txBox="1"/>
+          <p:nvPr/>
+        </p:nvSpPr>
+        <p:spPr>
+          <a:xfrm>
+            <a:off x="1252031" y="3707709"/>
+            <a:ext cx="2836468" cy="1383029"/>
+          </a:xfrm>
+          <a:prstGeom prst="rect">
+            <a:avLst/>
+          </a:prstGeom>
+          <a:noFill/>
+        </p:spPr>
+        <p:txBody>
+          <a:bodyPr wrap="square" anchor="t"/>
+          <a:lstStyle/>
           <a:p>
             <a:pPr algn="ctr">
               <a:lnSpc>
@@ -31304,38 +31417,17 @@
               </a:spcAft>
             </a:pPr>
             <a:r>
-              <a:rPr sz="1300" b="0">
-                <a:solidFill>
-                  <a:srgbClr val="556175"/>
-                </a:solidFill>
-                <a:latin typeface="맑은 고딕"/>
-                <a:ea typeface="맑은 고딕"/>
-                <a:cs typeface="맑은 고딕"/>
-              </a:rPr>
-              <a:t>정해진 역할이 결정한다</a:t>
-            </a:r>
-          </a:p>
-        </p:txBody>
-      </p:sp>
-      <p:sp>
-        <p:nvSpPr>
-          <p:cNvPr id="10" name="TextBox 9"/>
-          <p:cNvSpPr txBox="1"/>
-          <p:nvPr/>
-        </p:nvSpPr>
-        <p:spPr>
-          <a:xfrm>
-            <a:off x="7252254" y="1769455"/>
-            <a:ext cx="1963709" cy="577342"/>
-          </a:xfrm>
-          <a:prstGeom prst="rect">
-            <a:avLst/>
-          </a:prstGeom>
-          <a:noFill/>
-        </p:spPr>
-        <p:txBody>
-          <a:bodyPr wrap="square" anchor="t"/>
-          <a:lstStyle/>
+              <a:rPr sz="1600" b="1">
+                <a:solidFill>
+                  <a:srgbClr val="1A6FC4"/>
+                </a:solidFill>
+                <a:latin typeface="맑은 고딕"/>
+                <a:ea typeface="맑은 고딕"/>
+                <a:cs typeface="맑은 고딕"/>
+              </a:rPr>
+              <a:t>경보의 내용</a:t>
+            </a:r>
+          </a:p>
           <a:p>
             <a:pPr algn="ctr">
               <a:lnSpc>
@@ -31346,15 +31438,15 @@
               </a:spcAft>
             </a:pPr>
             <a:r>
-              <a:rPr sz="1600" b="1">
-                <a:solidFill>
-                  <a:srgbClr val="13294B"/>
-                </a:solidFill>
-                <a:latin typeface="맑은 고딕"/>
-                <a:ea typeface="맑은 고딕"/>
-                <a:cs typeface="맑은 고딕"/>
-              </a:rPr>
-              <a:t>시스템의 처리</a:t>
+              <a:rPr sz="1300" b="0">
+                <a:solidFill>
+                  <a:srgbClr val="556175"/>
+                </a:solidFill>
+                <a:latin typeface="맑은 고딕"/>
+                <a:ea typeface="맑은 고딕"/>
+                <a:cs typeface="맑은 고딕"/>
+              </a:rPr>
+              <a:t>설비와 경보 패턴</a:t>
             </a:r>
           </a:p>
           <a:p>
@@ -31375,30 +31467,9 @@
                 <a:ea typeface="맑은 고딕"/>
                 <a:cs typeface="맑은 고딕"/>
               </a:rPr>
-              <a:t>승인된 내용을 실행한다</a:t>
-            </a:r>
-          </a:p>
-        </p:txBody>
-      </p:sp>
-      <p:sp>
-        <p:nvSpPr>
-          <p:cNvPr id="11" name="TextBox 10"/>
-          <p:cNvSpPr txBox="1"/>
-          <p:nvPr/>
-        </p:nvSpPr>
-        <p:spPr>
-          <a:xfrm>
-            <a:off x="9390515" y="1769455"/>
-            <a:ext cx="1963709" cy="577342"/>
-          </a:xfrm>
-          <a:prstGeom prst="rect">
-            <a:avLst/>
-          </a:prstGeom>
-          <a:noFill/>
-        </p:spPr>
-        <p:txBody>
-          <a:bodyPr wrap="square" anchor="t"/>
-          <a:lstStyle/>
+              <a:t>HYD-01 · COOLER_DEGRADATION</a:t>
+            </a:r>
+          </a:p>
           <a:p>
             <a:pPr algn="ctr">
               <a:lnSpc>
@@ -31409,15 +31480,15 @@
               </a:spcAft>
             </a:pPr>
             <a:r>
-              <a:rPr sz="1600" b="1">
-                <a:solidFill>
-                  <a:srgbClr val="13294B"/>
-                </a:solidFill>
-                <a:latin typeface="맑은 고딕"/>
-                <a:ea typeface="맑은 고딕"/>
-                <a:cs typeface="맑은 고딕"/>
-              </a:rPr>
-              <a:t>종료 기록</a:t>
+              <a:rPr sz="1300" b="0">
+                <a:solidFill>
+                  <a:srgbClr val="556175"/>
+                </a:solidFill>
+                <a:latin typeface="맑은 고딕"/>
+                <a:ea typeface="맑은 고딕"/>
+                <a:cs typeface="맑은 고딕"/>
+              </a:rPr>
+              <a:t>HYD-02 · PM_DUE</a:t>
             </a:r>
           </a:p>
           <a:p>
@@ -31438,21 +31509,21 @@
                 <a:ea typeface="맑은 고딕"/>
                 <a:cs typeface="맑은 고딕"/>
               </a:rPr>
-              <a:t>끝 이벤트와 결과 보고</a:t>
-            </a:r>
-          </a:p>
-        </p:txBody>
-      </p:sp>
-      <p:sp>
-        <p:nvSpPr>
-          <p:cNvPr id="12" name="TextBox 11"/>
-          <p:cNvSpPr txBox="1"/>
-          <p:nvPr/>
-        </p:nvSpPr>
-        <p:spPr>
-          <a:xfrm>
-            <a:off x="6052209" y="5409590"/>
-            <a:ext cx="4363798" cy="577342"/>
+              <a:t>씰 키트 · SPARE_BELOW_MIN</a:t>
+            </a:r>
+          </a:p>
+        </p:txBody>
+      </p:sp>
+      <p:sp>
+        <p:nvSpPr>
+          <p:cNvPr id="13" name="TextBox 12"/>
+          <p:cNvSpPr txBox="1"/>
+          <p:nvPr/>
+        </p:nvSpPr>
+        <p:spPr>
+          <a:xfrm>
+            <a:off x="3673939" y="3707709"/>
+            <a:ext cx="2618278" cy="1181608"/>
           </a:xfrm>
           <a:prstGeom prst="rect">
             <a:avLst/>
@@ -31474,13 +31545,13 @@
             <a:r>
               <a:rPr sz="1600" b="1">
                 <a:solidFill>
-                  <a:srgbClr val="13294B"/>
-                </a:solidFill>
-                <a:latin typeface="맑은 고딕"/>
-                <a:ea typeface="맑은 고딕"/>
-                <a:cs typeface="맑은 고딕"/>
-              </a:rPr>
-              <a:t>거절</a:t>
+                  <a:srgbClr val="1A6FC4"/>
+                </a:solidFill>
+                <a:latin typeface="맑은 고딕"/>
+                <a:ea typeface="맑은 고딕"/>
+                <a:cs typeface="맑은 고딕"/>
+              </a:rPr>
+              <a:t>추천안</a:t>
             </a:r>
           </a:p>
           <a:p>
@@ -31501,7 +31572,322 @@
                 <a:ea typeface="맑은 고딕"/>
                 <a:cs typeface="맑은 고딕"/>
               </a:rPr>
-              <a:t>시스템의 처리를 지나지 않고 종료 기록으로 간다</a:t>
+              <a:t>추천과 대안, 그 근거</a:t>
+            </a:r>
+          </a:p>
+          <a:p>
+            <a:pPr algn="ctr">
+              <a:lnSpc>
+                <a:spcPct val="110000"/>
+              </a:lnSpc>
+              <a:spcAft>
+                <a:spcPts val="100"/>
+              </a:spcAft>
+            </a:pPr>
+            <a:r>
+              <a:rPr sz="1300" b="0">
+                <a:solidFill>
+                  <a:srgbClr val="556175"/>
+                </a:solidFill>
+                <a:latin typeface="맑은 고딕"/>
+                <a:ea typeface="맑은 고딕"/>
+                <a:cs typeface="맑은 고딕"/>
+              </a:rPr>
+              <a:t>냉각 조치: 팬 최대 운전</a:t>
+            </a:r>
+          </a:p>
+          <a:p>
+            <a:pPr algn="ctr">
+              <a:lnSpc>
+                <a:spcPct val="110000"/>
+              </a:lnSpc>
+              <a:spcAft>
+                <a:spcPts val="100"/>
+              </a:spcAft>
+            </a:pPr>
+            <a:r>
+              <a:rPr sz="1300" b="0">
+                <a:solidFill>
+                  <a:srgbClr val="556175"/>
+                </a:solidFill>
+                <a:latin typeface="맑은 고딕"/>
+                <a:ea typeface="맑은 고딕"/>
+                <a:cs typeface="맑은 고딕"/>
+              </a:rPr>
+              <a:t>정비 시점: 야간 정비 시간</a:t>
+            </a:r>
+          </a:p>
+          <a:p>
+            <a:pPr algn="ctr">
+              <a:lnSpc>
+                <a:spcPct val="110000"/>
+              </a:lnSpc>
+              <a:spcAft>
+                <a:spcPts val="100"/>
+              </a:spcAft>
+            </a:pPr>
+            <a:r>
+              <a:rPr sz="1300" b="0">
+                <a:solidFill>
+                  <a:srgbClr val="556175"/>
+                </a:solidFill>
+                <a:latin typeface="맑은 고딕"/>
+                <a:ea typeface="맑은 고딕"/>
+                <a:cs typeface="맑은 고딕"/>
+              </a:rPr>
+              <a:t>발주안: 6개 · 공급사 · 금액</a:t>
+            </a:r>
+          </a:p>
+        </p:txBody>
+      </p:sp>
+      <p:sp>
+        <p:nvSpPr>
+          <p:cNvPr id="14" name="TextBox 13"/>
+          <p:cNvSpPr txBox="1"/>
+          <p:nvPr/>
+        </p:nvSpPr>
+        <p:spPr>
+          <a:xfrm>
+            <a:off x="5899476" y="3707709"/>
+            <a:ext cx="2618278" cy="1181608"/>
+          </a:xfrm>
+          <a:prstGeom prst="rect">
+            <a:avLst/>
+          </a:prstGeom>
+          <a:noFill/>
+        </p:spPr>
+        <p:txBody>
+          <a:bodyPr wrap="square" anchor="t"/>
+          <a:lstStyle/>
+          <a:p>
+            <a:pPr algn="ctr">
+              <a:lnSpc>
+                <a:spcPct val="110000"/>
+              </a:lnSpc>
+              <a:spcAft>
+                <a:spcPts val="100"/>
+              </a:spcAft>
+            </a:pPr>
+            <a:r>
+              <a:rPr sz="1600" b="1">
+                <a:solidFill>
+                  <a:srgbClr val="1A6FC4"/>
+                </a:solidFill>
+                <a:latin typeface="맑은 고딕"/>
+                <a:ea typeface="맑은 고딕"/>
+                <a:cs typeface="맑은 고딕"/>
+              </a:rPr>
+              <a:t>승인된 내용</a:t>
+            </a:r>
+          </a:p>
+          <a:p>
+            <a:pPr algn="ctr">
+              <a:lnSpc>
+                <a:spcPct val="110000"/>
+              </a:lnSpc>
+              <a:spcAft>
+                <a:spcPts val="100"/>
+              </a:spcAft>
+            </a:pPr>
+            <a:r>
+              <a:rPr sz="1300" b="0">
+                <a:solidFill>
+                  <a:srgbClr val="556175"/>
+                </a:solidFill>
+                <a:latin typeface="맑은 고딕"/>
+                <a:ea typeface="맑은 고딕"/>
+                <a:cs typeface="맑은 고딕"/>
+              </a:rPr>
+              <a:t>승인한 역할과 승인된 추천안</a:t>
+            </a:r>
+          </a:p>
+          <a:p>
+            <a:pPr algn="ctr">
+              <a:lnSpc>
+                <a:spcPct val="110000"/>
+              </a:lnSpc>
+              <a:spcAft>
+                <a:spcPts val="100"/>
+              </a:spcAft>
+            </a:pPr>
+            <a:r>
+              <a:rPr sz="1300" b="0">
+                <a:solidFill>
+                  <a:srgbClr val="556175"/>
+                </a:solidFill>
+                <a:latin typeface="맑은 고딕"/>
+                <a:ea typeface="맑은 고딕"/>
+                <a:cs typeface="맑은 고딕"/>
+              </a:rPr>
+              <a:t>운전원 · 팬 속도 100 %</a:t>
+            </a:r>
+          </a:p>
+          <a:p>
+            <a:pPr algn="ctr">
+              <a:lnSpc>
+                <a:spcPct val="110000"/>
+              </a:lnSpc>
+              <a:spcAft>
+                <a:spcPts val="100"/>
+              </a:spcAft>
+            </a:pPr>
+            <a:r>
+              <a:rPr sz="1300" b="0">
+                <a:solidFill>
+                  <a:srgbClr val="556175"/>
+                </a:solidFill>
+                <a:latin typeface="맑은 고딕"/>
+                <a:ea typeface="맑은 고딕"/>
+                <a:cs typeface="맑은 고딕"/>
+              </a:rPr>
+              <a:t>설비보전팀장 · 정비 시점</a:t>
+            </a:r>
+          </a:p>
+          <a:p>
+            <a:pPr algn="ctr">
+              <a:lnSpc>
+                <a:spcPct val="110000"/>
+              </a:lnSpc>
+              <a:spcAft>
+                <a:spcPts val="100"/>
+              </a:spcAft>
+            </a:pPr>
+            <a:r>
+              <a:rPr sz="1300" b="0">
+                <a:solidFill>
+                  <a:srgbClr val="556175"/>
+                </a:solidFill>
+                <a:latin typeface="맑은 고딕"/>
+                <a:ea typeface="맑은 고딕"/>
+                <a:cs typeface="맑은 고딕"/>
+              </a:rPr>
+              <a:t>구매 담당 · 수량과 공급사</a:t>
+            </a:r>
+          </a:p>
+        </p:txBody>
+      </p:sp>
+      <p:sp>
+        <p:nvSpPr>
+          <p:cNvPr id="15" name="TextBox 14"/>
+          <p:cNvSpPr txBox="1"/>
+          <p:nvPr/>
+        </p:nvSpPr>
+        <p:spPr>
+          <a:xfrm>
+            <a:off x="8125013" y="3707709"/>
+            <a:ext cx="2618278" cy="1181608"/>
+          </a:xfrm>
+          <a:prstGeom prst="rect">
+            <a:avLst/>
+          </a:prstGeom>
+          <a:noFill/>
+        </p:spPr>
+        <p:txBody>
+          <a:bodyPr wrap="square" anchor="t"/>
+          <a:lstStyle/>
+          <a:p>
+            <a:pPr algn="ctr">
+              <a:lnSpc>
+                <a:spcPct val="110000"/>
+              </a:lnSpc>
+              <a:spcAft>
+                <a:spcPts val="100"/>
+              </a:spcAft>
+            </a:pPr>
+            <a:r>
+              <a:rPr sz="1600" b="1">
+                <a:solidFill>
+                  <a:srgbClr val="1A6FC4"/>
+                </a:solidFill>
+                <a:latin typeface="맑은 고딕"/>
+                <a:ea typeface="맑은 고딕"/>
+                <a:cs typeface="맑은 고딕"/>
+              </a:rPr>
+              <a:t>처리의 결과</a:t>
+            </a:r>
+          </a:p>
+          <a:p>
+            <a:pPr algn="ctr">
+              <a:lnSpc>
+                <a:spcPct val="110000"/>
+              </a:lnSpc>
+              <a:spcAft>
+                <a:spcPts val="100"/>
+              </a:spcAft>
+            </a:pPr>
+            <a:r>
+              <a:rPr sz="1300" b="0">
+                <a:solidFill>
+                  <a:srgbClr val="556175"/>
+                </a:solidFill>
+                <a:latin typeface="맑은 고딕"/>
+                <a:ea typeface="맑은 고딕"/>
+                <a:cs typeface="맑은 고딕"/>
+              </a:rPr>
+              <a:t>업무 시스템에 남은 기록</a:t>
+            </a:r>
+          </a:p>
+          <a:p>
+            <a:pPr algn="ctr">
+              <a:lnSpc>
+                <a:spcPct val="110000"/>
+              </a:lnSpc>
+              <a:spcAft>
+                <a:spcPts val="100"/>
+              </a:spcAft>
+            </a:pPr>
+            <a:r>
+              <a:rPr sz="1300" b="0">
+                <a:solidFill>
+                  <a:srgbClr val="556175"/>
+                </a:solidFill>
+                <a:latin typeface="맑은 고딕"/>
+                <a:ea typeface="맑은 고딕"/>
+                <a:cs typeface="맑은 고딕"/>
+              </a:rPr>
+              <a:t>설비 명령과 작업지시</a:t>
+            </a:r>
+          </a:p>
+          <a:p>
+            <a:pPr algn="ctr">
+              <a:lnSpc>
+                <a:spcPct val="110000"/>
+              </a:lnSpc>
+              <a:spcAft>
+                <a:spcPts val="100"/>
+              </a:spcAft>
+            </a:pPr>
+            <a:r>
+              <a:rPr sz="1300" b="0">
+                <a:solidFill>
+                  <a:srgbClr val="556175"/>
+                </a:solidFill>
+                <a:latin typeface="맑은 고딕"/>
+                <a:ea typeface="맑은 고딕"/>
+                <a:cs typeface="맑은 고딕"/>
+              </a:rPr>
+              <a:t>정비 오더와 공지</a:t>
+            </a:r>
+          </a:p>
+          <a:p>
+            <a:pPr algn="ctr">
+              <a:lnSpc>
+                <a:spcPct val="110000"/>
+              </a:lnSpc>
+              <a:spcAft>
+                <a:spcPts val="100"/>
+              </a:spcAft>
+            </a:pPr>
+            <a:r>
+              <a:rPr sz="1300" b="0">
+                <a:solidFill>
+                  <a:srgbClr val="556175"/>
+                </a:solidFill>
+                <a:latin typeface="맑은 고딕"/>
+                <a:ea typeface="맑은 고딕"/>
+                <a:cs typeface="맑은 고딕"/>
+              </a:rPr>
+              <a:t>발주와 입고</a:t>
             </a:r>
           </a:p>
         </p:txBody>
@@ -31566,7 +31952,7 @@
                 <a:ea typeface="맑은 고딕"/>
                 <a:cs typeface="맑은 고딕"/>
               </a:rPr>
-              <a:t>한 처리 건 안에서 주고받는 것</a:t>
+              <a:t>정기 점검의 추천안: 추천, 대안, 제외된 후보</a:t>
             </a:r>
           </a:p>
         </p:txBody>
@@ -31605,7 +31991,7 @@
                 <a:ea typeface="맑은 고딕"/>
                 <a:cs typeface="맑은 고딕"/>
               </a:rPr>
-              <a:t>다섯 자리는 앞 자리가 낸 것을 받아 일하므로, 경보의 내용이 제안이 되고 제안이 승인된 내용이 되어 기록으로 이어진다.</a:t>
+              <a:t>정기 점검의 추천안에는 추천 하나와 함께, 득실에서 진 대안과 판단 규칙이 제외한 후보가 그 까닭과 함께 실렸다.</a:t>
             </a:r>
           </a:p>
         </p:txBody>
@@ -31678,30 +32064,37 @@
           </a:p>
         </p:txBody>
       </p:sp>
-      <p:pic>
-        <p:nvPicPr>
-          <p:cNvPr id="6" name="삽화:주고받는것.svg" descr="illust_7126913375011076761_1791743711.png"/>
-          <p:cNvPicPr>
-            <a:picLocks noChangeAspect="1"/>
-          </p:cNvPicPr>
-          <p:nvPr/>
-        </p:nvPicPr>
-        <p:blipFill>
-          <a:blip r:embed="rId3"/>
-          <a:stretch>
-            <a:fillRect/>
-          </a:stretch>
-        </p:blipFill>
-        <p:spPr>
-          <a:xfrm>
-            <a:off x="641100" y="1627632"/>
-            <a:ext cx="10909495" cy="4727448"/>
-          </a:xfrm>
-          <a:prstGeom prst="rect">
-            <a:avLst/>
-          </a:prstGeom>
-        </p:spPr>
-      </p:pic>
+      <p:sp>
+        <p:nvSpPr>
+          <p:cNvPr id="6" name="Rounded Rectangle 5"/>
+          <p:cNvSpPr/>
+          <p:nvPr/>
+        </p:nvSpPr>
+        <p:spPr>
+          <a:xfrm>
+            <a:off x="548640" y="1961387"/>
+            <a:ext cx="11094415" cy="347472"/>
+          </a:xfrm>
+          <a:prstGeom prst="roundRect">
+            <a:avLst>
+              <a:gd name="adj" fmla="val 12000"/>
+            </a:avLst>
+          </a:prstGeom>
+          <a:solidFill>
+            <a:srgbClr val="13294B"/>
+          </a:solidFill>
+          <a:ln>
+            <a:noFill/>
+          </a:ln>
+        </p:spPr>
+        <p:txBody>
+          <a:bodyPr rtlCol="0" anchor="ctr"/>
+          <a:lstStyle/>
+          <a:p>
+            <a:pPr algn="ctr"/>
+          </a:p>
+        </p:txBody>
+      </p:sp>
       <p:sp>
         <p:nvSpPr>
           <p:cNvPr id="7" name="TextBox 6"/>
@@ -31710,25 +32103,170 @@
         </p:nvSpPr>
         <p:spPr>
           <a:xfrm>
-            <a:off x="881108" y="1627632"/>
-            <a:ext cx="1527329" cy="375920"/>
-          </a:xfrm>
-          <a:prstGeom prst="rect">
-            <a:avLst/>
-          </a:prstGeom>
-          <a:noFill/>
-        </p:spPr>
-        <p:txBody>
-          <a:bodyPr wrap="square" anchor="t"/>
-          <a:lstStyle/>
-          <a:p>
-            <a:pPr algn="ctr">
-              <a:lnSpc>
-                <a:spcPct val="110000"/>
-              </a:lnSpc>
-              <a:spcAft>
-                <a:spcPts val="100"/>
-              </a:spcAft>
+            <a:off x="685800" y="1961387"/>
+            <a:ext cx="2514600" cy="347472"/>
+          </a:xfrm>
+          <a:prstGeom prst="rect">
+            <a:avLst/>
+          </a:prstGeom>
+          <a:noFill/>
+        </p:spPr>
+        <p:txBody>
+          <a:bodyPr wrap="square" anchor="ctr"/>
+          <a:lstStyle/>
+          <a:p>
+            <a:pPr algn="l">
+              <a:lnSpc>
+                <a:spcPct val="110000"/>
+              </a:lnSpc>
+            </a:pPr>
+            <a:r>
+              <a:rPr sz="1300" b="1">
+                <a:solidFill>
+                  <a:srgbClr val="FFFFFF"/>
+                </a:solidFill>
+                <a:latin typeface="맑은 고딕"/>
+                <a:ea typeface="맑은 고딕"/>
+                <a:cs typeface="맑은 고딕"/>
+              </a:rPr>
+              <a:t>후보</a:t>
+            </a:r>
+          </a:p>
+        </p:txBody>
+      </p:sp>
+      <p:sp>
+        <p:nvSpPr>
+          <p:cNvPr id="8" name="TextBox 7"/>
+          <p:cNvSpPr txBox="1"/>
+          <p:nvPr/>
+        </p:nvSpPr>
+        <p:spPr>
+          <a:xfrm>
+            <a:off x="3200400" y="1961387"/>
+            <a:ext cx="6248095" cy="347472"/>
+          </a:xfrm>
+          <a:prstGeom prst="rect">
+            <a:avLst/>
+          </a:prstGeom>
+          <a:noFill/>
+        </p:spPr>
+        <p:txBody>
+          <a:bodyPr wrap="square" anchor="ctr"/>
+          <a:lstStyle/>
+          <a:p>
+            <a:pPr algn="l">
+              <a:lnSpc>
+                <a:spcPct val="110000"/>
+              </a:lnSpc>
+            </a:pPr>
+            <a:r>
+              <a:rPr sz="1300" b="1">
+                <a:solidFill>
+                  <a:srgbClr val="FFFFFF"/>
+                </a:solidFill>
+                <a:latin typeface="맑은 고딕"/>
+                <a:ea typeface="맑은 고딕"/>
+                <a:cs typeface="맑은 고딕"/>
+              </a:rPr>
+              <a:t>판정의 까닭</a:t>
+            </a:r>
+          </a:p>
+        </p:txBody>
+      </p:sp>
+      <p:sp>
+        <p:nvSpPr>
+          <p:cNvPr id="9" name="TextBox 8"/>
+          <p:cNvSpPr txBox="1"/>
+          <p:nvPr/>
+        </p:nvSpPr>
+        <p:spPr>
+          <a:xfrm>
+            <a:off x="9448495" y="1961387"/>
+            <a:ext cx="2194560" cy="347472"/>
+          </a:xfrm>
+          <a:prstGeom prst="rect">
+            <a:avLst/>
+          </a:prstGeom>
+          <a:noFill/>
+        </p:spPr>
+        <p:txBody>
+          <a:bodyPr wrap="square" anchor="ctr"/>
+          <a:lstStyle/>
+          <a:p>
+            <a:pPr algn="l">
+              <a:lnSpc>
+                <a:spcPct val="110000"/>
+              </a:lnSpc>
+            </a:pPr>
+            <a:r>
+              <a:rPr sz="1300" b="1">
+                <a:solidFill>
+                  <a:srgbClr val="FFFFFF"/>
+                </a:solidFill>
+                <a:latin typeface="맑은 고딕"/>
+                <a:ea typeface="맑은 고딕"/>
+                <a:cs typeface="맑은 고딕"/>
+              </a:rPr>
+              <a:t>판정</a:t>
+            </a:r>
+          </a:p>
+        </p:txBody>
+      </p:sp>
+      <p:sp>
+        <p:nvSpPr>
+          <p:cNvPr id="10" name="Rounded Rectangle 9"/>
+          <p:cNvSpPr/>
+          <p:nvPr/>
+        </p:nvSpPr>
+        <p:spPr>
+          <a:xfrm>
+            <a:off x="548640" y="2395727"/>
+            <a:ext cx="11094415" cy="850392"/>
+          </a:xfrm>
+          <a:prstGeom prst="roundRect">
+            <a:avLst>
+              <a:gd name="adj" fmla="val 8000"/>
+            </a:avLst>
+          </a:prstGeom>
+          <a:solidFill>
+            <a:srgbClr val="E7F3FD"/>
+          </a:solidFill>
+          <a:ln>
+            <a:noFill/>
+          </a:ln>
+        </p:spPr>
+        <p:txBody>
+          <a:bodyPr rtlCol="0" anchor="ctr"/>
+          <a:lstStyle/>
+          <a:p>
+            <a:pPr algn="ctr"/>
+          </a:p>
+        </p:txBody>
+      </p:sp>
+      <p:sp>
+        <p:nvSpPr>
+          <p:cNvPr id="11" name="TextBox 10"/>
+          <p:cNvSpPr txBox="1"/>
+          <p:nvPr/>
+        </p:nvSpPr>
+        <p:spPr>
+          <a:xfrm>
+            <a:off x="685800" y="2363723"/>
+            <a:ext cx="2514600" cy="914400"/>
+          </a:xfrm>
+          <a:prstGeom prst="rect">
+            <a:avLst/>
+          </a:prstGeom>
+          <a:noFill/>
+        </p:spPr>
+        <p:txBody>
+          <a:bodyPr wrap="square" anchor="ctr"/>
+          <a:lstStyle/>
+          <a:p>
+            <a:pPr algn="l">
+              <a:lnSpc>
+                <a:spcPct val="110000"/>
+              </a:lnSpc>
             </a:pPr>
             <a:r>
               <a:rPr sz="1600" b="1">
@@ -31739,38 +32277,162 @@
                 <a:ea typeface="맑은 고딕"/>
                 <a:cs typeface="맑은 고딕"/>
               </a:rPr>
-              <a:t>시작 이벤트</a:t>
-            </a:r>
-          </a:p>
-        </p:txBody>
-      </p:sp>
-      <p:sp>
-        <p:nvSpPr>
-          <p:cNvPr id="8" name="TextBox 7"/>
-          <p:cNvSpPr txBox="1"/>
-          <p:nvPr/>
-        </p:nvSpPr>
-        <p:spPr>
-          <a:xfrm>
-            <a:off x="3106645" y="1627632"/>
-            <a:ext cx="1527329" cy="375920"/>
-          </a:xfrm>
-          <a:prstGeom prst="rect">
-            <a:avLst/>
-          </a:prstGeom>
-          <a:noFill/>
-        </p:spPr>
-        <p:txBody>
-          <a:bodyPr wrap="square" anchor="t"/>
-          <a:lstStyle/>
-          <a:p>
-            <a:pPr algn="ctr">
-              <a:lnSpc>
-                <a:spcPct val="110000"/>
-              </a:lnSpc>
-              <a:spcAft>
-                <a:spcPts val="100"/>
-              </a:spcAft>
+              <a:t>이번 예정된 정비 시간에 단독 시행</a:t>
+            </a:r>
+          </a:p>
+        </p:txBody>
+      </p:sp>
+      <p:sp>
+        <p:nvSpPr>
+          <p:cNvPr id="12" name="TextBox 11"/>
+          <p:cNvSpPr txBox="1"/>
+          <p:nvPr/>
+        </p:nvSpPr>
+        <p:spPr>
+          <a:xfrm>
+            <a:off x="3200400" y="2363723"/>
+            <a:ext cx="6156655" cy="914400"/>
+          </a:xfrm>
+          <a:prstGeom prst="rect">
+            <a:avLst/>
+          </a:prstGeom>
+          <a:noFill/>
+        </p:spPr>
+        <p:txBody>
+          <a:bodyPr wrap="square" anchor="ctr"/>
+          <a:lstStyle/>
+          <a:p>
+            <a:pPr algn="l">
+              <a:lnSpc>
+                <a:spcPct val="110000"/>
+              </a:lnSpc>
+            </a:pPr>
+            <a:r>
+              <a:rPr sz="1400" b="0">
+                <a:solidFill>
+                  <a:srgbClr val="1F2A3A"/>
+                </a:solidFill>
+                <a:latin typeface="맑은 고딕"/>
+                <a:ea typeface="맑은 고딕"/>
+                <a:cs typeface="맑은 고딕"/>
+              </a:rPr>
+              <a:t>가동률과 생산량을 지키고 보전비만 든다</a:t>
+            </a:r>
+          </a:p>
+        </p:txBody>
+      </p:sp>
+      <p:sp>
+        <p:nvSpPr>
+          <p:cNvPr id="13" name="TextBox 12"/>
+          <p:cNvSpPr txBox="1"/>
+          <p:nvPr/>
+        </p:nvSpPr>
+        <p:spPr>
+          <a:xfrm>
+            <a:off x="9448495" y="2363723"/>
+            <a:ext cx="2103120" cy="914400"/>
+          </a:xfrm>
+          <a:prstGeom prst="rect">
+            <a:avLst/>
+          </a:prstGeom>
+          <a:noFill/>
+        </p:spPr>
+        <p:txBody>
+          <a:bodyPr wrap="square" anchor="ctr"/>
+          <a:lstStyle/>
+          <a:p>
+            <a:pPr algn="l">
+              <a:lnSpc>
+                <a:spcPct val="110000"/>
+              </a:lnSpc>
+            </a:pPr>
+            <a:r>
+              <a:rPr sz="1250" b="1">
+                <a:solidFill>
+                  <a:srgbClr val="1A6FC4"/>
+                </a:solidFill>
+                <a:latin typeface="맑은 고딕"/>
+                <a:ea typeface="맑은 고딕"/>
+                <a:cs typeface="맑은 고딕"/>
+              </a:rPr>
+              <a:t>추천</a:t>
+            </a:r>
+          </a:p>
+          <a:p>
+            <a:pPr algn="l">
+              <a:lnSpc>
+                <a:spcPct val="110000"/>
+              </a:lnSpc>
+            </a:pPr>
+            <a:r>
+              <a:rPr sz="1250" b="1">
+                <a:solidFill>
+                  <a:srgbClr val="1A6FC4"/>
+                </a:solidFill>
+                <a:latin typeface="맑은 고딕"/>
+                <a:ea typeface="맑은 고딕"/>
+                <a:cs typeface="맑은 고딕"/>
+              </a:rPr>
+              <a:t>점수 +1.73</a:t>
+            </a:r>
+          </a:p>
+        </p:txBody>
+      </p:sp>
+      <p:sp>
+        <p:nvSpPr>
+          <p:cNvPr id="14" name="Rounded Rectangle 13"/>
+          <p:cNvSpPr/>
+          <p:nvPr/>
+        </p:nvSpPr>
+        <p:spPr>
+          <a:xfrm>
+            <a:off x="548640" y="3310127"/>
+            <a:ext cx="11094415" cy="850392"/>
+          </a:xfrm>
+          <a:prstGeom prst="roundRect">
+            <a:avLst>
+              <a:gd name="adj" fmla="val 8000"/>
+            </a:avLst>
+          </a:prstGeom>
+          <a:solidFill>
+            <a:srgbClr val="F3F6F9"/>
+          </a:solidFill>
+          <a:ln>
+            <a:noFill/>
+          </a:ln>
+        </p:spPr>
+        <p:txBody>
+          <a:bodyPr rtlCol="0" anchor="ctr"/>
+          <a:lstStyle/>
+          <a:p>
+            <a:pPr algn="ctr"/>
+          </a:p>
+        </p:txBody>
+      </p:sp>
+      <p:sp>
+        <p:nvSpPr>
+          <p:cNvPr id="15" name="TextBox 14"/>
+          <p:cNvSpPr txBox="1"/>
+          <p:nvPr/>
+        </p:nvSpPr>
+        <p:spPr>
+          <a:xfrm>
+            <a:off x="685800" y="3278123"/>
+            <a:ext cx="2514600" cy="914400"/>
+          </a:xfrm>
+          <a:prstGeom prst="rect">
+            <a:avLst/>
+          </a:prstGeom>
+          <a:noFill/>
+        </p:spPr>
+        <p:txBody>
+          <a:bodyPr wrap="square" anchor="ctr"/>
+          <a:lstStyle/>
+          <a:p>
+            <a:pPr algn="l">
+              <a:lnSpc>
+                <a:spcPct val="110000"/>
+              </a:lnSpc>
             </a:pPr>
             <a:r>
               <a:rPr sz="1600" b="1">
@@ -31781,38 +32443,162 @@
                 <a:ea typeface="맑은 고딕"/>
                 <a:cs typeface="맑은 고딕"/>
               </a:rPr>
-              <a:t>에이전트</a:t>
-            </a:r>
-          </a:p>
-        </p:txBody>
-      </p:sp>
-      <p:sp>
-        <p:nvSpPr>
-          <p:cNvPr id="9" name="TextBox 8"/>
-          <p:cNvSpPr txBox="1"/>
-          <p:nvPr/>
-        </p:nvSpPr>
-        <p:spPr>
-          <a:xfrm>
-            <a:off x="5332182" y="1627632"/>
-            <a:ext cx="1527329" cy="375920"/>
-          </a:xfrm>
-          <a:prstGeom prst="rect">
-            <a:avLst/>
-          </a:prstGeom>
-          <a:noFill/>
-        </p:spPr>
-        <p:txBody>
-          <a:bodyPr wrap="square" anchor="t"/>
-          <a:lstStyle/>
-          <a:p>
-            <a:pPr algn="ctr">
-              <a:lnSpc>
-                <a:spcPct val="110000"/>
-              </a:lnSpc>
-              <a:spcAft>
-                <a:spcPts val="100"/>
-              </a:spcAft>
+              <a:t>지금 바로 정지하고 시행</a:t>
+            </a:r>
+          </a:p>
+        </p:txBody>
+      </p:sp>
+      <p:sp>
+        <p:nvSpPr>
+          <p:cNvPr id="16" name="TextBox 15"/>
+          <p:cNvSpPr txBox="1"/>
+          <p:nvPr/>
+        </p:nvSpPr>
+        <p:spPr>
+          <a:xfrm>
+            <a:off x="3200400" y="3278123"/>
+            <a:ext cx="6156655" cy="914400"/>
+          </a:xfrm>
+          <a:prstGeom prst="rect">
+            <a:avLst/>
+          </a:prstGeom>
+          <a:noFill/>
+        </p:spPr>
+        <p:txBody>
+          <a:bodyPr wrap="square" anchor="ctr"/>
+          <a:lstStyle/>
+          <a:p>
+            <a:pPr algn="l">
+              <a:lnSpc>
+                <a:spcPct val="110000"/>
+              </a:lnSpc>
+            </a:pPr>
+            <a:r>
+              <a:rPr sz="1400" b="0">
+                <a:solidFill>
+                  <a:srgbClr val="1F2A3A"/>
+                </a:solidFill>
+                <a:latin typeface="맑은 고딕"/>
+                <a:ea typeface="맑은 고딕"/>
+                <a:cs typeface="맑은 고딕"/>
+              </a:rPr>
+              <a:t>납기가 24시간 안인 생산 오더가 있어 오더 손실을 감점한다</a:t>
+            </a:r>
+          </a:p>
+        </p:txBody>
+      </p:sp>
+      <p:sp>
+        <p:nvSpPr>
+          <p:cNvPr id="17" name="TextBox 16"/>
+          <p:cNvSpPr txBox="1"/>
+          <p:nvPr/>
+        </p:nvSpPr>
+        <p:spPr>
+          <a:xfrm>
+            <a:off x="9448495" y="3278123"/>
+            <a:ext cx="2103120" cy="914400"/>
+          </a:xfrm>
+          <a:prstGeom prst="rect">
+            <a:avLst/>
+          </a:prstGeom>
+          <a:noFill/>
+        </p:spPr>
+        <p:txBody>
+          <a:bodyPr wrap="square" anchor="ctr"/>
+          <a:lstStyle/>
+          <a:p>
+            <a:pPr algn="l">
+              <a:lnSpc>
+                <a:spcPct val="110000"/>
+              </a:lnSpc>
+            </a:pPr>
+            <a:r>
+              <a:rPr sz="1250" b="1">
+                <a:solidFill>
+                  <a:srgbClr val="556175"/>
+                </a:solidFill>
+                <a:latin typeface="맑은 고딕"/>
+                <a:ea typeface="맑은 고딕"/>
+                <a:cs typeface="맑은 고딕"/>
+              </a:rPr>
+              <a:t>대안</a:t>
+            </a:r>
+          </a:p>
+          <a:p>
+            <a:pPr algn="l">
+              <a:lnSpc>
+                <a:spcPct val="110000"/>
+              </a:lnSpc>
+            </a:pPr>
+            <a:r>
+              <a:rPr sz="1250" b="1">
+                <a:solidFill>
+                  <a:srgbClr val="556175"/>
+                </a:solidFill>
+                <a:latin typeface="맑은 고딕"/>
+                <a:ea typeface="맑은 고딕"/>
+                <a:cs typeface="맑은 고딕"/>
+              </a:rPr>
+              <a:t>점수 -3.35</a:t>
+            </a:r>
+          </a:p>
+        </p:txBody>
+      </p:sp>
+      <p:sp>
+        <p:nvSpPr>
+          <p:cNvPr id="18" name="Rounded Rectangle 17"/>
+          <p:cNvSpPr/>
+          <p:nvPr/>
+        </p:nvSpPr>
+        <p:spPr>
+          <a:xfrm>
+            <a:off x="548640" y="4224527"/>
+            <a:ext cx="11094415" cy="850392"/>
+          </a:xfrm>
+          <a:prstGeom prst="roundRect">
+            <a:avLst>
+              <a:gd name="adj" fmla="val 8000"/>
+            </a:avLst>
+          </a:prstGeom>
+          <a:solidFill>
+            <a:srgbClr val="F3F6F9"/>
+          </a:solidFill>
+          <a:ln>
+            <a:noFill/>
+          </a:ln>
+        </p:spPr>
+        <p:txBody>
+          <a:bodyPr rtlCol="0" anchor="ctr"/>
+          <a:lstStyle/>
+          <a:p>
+            <a:pPr algn="ctr"/>
+          </a:p>
+        </p:txBody>
+      </p:sp>
+      <p:sp>
+        <p:nvSpPr>
+          <p:cNvPr id="19" name="TextBox 18"/>
+          <p:cNvSpPr txBox="1"/>
+          <p:nvPr/>
+        </p:nvSpPr>
+        <p:spPr>
+          <a:xfrm>
+            <a:off x="685800" y="4192523"/>
+            <a:ext cx="2514600" cy="914400"/>
+          </a:xfrm>
+          <a:prstGeom prst="rect">
+            <a:avLst/>
+          </a:prstGeom>
+          <a:noFill/>
+        </p:spPr>
+        <p:txBody>
+          <a:bodyPr wrap="square" anchor="ctr"/>
+          <a:lstStyle/>
+          <a:p>
+            <a:pPr algn="l">
+              <a:lnSpc>
+                <a:spcPct val="110000"/>
+              </a:lnSpc>
             </a:pPr>
             <a:r>
               <a:rPr sz="1600" b="1">
@@ -31823,38 +32609,144 @@
                 <a:ea typeface="맑은 고딕"/>
                 <a:cs typeface="맑은 고딕"/>
               </a:rPr>
-              <a:t>사람</a:t>
-            </a:r>
-          </a:p>
-        </p:txBody>
-      </p:sp>
-      <p:sp>
-        <p:nvSpPr>
-          <p:cNvPr id="10" name="TextBox 9"/>
-          <p:cNvSpPr txBox="1"/>
-          <p:nvPr/>
-        </p:nvSpPr>
-        <p:spPr>
-          <a:xfrm>
-            <a:off x="7557719" y="1627632"/>
-            <a:ext cx="1527329" cy="375920"/>
-          </a:xfrm>
-          <a:prstGeom prst="rect">
-            <a:avLst/>
-          </a:prstGeom>
-          <a:noFill/>
-        </p:spPr>
-        <p:txBody>
-          <a:bodyPr wrap="square" anchor="t"/>
-          <a:lstStyle/>
-          <a:p>
-            <a:pPr algn="ctr">
-              <a:lnSpc>
-                <a:spcPct val="110000"/>
-              </a:lnSpc>
-              <a:spcAft>
-                <a:spcPts val="100"/>
-              </a:spcAft>
+              <a:t>그다음 예정된 정비 시간으로 미루기</a:t>
+            </a:r>
+          </a:p>
+        </p:txBody>
+      </p:sp>
+      <p:sp>
+        <p:nvSpPr>
+          <p:cNvPr id="20" name="TextBox 19"/>
+          <p:cNvSpPr txBox="1"/>
+          <p:nvPr/>
+        </p:nvSpPr>
+        <p:spPr>
+          <a:xfrm>
+            <a:off x="3200400" y="4192523"/>
+            <a:ext cx="6156655" cy="914400"/>
+          </a:xfrm>
+          <a:prstGeom prst="rect">
+            <a:avLst/>
+          </a:prstGeom>
+          <a:noFill/>
+        </p:spPr>
+        <p:txBody>
+          <a:bodyPr wrap="square" anchor="ctr"/>
+          <a:lstStyle/>
+          <a:p>
+            <a:pPr algn="l">
+              <a:lnSpc>
+                <a:spcPct val="110000"/>
+              </a:lnSpc>
+            </a:pPr>
+            <a:r>
+              <a:rPr sz="1400" b="0">
+                <a:solidFill>
+                  <a:srgbClr val="1F2A3A"/>
+                </a:solidFill>
+                <a:latin typeface="맑은 고딕"/>
+                <a:ea typeface="맑은 고딕"/>
+                <a:cs typeface="맑은 고딕"/>
+              </a:rPr>
+              <a:t>그때의 운전시간이 2,200 h를 넘으므로 미루지 않는다</a:t>
+            </a:r>
+          </a:p>
+        </p:txBody>
+      </p:sp>
+      <p:sp>
+        <p:nvSpPr>
+          <p:cNvPr id="21" name="TextBox 20"/>
+          <p:cNvSpPr txBox="1"/>
+          <p:nvPr/>
+        </p:nvSpPr>
+        <p:spPr>
+          <a:xfrm>
+            <a:off x="9448495" y="4192523"/>
+            <a:ext cx="2103120" cy="914400"/>
+          </a:xfrm>
+          <a:prstGeom prst="rect">
+            <a:avLst/>
+          </a:prstGeom>
+          <a:noFill/>
+        </p:spPr>
+        <p:txBody>
+          <a:bodyPr wrap="square" anchor="ctr"/>
+          <a:lstStyle/>
+          <a:p>
+            <a:pPr algn="l">
+              <a:lnSpc>
+                <a:spcPct val="110000"/>
+              </a:lnSpc>
+            </a:pPr>
+            <a:r>
+              <a:rPr sz="1250" b="1">
+                <a:solidFill>
+                  <a:srgbClr val="556175"/>
+                </a:solidFill>
+                <a:latin typeface="맑은 고딕"/>
+                <a:ea typeface="맑은 고딕"/>
+                <a:cs typeface="맑은 고딕"/>
+              </a:rPr>
+              <a:t>제외</a:t>
+            </a:r>
+          </a:p>
+        </p:txBody>
+      </p:sp>
+      <p:sp>
+        <p:nvSpPr>
+          <p:cNvPr id="22" name="Rounded Rectangle 21"/>
+          <p:cNvSpPr/>
+          <p:nvPr/>
+        </p:nvSpPr>
+        <p:spPr>
+          <a:xfrm>
+            <a:off x="548640" y="5138927"/>
+            <a:ext cx="11094415" cy="850392"/>
+          </a:xfrm>
+          <a:prstGeom prst="roundRect">
+            <a:avLst>
+              <a:gd name="adj" fmla="val 8000"/>
+            </a:avLst>
+          </a:prstGeom>
+          <a:solidFill>
+            <a:srgbClr val="F3F6F9"/>
+          </a:solidFill>
+          <a:ln>
+            <a:noFill/>
+          </a:ln>
+        </p:spPr>
+        <p:txBody>
+          <a:bodyPr rtlCol="0" anchor="ctr"/>
+          <a:lstStyle/>
+          <a:p>
+            <a:pPr algn="ctr"/>
+          </a:p>
+        </p:txBody>
+      </p:sp>
+      <p:sp>
+        <p:nvSpPr>
+          <p:cNvPr id="23" name="TextBox 22"/>
+          <p:cNvSpPr txBox="1"/>
+          <p:nvPr/>
+        </p:nvSpPr>
+        <p:spPr>
+          <a:xfrm>
+            <a:off x="685800" y="5106923"/>
+            <a:ext cx="2514600" cy="914400"/>
+          </a:xfrm>
+          <a:prstGeom prst="rect">
+            <a:avLst/>
+          </a:prstGeom>
+          <a:noFill/>
+        </p:spPr>
+        <p:txBody>
+          <a:bodyPr wrap="square" anchor="ctr"/>
+          <a:lstStyle/>
+          <a:p>
+            <a:pPr algn="l">
+              <a:lnSpc>
+                <a:spcPct val="110000"/>
+              </a:lnSpc>
             </a:pPr>
             <a:r>
               <a:rPr sz="1600" b="1">
@@ -31865,104 +32757,77 @@
                 <a:ea typeface="맑은 고딕"/>
                 <a:cs typeface="맑은 고딕"/>
               </a:rPr>
-              <a:t>시스템</a:t>
-            </a:r>
-          </a:p>
-        </p:txBody>
-      </p:sp>
-      <p:sp>
-        <p:nvSpPr>
-          <p:cNvPr id="11" name="TextBox 10"/>
-          <p:cNvSpPr txBox="1"/>
-          <p:nvPr/>
-        </p:nvSpPr>
-        <p:spPr>
-          <a:xfrm>
-            <a:off x="9783256" y="1627632"/>
-            <a:ext cx="1527329" cy="375920"/>
-          </a:xfrm>
-          <a:prstGeom prst="rect">
-            <a:avLst/>
-          </a:prstGeom>
-          <a:noFill/>
-        </p:spPr>
-        <p:txBody>
-          <a:bodyPr wrap="square" anchor="t"/>
-          <a:lstStyle/>
-          <a:p>
-            <a:pPr algn="ctr">
-              <a:lnSpc>
-                <a:spcPct val="110000"/>
-              </a:lnSpc>
-              <a:spcAft>
-                <a:spcPts val="100"/>
-              </a:spcAft>
-            </a:pPr>
-            <a:r>
-              <a:rPr sz="1600" b="1">
-                <a:solidFill>
-                  <a:srgbClr val="13294B"/>
-                </a:solidFill>
-                <a:latin typeface="맑은 고딕"/>
-                <a:ea typeface="맑은 고딕"/>
-                <a:cs typeface="맑은 고딕"/>
-              </a:rPr>
-              <a:t>결과 보고</a:t>
-            </a:r>
-          </a:p>
-        </p:txBody>
-      </p:sp>
-      <p:sp>
-        <p:nvSpPr>
-          <p:cNvPr id="12" name="TextBox 11"/>
-          <p:cNvSpPr txBox="1"/>
-          <p:nvPr/>
-        </p:nvSpPr>
-        <p:spPr>
-          <a:xfrm>
-            <a:off x="1252031" y="3707709"/>
-            <a:ext cx="2836468" cy="1383029"/>
-          </a:xfrm>
-          <a:prstGeom prst="rect">
-            <a:avLst/>
-          </a:prstGeom>
-          <a:noFill/>
-        </p:spPr>
-        <p:txBody>
-          <a:bodyPr wrap="square" anchor="t"/>
-          <a:lstStyle/>
-          <a:p>
-            <a:pPr algn="ctr">
-              <a:lnSpc>
-                <a:spcPct val="110000"/>
-              </a:lnSpc>
-              <a:spcAft>
-                <a:spcPts val="100"/>
-              </a:spcAft>
-            </a:pPr>
-            <a:r>
-              <a:rPr sz="1600" b="1">
-                <a:solidFill>
-                  <a:srgbClr val="1A6FC4"/>
-                </a:solidFill>
-                <a:latin typeface="맑은 고딕"/>
-                <a:ea typeface="맑은 고딕"/>
-                <a:cs typeface="맑은 고딕"/>
-              </a:rPr>
-              <a:t>경보의 내용</a:t>
-            </a:r>
-          </a:p>
-          <a:p>
-            <a:pPr algn="ctr">
-              <a:lnSpc>
-                <a:spcPct val="110000"/>
-              </a:lnSpc>
-              <a:spcAft>
-                <a:spcPts val="100"/>
-              </a:spcAft>
-            </a:pPr>
-            <a:r>
-              <a:rPr sz="1300" b="0">
+              <a:t>같은 기종 두 대 묶어 시행</a:t>
+            </a:r>
+          </a:p>
+        </p:txBody>
+      </p:sp>
+      <p:sp>
+        <p:nvSpPr>
+          <p:cNvPr id="24" name="TextBox 23"/>
+          <p:cNvSpPr txBox="1"/>
+          <p:nvPr/>
+        </p:nvSpPr>
+        <p:spPr>
+          <a:xfrm>
+            <a:off x="3200400" y="5106923"/>
+            <a:ext cx="6156655" cy="914400"/>
+          </a:xfrm>
+          <a:prstGeom prst="rect">
+            <a:avLst/>
+          </a:prstGeom>
+          <a:noFill/>
+        </p:spPr>
+        <p:txBody>
+          <a:bodyPr wrap="square" anchor="ctr"/>
+          <a:lstStyle/>
+          <a:p>
+            <a:pPr algn="l">
+              <a:lnSpc>
+                <a:spcPct val="110000"/>
+              </a:lnSpc>
+            </a:pPr>
+            <a:r>
+              <a:rPr sz="1400" b="0">
+                <a:solidFill>
+                  <a:srgbClr val="1F2A3A"/>
+                </a:solidFill>
+                <a:latin typeface="맑은 고딕"/>
+                <a:ea typeface="맑은 고딕"/>
+                <a:cs typeface="맑은 고딕"/>
+              </a:rPr>
+              <a:t>씰 키트가 2개 이상 있어야 하는데 가용 재고가 1개이다</a:t>
+            </a:r>
+          </a:p>
+        </p:txBody>
+      </p:sp>
+      <p:sp>
+        <p:nvSpPr>
+          <p:cNvPr id="25" name="TextBox 24"/>
+          <p:cNvSpPr txBox="1"/>
+          <p:nvPr/>
+        </p:nvSpPr>
+        <p:spPr>
+          <a:xfrm>
+            <a:off x="9448495" y="5106923"/>
+            <a:ext cx="2103120" cy="914400"/>
+          </a:xfrm>
+          <a:prstGeom prst="rect">
+            <a:avLst/>
+          </a:prstGeom>
+          <a:noFill/>
+        </p:spPr>
+        <p:txBody>
+          <a:bodyPr wrap="square" anchor="ctr"/>
+          <a:lstStyle/>
+          <a:p>
+            <a:pPr algn="l">
+              <a:lnSpc>
+                <a:spcPct val="110000"/>
+              </a:lnSpc>
+            </a:pPr>
+            <a:r>
+              <a:rPr sz="1250" b="1">
                 <a:solidFill>
                   <a:srgbClr val="556175"/>
                 </a:solidFill>
@@ -31970,448 +32835,7 @@
                 <a:ea typeface="맑은 고딕"/>
                 <a:cs typeface="맑은 고딕"/>
               </a:rPr>
-              <a:t>설비와 경보 패턴</a:t>
-            </a:r>
-          </a:p>
-          <a:p>
-            <a:pPr algn="ctr">
-              <a:lnSpc>
-                <a:spcPct val="110000"/>
-              </a:lnSpc>
-              <a:spcAft>
-                <a:spcPts val="100"/>
-              </a:spcAft>
-            </a:pPr>
-            <a:r>
-              <a:rPr sz="1300" b="0">
-                <a:solidFill>
-                  <a:srgbClr val="556175"/>
-                </a:solidFill>
-                <a:latin typeface="맑은 고딕"/>
-                <a:ea typeface="맑은 고딕"/>
-                <a:cs typeface="맑은 고딕"/>
-              </a:rPr>
-              <a:t>HYD-01 · COOLER_DEGRADATION</a:t>
-            </a:r>
-          </a:p>
-          <a:p>
-            <a:pPr algn="ctr">
-              <a:lnSpc>
-                <a:spcPct val="110000"/>
-              </a:lnSpc>
-              <a:spcAft>
-                <a:spcPts val="100"/>
-              </a:spcAft>
-            </a:pPr>
-            <a:r>
-              <a:rPr sz="1300" b="0">
-                <a:solidFill>
-                  <a:srgbClr val="556175"/>
-                </a:solidFill>
-                <a:latin typeface="맑은 고딕"/>
-                <a:ea typeface="맑은 고딕"/>
-                <a:cs typeface="맑은 고딕"/>
-              </a:rPr>
-              <a:t>HYD-02 · PM_DUE</a:t>
-            </a:r>
-          </a:p>
-          <a:p>
-            <a:pPr algn="ctr">
-              <a:lnSpc>
-                <a:spcPct val="110000"/>
-              </a:lnSpc>
-              <a:spcAft>
-                <a:spcPts val="100"/>
-              </a:spcAft>
-            </a:pPr>
-            <a:r>
-              <a:rPr sz="1300" b="0">
-                <a:solidFill>
-                  <a:srgbClr val="556175"/>
-                </a:solidFill>
-                <a:latin typeface="맑은 고딕"/>
-                <a:ea typeface="맑은 고딕"/>
-                <a:cs typeface="맑은 고딕"/>
-              </a:rPr>
-              <a:t>씰 키트 · SPARE_BELOW_MIN</a:t>
-            </a:r>
-          </a:p>
-        </p:txBody>
-      </p:sp>
-      <p:sp>
-        <p:nvSpPr>
-          <p:cNvPr id="13" name="TextBox 12"/>
-          <p:cNvSpPr txBox="1"/>
-          <p:nvPr/>
-        </p:nvSpPr>
-        <p:spPr>
-          <a:xfrm>
-            <a:off x="3673939" y="3707709"/>
-            <a:ext cx="2618278" cy="1181608"/>
-          </a:xfrm>
-          <a:prstGeom prst="rect">
-            <a:avLst/>
-          </a:prstGeom>
-          <a:noFill/>
-        </p:spPr>
-        <p:txBody>
-          <a:bodyPr wrap="square" anchor="t"/>
-          <a:lstStyle/>
-          <a:p>
-            <a:pPr algn="ctr">
-              <a:lnSpc>
-                <a:spcPct val="110000"/>
-              </a:lnSpc>
-              <a:spcAft>
-                <a:spcPts val="100"/>
-              </a:spcAft>
-            </a:pPr>
-            <a:r>
-              <a:rPr sz="1600" b="1">
-                <a:solidFill>
-                  <a:srgbClr val="1A6FC4"/>
-                </a:solidFill>
-                <a:latin typeface="맑은 고딕"/>
-                <a:ea typeface="맑은 고딕"/>
-                <a:cs typeface="맑은 고딕"/>
-              </a:rPr>
-              <a:t>제안</a:t>
-            </a:r>
-          </a:p>
-          <a:p>
-            <a:pPr algn="ctr">
-              <a:lnSpc>
-                <a:spcPct val="110000"/>
-              </a:lnSpc>
-              <a:spcAft>
-                <a:spcPts val="100"/>
-              </a:spcAft>
-            </a:pPr>
-            <a:r>
-              <a:rPr sz="1300" b="0">
-                <a:solidFill>
-                  <a:srgbClr val="556175"/>
-                </a:solidFill>
-                <a:latin typeface="맑은 고딕"/>
-                <a:ea typeface="맑은 고딕"/>
-                <a:cs typeface="맑은 고딕"/>
-              </a:rPr>
-              <a:t>추천과 대안, 그 근거</a:t>
-            </a:r>
-          </a:p>
-          <a:p>
-            <a:pPr algn="ctr">
-              <a:lnSpc>
-                <a:spcPct val="110000"/>
-              </a:lnSpc>
-              <a:spcAft>
-                <a:spcPts val="100"/>
-              </a:spcAft>
-            </a:pPr>
-            <a:r>
-              <a:rPr sz="1300" b="0">
-                <a:solidFill>
-                  <a:srgbClr val="556175"/>
-                </a:solidFill>
-                <a:latin typeface="맑은 고딕"/>
-                <a:ea typeface="맑은 고딕"/>
-                <a:cs typeface="맑은 고딕"/>
-              </a:rPr>
-              <a:t>냉각 조치: 팬 최대 운전</a:t>
-            </a:r>
-          </a:p>
-          <a:p>
-            <a:pPr algn="ctr">
-              <a:lnSpc>
-                <a:spcPct val="110000"/>
-              </a:lnSpc>
-              <a:spcAft>
-                <a:spcPts val="100"/>
-              </a:spcAft>
-            </a:pPr>
-            <a:r>
-              <a:rPr sz="1300" b="0">
-                <a:solidFill>
-                  <a:srgbClr val="556175"/>
-                </a:solidFill>
-                <a:latin typeface="맑은 고딕"/>
-                <a:ea typeface="맑은 고딕"/>
-                <a:cs typeface="맑은 고딕"/>
-              </a:rPr>
-              <a:t>정비 시점: 야간 정비 시간</a:t>
-            </a:r>
-          </a:p>
-          <a:p>
-            <a:pPr algn="ctr">
-              <a:lnSpc>
-                <a:spcPct val="110000"/>
-              </a:lnSpc>
-              <a:spcAft>
-                <a:spcPts val="100"/>
-              </a:spcAft>
-            </a:pPr>
-            <a:r>
-              <a:rPr sz="1300" b="0">
-                <a:solidFill>
-                  <a:srgbClr val="556175"/>
-                </a:solidFill>
-                <a:latin typeface="맑은 고딕"/>
-                <a:ea typeface="맑은 고딕"/>
-                <a:cs typeface="맑은 고딕"/>
-              </a:rPr>
-              <a:t>발주안: 6개 · 공급사 · 금액</a:t>
-            </a:r>
-          </a:p>
-        </p:txBody>
-      </p:sp>
-      <p:sp>
-        <p:nvSpPr>
-          <p:cNvPr id="14" name="TextBox 13"/>
-          <p:cNvSpPr txBox="1"/>
-          <p:nvPr/>
-        </p:nvSpPr>
-        <p:spPr>
-          <a:xfrm>
-            <a:off x="5899476" y="3707709"/>
-            <a:ext cx="2618278" cy="1181608"/>
-          </a:xfrm>
-          <a:prstGeom prst="rect">
-            <a:avLst/>
-          </a:prstGeom>
-          <a:noFill/>
-        </p:spPr>
-        <p:txBody>
-          <a:bodyPr wrap="square" anchor="t"/>
-          <a:lstStyle/>
-          <a:p>
-            <a:pPr algn="ctr">
-              <a:lnSpc>
-                <a:spcPct val="110000"/>
-              </a:lnSpc>
-              <a:spcAft>
-                <a:spcPts val="100"/>
-              </a:spcAft>
-            </a:pPr>
-            <a:r>
-              <a:rPr sz="1600" b="1">
-                <a:solidFill>
-                  <a:srgbClr val="1A6FC4"/>
-                </a:solidFill>
-                <a:latin typeface="맑은 고딕"/>
-                <a:ea typeface="맑은 고딕"/>
-                <a:cs typeface="맑은 고딕"/>
-              </a:rPr>
-              <a:t>승인된 내용</a:t>
-            </a:r>
-          </a:p>
-          <a:p>
-            <a:pPr algn="ctr">
-              <a:lnSpc>
-                <a:spcPct val="110000"/>
-              </a:lnSpc>
-              <a:spcAft>
-                <a:spcPts val="100"/>
-              </a:spcAft>
-            </a:pPr>
-            <a:r>
-              <a:rPr sz="1300" b="0">
-                <a:solidFill>
-                  <a:srgbClr val="556175"/>
-                </a:solidFill>
-                <a:latin typeface="맑은 고딕"/>
-                <a:ea typeface="맑은 고딕"/>
-                <a:cs typeface="맑은 고딕"/>
-              </a:rPr>
-              <a:t>승인한 역할과 승인된 제안</a:t>
-            </a:r>
-          </a:p>
-          <a:p>
-            <a:pPr algn="ctr">
-              <a:lnSpc>
-                <a:spcPct val="110000"/>
-              </a:lnSpc>
-              <a:spcAft>
-                <a:spcPts val="100"/>
-              </a:spcAft>
-            </a:pPr>
-            <a:r>
-              <a:rPr sz="1300" b="0">
-                <a:solidFill>
-                  <a:srgbClr val="556175"/>
-                </a:solidFill>
-                <a:latin typeface="맑은 고딕"/>
-                <a:ea typeface="맑은 고딕"/>
-                <a:cs typeface="맑은 고딕"/>
-              </a:rPr>
-              <a:t>운전원 · 팬 속도 100 %</a:t>
-            </a:r>
-          </a:p>
-          <a:p>
-            <a:pPr algn="ctr">
-              <a:lnSpc>
-                <a:spcPct val="110000"/>
-              </a:lnSpc>
-              <a:spcAft>
-                <a:spcPts val="100"/>
-              </a:spcAft>
-            </a:pPr>
-            <a:r>
-              <a:rPr sz="1300" b="0">
-                <a:solidFill>
-                  <a:srgbClr val="556175"/>
-                </a:solidFill>
-                <a:latin typeface="맑은 고딕"/>
-                <a:ea typeface="맑은 고딕"/>
-                <a:cs typeface="맑은 고딕"/>
-              </a:rPr>
-              <a:t>설비보전팀장 · 정비 시점</a:t>
-            </a:r>
-          </a:p>
-          <a:p>
-            <a:pPr algn="ctr">
-              <a:lnSpc>
-                <a:spcPct val="110000"/>
-              </a:lnSpc>
-              <a:spcAft>
-                <a:spcPts val="100"/>
-              </a:spcAft>
-            </a:pPr>
-            <a:r>
-              <a:rPr sz="1300" b="0">
-                <a:solidFill>
-                  <a:srgbClr val="556175"/>
-                </a:solidFill>
-                <a:latin typeface="맑은 고딕"/>
-                <a:ea typeface="맑은 고딕"/>
-                <a:cs typeface="맑은 고딕"/>
-              </a:rPr>
-              <a:t>구매 담당 · 수량과 공급사</a:t>
-            </a:r>
-          </a:p>
-        </p:txBody>
-      </p:sp>
-      <p:sp>
-        <p:nvSpPr>
-          <p:cNvPr id="15" name="TextBox 14"/>
-          <p:cNvSpPr txBox="1"/>
-          <p:nvPr/>
-        </p:nvSpPr>
-        <p:spPr>
-          <a:xfrm>
-            <a:off x="8125013" y="3707709"/>
-            <a:ext cx="2618278" cy="1181608"/>
-          </a:xfrm>
-          <a:prstGeom prst="rect">
-            <a:avLst/>
-          </a:prstGeom>
-          <a:noFill/>
-        </p:spPr>
-        <p:txBody>
-          <a:bodyPr wrap="square" anchor="t"/>
-          <a:lstStyle/>
-          <a:p>
-            <a:pPr algn="ctr">
-              <a:lnSpc>
-                <a:spcPct val="110000"/>
-              </a:lnSpc>
-              <a:spcAft>
-                <a:spcPts val="100"/>
-              </a:spcAft>
-            </a:pPr>
-            <a:r>
-              <a:rPr sz="1600" b="1">
-                <a:solidFill>
-                  <a:srgbClr val="1A6FC4"/>
-                </a:solidFill>
-                <a:latin typeface="맑은 고딕"/>
-                <a:ea typeface="맑은 고딕"/>
-                <a:cs typeface="맑은 고딕"/>
-              </a:rPr>
-              <a:t>처리의 결과</a:t>
-            </a:r>
-          </a:p>
-          <a:p>
-            <a:pPr algn="ctr">
-              <a:lnSpc>
-                <a:spcPct val="110000"/>
-              </a:lnSpc>
-              <a:spcAft>
-                <a:spcPts val="100"/>
-              </a:spcAft>
-            </a:pPr>
-            <a:r>
-              <a:rPr sz="1300" b="0">
-                <a:solidFill>
-                  <a:srgbClr val="556175"/>
-                </a:solidFill>
-                <a:latin typeface="맑은 고딕"/>
-                <a:ea typeface="맑은 고딕"/>
-                <a:cs typeface="맑은 고딕"/>
-              </a:rPr>
-              <a:t>업무 시스템에 남은 기록</a:t>
-            </a:r>
-          </a:p>
-          <a:p>
-            <a:pPr algn="ctr">
-              <a:lnSpc>
-                <a:spcPct val="110000"/>
-              </a:lnSpc>
-              <a:spcAft>
-                <a:spcPts val="100"/>
-              </a:spcAft>
-            </a:pPr>
-            <a:r>
-              <a:rPr sz="1300" b="0">
-                <a:solidFill>
-                  <a:srgbClr val="556175"/>
-                </a:solidFill>
-                <a:latin typeface="맑은 고딕"/>
-                <a:ea typeface="맑은 고딕"/>
-                <a:cs typeface="맑은 고딕"/>
-              </a:rPr>
-              <a:t>설비 명령과 작업지시</a:t>
-            </a:r>
-          </a:p>
-          <a:p>
-            <a:pPr algn="ctr">
-              <a:lnSpc>
-                <a:spcPct val="110000"/>
-              </a:lnSpc>
-              <a:spcAft>
-                <a:spcPts val="100"/>
-              </a:spcAft>
-            </a:pPr>
-            <a:r>
-              <a:rPr sz="1300" b="0">
-                <a:solidFill>
-                  <a:srgbClr val="556175"/>
-                </a:solidFill>
-                <a:latin typeface="맑은 고딕"/>
-                <a:ea typeface="맑은 고딕"/>
-                <a:cs typeface="맑은 고딕"/>
-              </a:rPr>
-              <a:t>정비 오더와 공지</a:t>
-            </a:r>
-          </a:p>
-          <a:p>
-            <a:pPr algn="ctr">
-              <a:lnSpc>
-                <a:spcPct val="110000"/>
-              </a:lnSpc>
-              <a:spcAft>
-                <a:spcPts val="100"/>
-              </a:spcAft>
-            </a:pPr>
-            <a:r>
-              <a:rPr sz="1300" b="0">
-                <a:solidFill>
-                  <a:srgbClr val="556175"/>
-                </a:solidFill>
-                <a:latin typeface="맑은 고딕"/>
-                <a:ea typeface="맑은 고딕"/>
-                <a:cs typeface="맑은 고딕"/>
-              </a:rPr>
-              <a:t>발주와 입고</a:t>
+              <a:t>제외</a:t>
             </a:r>
           </a:p>
         </p:txBody>
@@ -32775,7 +33199,7 @@
                 <a:ea typeface="맑은 고딕"/>
                 <a:cs typeface="맑은 고딕"/>
               </a:rPr>
-              <a:t>승인과 거절: 같은 제안의 두 결말</a:t>
+              <a:t>재고 보충의 추천안: 공급사 셋의 비교</a:t>
             </a:r>
           </a:p>
         </p:txBody>
@@ -32814,7 +33238,7 @@
                 <a:ea typeface="맑은 고딕"/>
                 <a:cs typeface="맑은 고딕"/>
               </a:rPr>
-              <a:t>사람이 승인한 제안만 시스템의 처리로 넘어가며, 거절된 제안은 세 업무 모두에서 시스템의 실행 없이 닫혔다.</a:t>
+              <a:t>재고 보충의 추천안은 공급사 셋을 금액, 납기, 불량률, 회사 규정으로 견주어 가장 싼 곳이 아닌 순정 공급사를 추천했다.</a:t>
             </a:r>
           </a:p>
         </p:txBody>
@@ -32895,12 +33319,344 @@
         </p:nvSpPr>
         <p:spPr>
           <a:xfrm>
-            <a:off x="548640" y="2429509"/>
-            <a:ext cx="5181447" cy="3123692"/>
+            <a:off x="548640" y="2418587"/>
+            <a:ext cx="11094415" cy="347472"/>
           </a:xfrm>
           <a:prstGeom prst="roundRect">
             <a:avLst>
-              <a:gd name="adj" fmla="val 4000"/>
+              <a:gd name="adj" fmla="val 12000"/>
+            </a:avLst>
+          </a:prstGeom>
+          <a:solidFill>
+            <a:srgbClr val="13294B"/>
+          </a:solidFill>
+          <a:ln>
+            <a:noFill/>
+          </a:ln>
+        </p:spPr>
+        <p:txBody>
+          <a:bodyPr rtlCol="0" anchor="ctr"/>
+          <a:lstStyle/>
+          <a:p>
+            <a:pPr algn="ctr"/>
+          </a:p>
+        </p:txBody>
+      </p:sp>
+      <p:sp>
+        <p:nvSpPr>
+          <p:cNvPr id="7" name="TextBox 6"/>
+          <p:cNvSpPr txBox="1"/>
+          <p:nvPr/>
+        </p:nvSpPr>
+        <p:spPr>
+          <a:xfrm>
+            <a:off x="685800" y="2418587"/>
+            <a:ext cx="2514600" cy="347472"/>
+          </a:xfrm>
+          <a:prstGeom prst="rect">
+            <a:avLst/>
+          </a:prstGeom>
+          <a:noFill/>
+        </p:spPr>
+        <p:txBody>
+          <a:bodyPr wrap="square" anchor="ctr"/>
+          <a:lstStyle/>
+          <a:p>
+            <a:pPr algn="l">
+              <a:lnSpc>
+                <a:spcPct val="110000"/>
+              </a:lnSpc>
+            </a:pPr>
+            <a:r>
+              <a:rPr sz="1300" b="1">
+                <a:solidFill>
+                  <a:srgbClr val="FFFFFF"/>
+                </a:solidFill>
+                <a:latin typeface="맑은 고딕"/>
+                <a:ea typeface="맑은 고딕"/>
+                <a:cs typeface="맑은 고딕"/>
+              </a:rPr>
+              <a:t>공급사</a:t>
+            </a:r>
+          </a:p>
+        </p:txBody>
+      </p:sp>
+      <p:sp>
+        <p:nvSpPr>
+          <p:cNvPr id="8" name="TextBox 7"/>
+          <p:cNvSpPr txBox="1"/>
+          <p:nvPr/>
+        </p:nvSpPr>
+        <p:spPr>
+          <a:xfrm>
+            <a:off x="3200400" y="2418587"/>
+            <a:ext cx="6248095" cy="347472"/>
+          </a:xfrm>
+          <a:prstGeom prst="rect">
+            <a:avLst/>
+          </a:prstGeom>
+          <a:noFill/>
+        </p:spPr>
+        <p:txBody>
+          <a:bodyPr wrap="square" anchor="ctr"/>
+          <a:lstStyle/>
+          <a:p>
+            <a:pPr algn="l">
+              <a:lnSpc>
+                <a:spcPct val="110000"/>
+              </a:lnSpc>
+            </a:pPr>
+            <a:r>
+              <a:rPr sz="1300" b="1">
+                <a:solidFill>
+                  <a:srgbClr val="FFFFFF"/>
+                </a:solidFill>
+                <a:latin typeface="맑은 고딕"/>
+                <a:ea typeface="맑은 고딕"/>
+                <a:cs typeface="맑은 고딕"/>
+              </a:rPr>
+              <a:t>씰 키트 6개의 금액 · 납기 · 불량률</a:t>
+            </a:r>
+          </a:p>
+        </p:txBody>
+      </p:sp>
+      <p:sp>
+        <p:nvSpPr>
+          <p:cNvPr id="9" name="TextBox 8"/>
+          <p:cNvSpPr txBox="1"/>
+          <p:nvPr/>
+        </p:nvSpPr>
+        <p:spPr>
+          <a:xfrm>
+            <a:off x="9448495" y="2418587"/>
+            <a:ext cx="2194560" cy="347472"/>
+          </a:xfrm>
+          <a:prstGeom prst="rect">
+            <a:avLst/>
+          </a:prstGeom>
+          <a:noFill/>
+        </p:spPr>
+        <p:txBody>
+          <a:bodyPr wrap="square" anchor="ctr"/>
+          <a:lstStyle/>
+          <a:p>
+            <a:pPr algn="l">
+              <a:lnSpc>
+                <a:spcPct val="110000"/>
+              </a:lnSpc>
+            </a:pPr>
+            <a:r>
+              <a:rPr sz="1300" b="1">
+                <a:solidFill>
+                  <a:srgbClr val="FFFFFF"/>
+                </a:solidFill>
+                <a:latin typeface="맑은 고딕"/>
+                <a:ea typeface="맑은 고딕"/>
+                <a:cs typeface="맑은 고딕"/>
+              </a:rPr>
+              <a:t>판정</a:t>
+            </a:r>
+          </a:p>
+        </p:txBody>
+      </p:sp>
+      <p:sp>
+        <p:nvSpPr>
+          <p:cNvPr id="10" name="Rounded Rectangle 9"/>
+          <p:cNvSpPr/>
+          <p:nvPr/>
+        </p:nvSpPr>
+        <p:spPr>
+          <a:xfrm>
+            <a:off x="548640" y="2852927"/>
+            <a:ext cx="11094415" cy="850392"/>
+          </a:xfrm>
+          <a:prstGeom prst="roundRect">
+            <a:avLst>
+              <a:gd name="adj" fmla="val 8000"/>
+            </a:avLst>
+          </a:prstGeom>
+          <a:solidFill>
+            <a:srgbClr val="E7F3FD"/>
+          </a:solidFill>
+          <a:ln>
+            <a:noFill/>
+          </a:ln>
+        </p:spPr>
+        <p:txBody>
+          <a:bodyPr rtlCol="0" anchor="ctr"/>
+          <a:lstStyle/>
+          <a:p>
+            <a:pPr algn="ctr"/>
+          </a:p>
+        </p:txBody>
+      </p:sp>
+      <p:sp>
+        <p:nvSpPr>
+          <p:cNvPr id="11" name="TextBox 10"/>
+          <p:cNvSpPr txBox="1"/>
+          <p:nvPr/>
+        </p:nvSpPr>
+        <p:spPr>
+          <a:xfrm>
+            <a:off x="685800" y="2820923"/>
+            <a:ext cx="2514600" cy="914400"/>
+          </a:xfrm>
+          <a:prstGeom prst="rect">
+            <a:avLst/>
+          </a:prstGeom>
+          <a:noFill/>
+        </p:spPr>
+        <p:txBody>
+          <a:bodyPr wrap="square" anchor="ctr"/>
+          <a:lstStyle/>
+          <a:p>
+            <a:pPr algn="l">
+              <a:lnSpc>
+                <a:spcPct val="110000"/>
+              </a:lnSpc>
+            </a:pPr>
+            <a:r>
+              <a:rPr sz="1600" b="1">
+                <a:solidFill>
+                  <a:srgbClr val="13294B"/>
+                </a:solidFill>
+                <a:latin typeface="맑은 고딕"/>
+                <a:ea typeface="맑은 고딕"/>
+                <a:cs typeface="맑은 고딕"/>
+              </a:rPr>
+              <a:t>B-OEM (순정)</a:t>
+            </a:r>
+          </a:p>
+        </p:txBody>
+      </p:sp>
+      <p:sp>
+        <p:nvSpPr>
+          <p:cNvPr id="12" name="TextBox 11"/>
+          <p:cNvSpPr txBox="1"/>
+          <p:nvPr/>
+        </p:nvSpPr>
+        <p:spPr>
+          <a:xfrm>
+            <a:off x="3200400" y="2820923"/>
+            <a:ext cx="6156655" cy="914400"/>
+          </a:xfrm>
+          <a:prstGeom prst="rect">
+            <a:avLst/>
+          </a:prstGeom>
+          <a:noFill/>
+        </p:spPr>
+        <p:txBody>
+          <a:bodyPr wrap="square" anchor="ctr"/>
+          <a:lstStyle/>
+          <a:p>
+            <a:pPr algn="l">
+              <a:lnSpc>
+                <a:spcPct val="110000"/>
+              </a:lnSpc>
+            </a:pPr>
+            <a:r>
+              <a:rPr sz="1400" b="0">
+                <a:solidFill>
+                  <a:srgbClr val="1F2A3A"/>
+                </a:solidFill>
+                <a:latin typeface="맑은 고딕"/>
+                <a:ea typeface="맑은 고딕"/>
+                <a:cs typeface="맑은 고딕"/>
+              </a:rPr>
+              <a:t>330만원 · 5일 · 2 %</a:t>
+            </a:r>
+          </a:p>
+          <a:p>
+            <a:pPr algn="l">
+              <a:lnSpc>
+                <a:spcPct val="110000"/>
+              </a:lnSpc>
+            </a:pPr>
+            <a:r>
+              <a:rPr sz="1400" b="0">
+                <a:solidFill>
+                  <a:srgbClr val="1F2A3A"/>
+                </a:solidFill>
+                <a:latin typeface="맑은 고딕"/>
+                <a:ea typeface="맑은 고딕"/>
+                <a:cs typeface="맑은 고딕"/>
+              </a:rPr>
+              <a:t>부품 품질에서 앞선다</a:t>
+            </a:r>
+          </a:p>
+        </p:txBody>
+      </p:sp>
+      <p:sp>
+        <p:nvSpPr>
+          <p:cNvPr id="13" name="TextBox 12"/>
+          <p:cNvSpPr txBox="1"/>
+          <p:nvPr/>
+        </p:nvSpPr>
+        <p:spPr>
+          <a:xfrm>
+            <a:off x="9448495" y="2820923"/>
+            <a:ext cx="2103120" cy="914400"/>
+          </a:xfrm>
+          <a:prstGeom prst="rect">
+            <a:avLst/>
+          </a:prstGeom>
+          <a:noFill/>
+        </p:spPr>
+        <p:txBody>
+          <a:bodyPr wrap="square" anchor="ctr"/>
+          <a:lstStyle/>
+          <a:p>
+            <a:pPr algn="l">
+              <a:lnSpc>
+                <a:spcPct val="110000"/>
+              </a:lnSpc>
+            </a:pPr>
+            <a:r>
+              <a:rPr sz="1250" b="1">
+                <a:solidFill>
+                  <a:srgbClr val="1A6FC4"/>
+                </a:solidFill>
+                <a:latin typeface="맑은 고딕"/>
+                <a:ea typeface="맑은 고딕"/>
+                <a:cs typeface="맑은 고딕"/>
+              </a:rPr>
+              <a:t>추천</a:t>
+            </a:r>
+          </a:p>
+          <a:p>
+            <a:pPr algn="l">
+              <a:lnSpc>
+                <a:spcPct val="110000"/>
+              </a:lnSpc>
+            </a:pPr>
+            <a:r>
+              <a:rPr sz="1250" b="1">
+                <a:solidFill>
+                  <a:srgbClr val="1A6FC4"/>
+                </a:solidFill>
+                <a:latin typeface="맑은 고딕"/>
+                <a:ea typeface="맑은 고딕"/>
+                <a:cs typeface="맑은 고딕"/>
+              </a:rPr>
+              <a:t>점수 +2.82</a:t>
+            </a:r>
+          </a:p>
+        </p:txBody>
+      </p:sp>
+      <p:sp>
+        <p:nvSpPr>
+          <p:cNvPr id="14" name="Rounded Rectangle 13"/>
+          <p:cNvSpPr/>
+          <p:nvPr/>
+        </p:nvSpPr>
+        <p:spPr>
+          <a:xfrm>
+            <a:off x="548640" y="3767327"/>
+            <a:ext cx="11094415" cy="850392"/>
+          </a:xfrm>
+          <a:prstGeom prst="roundRect">
+            <a:avLst>
+              <a:gd name="adj" fmla="val 8000"/>
             </a:avLst>
           </a:prstGeom>
           <a:solidFill>
@@ -32920,20 +33676,175 @@
       </p:sp>
       <p:sp>
         <p:nvSpPr>
-          <p:cNvPr id="7" name="Oval 6"/>
+          <p:cNvPr id="15" name="TextBox 14"/>
+          <p:cNvSpPr txBox="1"/>
+          <p:nvPr/>
+        </p:nvSpPr>
+        <p:spPr>
+          <a:xfrm>
+            <a:off x="685800" y="3735323"/>
+            <a:ext cx="2514600" cy="914400"/>
+          </a:xfrm>
+          <a:prstGeom prst="rect">
+            <a:avLst/>
+          </a:prstGeom>
+          <a:noFill/>
+        </p:spPr>
+        <p:txBody>
+          <a:bodyPr wrap="square" anchor="ctr"/>
+          <a:lstStyle/>
+          <a:p>
+            <a:pPr algn="l">
+              <a:lnSpc>
+                <a:spcPct val="110000"/>
+              </a:lnSpc>
+            </a:pPr>
+            <a:r>
+              <a:rPr sz="1600" b="1">
+                <a:solidFill>
+                  <a:srgbClr val="13294B"/>
+                </a:solidFill>
+                <a:latin typeface="맑은 고딕"/>
+                <a:ea typeface="맑은 고딕"/>
+                <a:cs typeface="맑은 고딕"/>
+              </a:rPr>
+              <a:t>A정밀 (대체 승인)</a:t>
+            </a:r>
+          </a:p>
+        </p:txBody>
+      </p:sp>
+      <p:sp>
+        <p:nvSpPr>
+          <p:cNvPr id="16" name="TextBox 15"/>
+          <p:cNvSpPr txBox="1"/>
+          <p:nvPr/>
+        </p:nvSpPr>
+        <p:spPr>
+          <a:xfrm>
+            <a:off x="3200400" y="3735323"/>
+            <a:ext cx="6156655" cy="914400"/>
+          </a:xfrm>
+          <a:prstGeom prst="rect">
+            <a:avLst/>
+          </a:prstGeom>
+          <a:noFill/>
+        </p:spPr>
+        <p:txBody>
+          <a:bodyPr wrap="square" anchor="ctr"/>
+          <a:lstStyle/>
+          <a:p>
+            <a:pPr algn="l">
+              <a:lnSpc>
+                <a:spcPct val="110000"/>
+              </a:lnSpc>
+            </a:pPr>
+            <a:r>
+              <a:rPr sz="1400" b="0">
+                <a:solidFill>
+                  <a:srgbClr val="1F2A3A"/>
+                </a:solidFill>
+                <a:latin typeface="맑은 고딕"/>
+                <a:ea typeface="맑은 고딕"/>
+                <a:cs typeface="맑은 고딕"/>
+              </a:rPr>
+              <a:t>210만원 · 2일 · 12 %</a:t>
+            </a:r>
+          </a:p>
+          <a:p>
+            <a:pPr algn="l">
+              <a:lnSpc>
+                <a:spcPct val="110000"/>
+              </a:lnSpc>
+            </a:pPr>
+            <a:r>
+              <a:rPr sz="1400" b="0">
+                <a:solidFill>
+                  <a:srgbClr val="1F2A3A"/>
+                </a:solidFill>
+                <a:latin typeface="맑은 고딕"/>
+                <a:ea typeface="맑은 고딕"/>
+                <a:cs typeface="맑은 고딕"/>
+              </a:rPr>
+              <a:t>불량률이 10 %를 넘어 전수 검사 비용을 더해 견준다</a:t>
+            </a:r>
+          </a:p>
+        </p:txBody>
+      </p:sp>
+      <p:sp>
+        <p:nvSpPr>
+          <p:cNvPr id="17" name="TextBox 16"/>
+          <p:cNvSpPr txBox="1"/>
+          <p:nvPr/>
+        </p:nvSpPr>
+        <p:spPr>
+          <a:xfrm>
+            <a:off x="9448495" y="3735323"/>
+            <a:ext cx="2103120" cy="914400"/>
+          </a:xfrm>
+          <a:prstGeom prst="rect">
+            <a:avLst/>
+          </a:prstGeom>
+          <a:noFill/>
+        </p:spPr>
+        <p:txBody>
+          <a:bodyPr wrap="square" anchor="ctr"/>
+          <a:lstStyle/>
+          <a:p>
+            <a:pPr algn="l">
+              <a:lnSpc>
+                <a:spcPct val="110000"/>
+              </a:lnSpc>
+            </a:pPr>
+            <a:r>
+              <a:rPr sz="1250" b="1">
+                <a:solidFill>
+                  <a:srgbClr val="556175"/>
+                </a:solidFill>
+                <a:latin typeface="맑은 고딕"/>
+                <a:ea typeface="맑은 고딕"/>
+                <a:cs typeface="맑은 고딕"/>
+              </a:rPr>
+              <a:t>대안</a:t>
+            </a:r>
+          </a:p>
+          <a:p>
+            <a:pPr algn="l">
+              <a:lnSpc>
+                <a:spcPct val="110000"/>
+              </a:lnSpc>
+            </a:pPr>
+            <a:r>
+              <a:rPr sz="1250" b="1">
+                <a:solidFill>
+                  <a:srgbClr val="556175"/>
+                </a:solidFill>
+                <a:latin typeface="맑은 고딕"/>
+                <a:ea typeface="맑은 고딕"/>
+                <a:cs typeface="맑은 고딕"/>
+              </a:rPr>
+              <a:t>점수 +1.32</a:t>
+            </a:r>
+          </a:p>
+        </p:txBody>
+      </p:sp>
+      <p:sp>
+        <p:nvSpPr>
+          <p:cNvPr id="18" name="Rounded Rectangle 17"/>
           <p:cNvSpPr/>
           <p:nvPr/>
         </p:nvSpPr>
         <p:spPr>
           <a:xfrm>
-            <a:off x="822959" y="2630678"/>
-            <a:ext cx="731520" cy="731520"/>
-          </a:xfrm>
-          <a:prstGeom prst="ellipse">
-            <a:avLst/>
+            <a:off x="548640" y="4681727"/>
+            <a:ext cx="11094415" cy="850392"/>
+          </a:xfrm>
+          <a:prstGeom prst="roundRect">
+            <a:avLst>
+              <a:gd name="adj" fmla="val 8000"/>
+            </a:avLst>
           </a:prstGeom>
           <a:solidFill>
-            <a:srgbClr val="FFFFFF"/>
+            <a:srgbClr val="F3F6F9"/>
           </a:solidFill>
           <a:ln>
             <a:noFill/>
@@ -32947,40 +33858,16 @@
           </a:p>
         </p:txBody>
       </p:sp>
-      <p:pic>
-        <p:nvPicPr>
-          <p:cNvPr id="8" name="아이콘:circle-check" descr="circle-check_13294B_1.6.png"/>
-          <p:cNvPicPr>
-            <a:picLocks noChangeAspect="1"/>
-          </p:cNvPicPr>
-          <p:nvPr/>
-        </p:nvPicPr>
-        <p:blipFill>
-          <a:blip r:embed="rId3"/>
-          <a:stretch>
-            <a:fillRect/>
-          </a:stretch>
-        </p:blipFill>
-        <p:spPr>
-          <a:xfrm>
-            <a:off x="976579" y="2784297"/>
-            <a:ext cx="424281" cy="424281"/>
-          </a:xfrm>
-          <a:prstGeom prst="rect">
-            <a:avLst/>
-          </a:prstGeom>
-        </p:spPr>
-      </p:pic>
-      <p:sp>
-        <p:nvSpPr>
-          <p:cNvPr id="9" name="TextBox 8"/>
-          <p:cNvSpPr txBox="1"/>
-          <p:nvPr/>
-        </p:nvSpPr>
-        <p:spPr>
-          <a:xfrm>
-            <a:off x="1691640" y="2630678"/>
-            <a:ext cx="3855567" cy="731520"/>
+      <p:sp>
+        <p:nvSpPr>
+          <p:cNvPr id="19" name="TextBox 18"/>
+          <p:cNvSpPr txBox="1"/>
+          <p:nvPr/>
+        </p:nvSpPr>
+        <p:spPr>
+          <a:xfrm>
+            <a:off x="685800" y="4649723"/>
+            <a:ext cx="2514600" cy="914400"/>
           </a:xfrm>
           <a:prstGeom prst="rect">
             <a:avLst/>
@@ -32997,7 +33884,7 @@
               </a:lnSpc>
             </a:pPr>
             <a:r>
-              <a:rPr sz="2000" b="1">
+              <a:rPr sz="1600" b="1">
                 <a:solidFill>
                   <a:srgbClr val="13294B"/>
                 </a:solidFill>
@@ -33005,41 +33892,38 @@
                 <a:ea typeface="맑은 고딕"/>
                 <a:cs typeface="맑은 고딕"/>
               </a:rPr>
-              <a:t>승인</a:t>
-            </a:r>
-          </a:p>
-        </p:txBody>
-      </p:sp>
-      <p:sp>
-        <p:nvSpPr>
-          <p:cNvPr id="10" name="TextBox 9"/>
-          <p:cNvSpPr txBox="1"/>
-          <p:nvPr/>
-        </p:nvSpPr>
-        <p:spPr>
-          <a:xfrm>
-            <a:off x="822959" y="3481069"/>
-            <a:ext cx="4632807" cy="1523492"/>
-          </a:xfrm>
-          <a:prstGeom prst="rect">
-            <a:avLst/>
-          </a:prstGeom>
-          <a:noFill/>
-        </p:spPr>
-        <p:txBody>
-          <a:bodyPr wrap="square" anchor="t"/>
+              <a:t>C트레이딩 (비승인)</a:t>
+            </a:r>
+          </a:p>
+        </p:txBody>
+      </p:sp>
+      <p:sp>
+        <p:nvSpPr>
+          <p:cNvPr id="20" name="TextBox 19"/>
+          <p:cNvSpPr txBox="1"/>
+          <p:nvPr/>
+        </p:nvSpPr>
+        <p:spPr>
+          <a:xfrm>
+            <a:off x="3200400" y="4649723"/>
+            <a:ext cx="6156655" cy="914400"/>
+          </a:xfrm>
+          <a:prstGeom prst="rect">
+            <a:avLst/>
+          </a:prstGeom>
+          <a:noFill/>
+        </p:spPr>
+        <p:txBody>
+          <a:bodyPr wrap="square" anchor="ctr"/>
           <a:lstStyle/>
           <a:p>
             <a:pPr algn="l">
               <a:lnSpc>
                 <a:spcPct val="110000"/>
               </a:lnSpc>
-              <a:spcAft>
-                <a:spcPts val="600"/>
-              </a:spcAft>
-            </a:pPr>
-            <a:r>
-              <a:rPr sz="1450" b="0">
+            </a:pPr>
+            <a:r>
+              <a:rPr sz="1400" b="0">
                 <a:solidFill>
                   <a:srgbClr val="1F2A3A"/>
                 </a:solidFill>
@@ -33047,7 +33931,7 @@
                 <a:ea typeface="맑은 고딕"/>
                 <a:cs typeface="맑은 고딕"/>
               </a:rPr>
-              <a:t>• 게이트웨이가 승인의 갈래를 연다</a:t>
+              <a:t>120만원 · 1일 · 30 %</a:t>
             </a:r>
           </a:p>
           <a:p>
@@ -33055,12 +33939,9 @@
               <a:lnSpc>
                 <a:spcPct val="110000"/>
               </a:lnSpc>
-              <a:spcAft>
-                <a:spcPts val="600"/>
-              </a:spcAft>
-            </a:pPr>
-            <a:r>
-              <a:rPr sz="1450" b="0">
+            </a:pPr>
+            <a:r>
+              <a:rPr sz="1400" b="0">
                 <a:solidFill>
                   <a:srgbClr val="1F2A3A"/>
                 </a:solidFill>
@@ -33068,466 +33949,46 @@
                 <a:ea typeface="맑은 고딕"/>
                 <a:cs typeface="맑은 고딕"/>
               </a:rPr>
-              <a:t>• 긴급 대응: 설비 명령과 작업지시</a:t>
-            </a:r>
-          </a:p>
+              <a:t>승인 공급사가 아니어서 핵심 부품은 살 수 없다</a:t>
+            </a:r>
+          </a:p>
+        </p:txBody>
+      </p:sp>
+      <p:sp>
+        <p:nvSpPr>
+          <p:cNvPr id="21" name="TextBox 20"/>
+          <p:cNvSpPr txBox="1"/>
+          <p:nvPr/>
+        </p:nvSpPr>
+        <p:spPr>
+          <a:xfrm>
+            <a:off x="9448495" y="4649723"/>
+            <a:ext cx="2103120" cy="914400"/>
+          </a:xfrm>
+          <a:prstGeom prst="rect">
+            <a:avLst/>
+          </a:prstGeom>
+          <a:noFill/>
+        </p:spPr>
+        <p:txBody>
+          <a:bodyPr wrap="square" anchor="ctr"/>
+          <a:lstStyle/>
           <a:p>
             <a:pPr algn="l">
               <a:lnSpc>
                 <a:spcPct val="110000"/>
               </a:lnSpc>
-              <a:spcAft>
-                <a:spcPts val="600"/>
-              </a:spcAft>
-            </a:pPr>
-            <a:r>
-              <a:rPr sz="1450" b="0">
-                <a:solidFill>
-                  <a:srgbClr val="1F2A3A"/>
-                </a:solidFill>
-                <a:latin typeface="맑은 고딕"/>
-                <a:ea typeface="맑은 고딕"/>
-                <a:cs typeface="맑은 고딕"/>
-              </a:rPr>
-              <a:t>• 정기 점검: 정비 오더와 공지</a:t>
-            </a:r>
-          </a:p>
-          <a:p>
-            <a:pPr algn="l">
-              <a:lnSpc>
-                <a:spcPct val="110000"/>
-              </a:lnSpc>
-              <a:spcAft>
-                <a:spcPts val="600"/>
-              </a:spcAft>
-            </a:pPr>
-            <a:r>
-              <a:rPr sz="1450" b="0">
-                <a:solidFill>
-                  <a:srgbClr val="1F2A3A"/>
-                </a:solidFill>
-                <a:latin typeface="맑은 고딕"/>
-                <a:ea typeface="맑은 고딕"/>
-                <a:cs typeface="맑은 고딕"/>
-              </a:rPr>
-              <a:t>• 재고 보충: 발주와 입고</a:t>
-            </a:r>
-          </a:p>
-        </p:txBody>
-      </p:sp>
-      <p:sp>
-        <p:nvSpPr>
-          <p:cNvPr id="11" name="Rounded Rectangle 10"/>
-          <p:cNvSpPr/>
-          <p:nvPr/>
-        </p:nvSpPr>
-        <p:spPr>
-          <a:xfrm>
-            <a:off x="868680" y="5096002"/>
-            <a:ext cx="822960" cy="292608"/>
-          </a:xfrm>
-          <a:prstGeom prst="roundRect">
-            <a:avLst>
-              <a:gd name="adj" fmla="val 50000"/>
-            </a:avLst>
-          </a:prstGeom>
-          <a:solidFill>
-            <a:srgbClr val="D3D9E1"/>
-          </a:solidFill>
-          <a:ln>
-            <a:noFill/>
-          </a:ln>
-        </p:spPr>
-        <p:txBody>
-          <a:bodyPr rtlCol="0" anchor="ctr"/>
-          <a:lstStyle/>
-          <a:p>
-            <a:pPr algn="ctr"/>
-          </a:p>
-        </p:txBody>
-      </p:sp>
-      <p:sp>
-        <p:nvSpPr>
-          <p:cNvPr id="12" name="TextBox 11"/>
-          <p:cNvSpPr txBox="1"/>
-          <p:nvPr/>
-        </p:nvSpPr>
-        <p:spPr>
-          <a:xfrm>
-            <a:off x="868680" y="5096002"/>
-            <a:ext cx="822960" cy="292608"/>
-          </a:xfrm>
-          <a:prstGeom prst="rect">
-            <a:avLst/>
-          </a:prstGeom>
-          <a:noFill/>
-        </p:spPr>
-        <p:txBody>
-          <a:bodyPr wrap="square" anchor="ctr"/>
-          <a:lstStyle/>
-          <a:p>
-            <a:pPr algn="ctr">
-              <a:lnSpc>
-                <a:spcPct val="110000"/>
-              </a:lnSpc>
-            </a:pPr>
-            <a:r>
-              <a:rPr sz="1200" b="1">
-                <a:solidFill>
-                  <a:srgbClr val="13294B"/>
-                </a:solidFill>
-                <a:latin typeface="맑은 고딕"/>
-                <a:ea typeface="맑은 고딕"/>
-                <a:cs typeface="맑은 고딕"/>
-              </a:rPr>
-              <a:t>E_end</a:t>
-            </a:r>
-          </a:p>
-        </p:txBody>
-      </p:sp>
-      <p:sp>
-        <p:nvSpPr>
-          <p:cNvPr id="13" name="Rounded Rectangle 12"/>
-          <p:cNvSpPr/>
-          <p:nvPr/>
-        </p:nvSpPr>
-        <p:spPr>
-          <a:xfrm>
-            <a:off x="6461607" y="2429509"/>
-            <a:ext cx="5181447" cy="3123692"/>
-          </a:xfrm>
-          <a:prstGeom prst="roundRect">
-            <a:avLst>
-              <a:gd name="adj" fmla="val 4000"/>
-            </a:avLst>
-          </a:prstGeom>
-          <a:solidFill>
-            <a:srgbClr val="E7F3FD"/>
-          </a:solidFill>
-          <a:ln w="28575">
-            <a:solidFill>
-              <a:srgbClr val="5CB8F2"/>
-            </a:solidFill>
-          </a:ln>
-        </p:spPr>
-        <p:txBody>
-          <a:bodyPr rtlCol="0" anchor="ctr"/>
-          <a:lstStyle/>
-          <a:p>
-            <a:pPr algn="ctr"/>
-          </a:p>
-        </p:txBody>
-      </p:sp>
-      <p:sp>
-        <p:nvSpPr>
-          <p:cNvPr id="14" name="Oval 13"/>
-          <p:cNvSpPr/>
-          <p:nvPr/>
-        </p:nvSpPr>
-        <p:spPr>
-          <a:xfrm>
-            <a:off x="6735927" y="2630678"/>
-            <a:ext cx="731520" cy="731520"/>
-          </a:xfrm>
-          <a:prstGeom prst="ellipse">
-            <a:avLst/>
-          </a:prstGeom>
-          <a:solidFill>
-            <a:srgbClr val="5CB8F2"/>
-          </a:solidFill>
-          <a:ln>
-            <a:noFill/>
-          </a:ln>
-        </p:spPr>
-        <p:txBody>
-          <a:bodyPr rtlCol="0" anchor="ctr"/>
-          <a:lstStyle/>
-          <a:p>
-            <a:pPr algn="ctr"/>
-          </a:p>
-        </p:txBody>
-      </p:sp>
-      <p:pic>
-        <p:nvPicPr>
-          <p:cNvPr id="15" name="아이콘:ban" descr="ban_13294B_1.6.png"/>
-          <p:cNvPicPr>
-            <a:picLocks noChangeAspect="1"/>
-          </p:cNvPicPr>
-          <p:nvPr/>
-        </p:nvPicPr>
-        <p:blipFill>
-          <a:blip r:embed="rId4"/>
-          <a:stretch>
-            <a:fillRect/>
-          </a:stretch>
-        </p:blipFill>
-        <p:spPr>
-          <a:xfrm>
-            <a:off x="6889546" y="2784297"/>
-            <a:ext cx="424281" cy="424281"/>
-          </a:xfrm>
-          <a:prstGeom prst="rect">
-            <a:avLst/>
-          </a:prstGeom>
-        </p:spPr>
-      </p:pic>
-      <p:sp>
-        <p:nvSpPr>
-          <p:cNvPr id="16" name="TextBox 15"/>
-          <p:cNvSpPr txBox="1"/>
-          <p:nvPr/>
-        </p:nvSpPr>
-        <p:spPr>
-          <a:xfrm>
-            <a:off x="7604607" y="2630678"/>
-            <a:ext cx="3855567" cy="731520"/>
-          </a:xfrm>
-          <a:prstGeom prst="rect">
-            <a:avLst/>
-          </a:prstGeom>
-          <a:noFill/>
-        </p:spPr>
-        <p:txBody>
-          <a:bodyPr wrap="square" anchor="ctr"/>
-          <a:lstStyle/>
-          <a:p>
-            <a:pPr algn="l">
-              <a:lnSpc>
-                <a:spcPct val="110000"/>
-              </a:lnSpc>
-            </a:pPr>
-            <a:r>
-              <a:rPr sz="2000" b="1">
-                <a:solidFill>
-                  <a:srgbClr val="13294B"/>
-                </a:solidFill>
-                <a:latin typeface="맑은 고딕"/>
-                <a:ea typeface="맑은 고딕"/>
-                <a:cs typeface="맑은 고딕"/>
-              </a:rPr>
-              <a:t>거절</a:t>
-            </a:r>
-          </a:p>
-        </p:txBody>
-      </p:sp>
-      <p:sp>
-        <p:nvSpPr>
-          <p:cNvPr id="17" name="TextBox 16"/>
-          <p:cNvSpPr txBox="1"/>
-          <p:nvPr/>
-        </p:nvSpPr>
-        <p:spPr>
-          <a:xfrm>
-            <a:off x="6735927" y="3481069"/>
-            <a:ext cx="4632807" cy="1523492"/>
-          </a:xfrm>
-          <a:prstGeom prst="rect">
-            <a:avLst/>
-          </a:prstGeom>
-          <a:noFill/>
-        </p:spPr>
-        <p:txBody>
-          <a:bodyPr wrap="square" anchor="t"/>
-          <a:lstStyle/>
-          <a:p>
-            <a:pPr algn="l">
-              <a:lnSpc>
-                <a:spcPct val="110000"/>
-              </a:lnSpc>
-              <a:spcAft>
-                <a:spcPts val="600"/>
-              </a:spcAft>
-            </a:pPr>
-            <a:r>
-              <a:rPr sz="1450" b="0">
-                <a:solidFill>
-                  <a:srgbClr val="1F2A3A"/>
-                </a:solidFill>
-                <a:latin typeface="맑은 고딕"/>
-                <a:ea typeface="맑은 고딕"/>
-                <a:cs typeface="맑은 고딕"/>
-              </a:rPr>
-              <a:t>• 게이트웨이가 거절의 갈래를 연다</a:t>
-            </a:r>
-          </a:p>
-          <a:p>
-            <a:pPr algn="l">
-              <a:lnSpc>
-                <a:spcPct val="110000"/>
-              </a:lnSpc>
-              <a:spcAft>
-                <a:spcPts val="600"/>
-              </a:spcAft>
-            </a:pPr>
-            <a:r>
-              <a:rPr sz="1450" b="0">
-                <a:solidFill>
-                  <a:srgbClr val="1F2A3A"/>
-                </a:solidFill>
-                <a:latin typeface="맑은 고딕"/>
-                <a:ea typeface="맑은 고딕"/>
-                <a:cs typeface="맑은 고딕"/>
-              </a:rPr>
-              <a:t>• 설비 명령, 정비 오더, 발주는 만들어지지 않는다</a:t>
-            </a:r>
-          </a:p>
-          <a:p>
-            <a:pPr algn="l">
-              <a:lnSpc>
-                <a:spcPct val="110000"/>
-              </a:lnSpc>
-              <a:spcAft>
-                <a:spcPts val="600"/>
-              </a:spcAft>
-            </a:pPr>
-            <a:r>
-              <a:rPr sz="1450" b="0">
-                <a:solidFill>
-                  <a:srgbClr val="1F2A3A"/>
-                </a:solidFill>
-                <a:latin typeface="맑은 고딕"/>
-                <a:ea typeface="맑은 고딕"/>
-                <a:cs typeface="맑은 고딕"/>
-              </a:rPr>
-              <a:t>• 결과 보고가 거절의 사유와 하지 않은 일을 적는다</a:t>
-            </a:r>
-          </a:p>
-        </p:txBody>
-      </p:sp>
-      <p:sp>
-        <p:nvSpPr>
-          <p:cNvPr id="18" name="Rounded Rectangle 17"/>
-          <p:cNvSpPr/>
-          <p:nvPr/>
-        </p:nvSpPr>
-        <p:spPr>
-          <a:xfrm>
-            <a:off x="6781647" y="5096002"/>
-            <a:ext cx="1173480" cy="292608"/>
-          </a:xfrm>
-          <a:prstGeom prst="roundRect">
-            <a:avLst>
-              <a:gd name="adj" fmla="val 50000"/>
-            </a:avLst>
-          </a:prstGeom>
-          <a:solidFill>
-            <a:srgbClr val="5CB8F2"/>
-          </a:solidFill>
-          <a:ln>
-            <a:noFill/>
-          </a:ln>
-        </p:spPr>
-        <p:txBody>
-          <a:bodyPr rtlCol="0" anchor="ctr"/>
-          <a:lstStyle/>
-          <a:p>
-            <a:pPr algn="ctr"/>
-          </a:p>
-        </p:txBody>
-      </p:sp>
-      <p:sp>
-        <p:nvSpPr>
-          <p:cNvPr id="19" name="TextBox 18"/>
-          <p:cNvSpPr txBox="1"/>
-          <p:nvPr/>
-        </p:nvSpPr>
-        <p:spPr>
-          <a:xfrm>
-            <a:off x="6781647" y="5096002"/>
-            <a:ext cx="1173480" cy="292608"/>
-          </a:xfrm>
-          <a:prstGeom prst="rect">
-            <a:avLst/>
-          </a:prstGeom>
-          <a:noFill/>
-        </p:spPr>
-        <p:txBody>
-          <a:bodyPr wrap="square" anchor="ctr"/>
-          <a:lstStyle/>
-          <a:p>
-            <a:pPr algn="ctr">
-              <a:lnSpc>
-                <a:spcPct val="110000"/>
-              </a:lnSpc>
-            </a:pPr>
-            <a:r>
-              <a:rPr sz="1200" b="1">
-                <a:solidFill>
-                  <a:srgbClr val="13294B"/>
-                </a:solidFill>
-                <a:latin typeface="맑은 고딕"/>
-                <a:ea typeface="맑은 고딕"/>
-                <a:cs typeface="맑은 고딕"/>
-              </a:rPr>
-              <a:t>E_rejected</a:t>
-            </a:r>
-          </a:p>
-        </p:txBody>
-      </p:sp>
-      <p:sp>
-        <p:nvSpPr>
-          <p:cNvPr id="20" name="Oval 19"/>
-          <p:cNvSpPr/>
-          <p:nvPr/>
-        </p:nvSpPr>
-        <p:spPr>
-          <a:xfrm>
-            <a:off x="5821527" y="3717036"/>
-            <a:ext cx="548640" cy="548640"/>
-          </a:xfrm>
-          <a:prstGeom prst="ellipse">
-            <a:avLst/>
-          </a:prstGeom>
-          <a:solidFill>
-            <a:srgbClr val="13294B"/>
-          </a:solidFill>
-          <a:ln>
-            <a:noFill/>
-          </a:ln>
-        </p:spPr>
-        <p:txBody>
-          <a:bodyPr rtlCol="0" anchor="ctr"/>
-          <a:lstStyle/>
-          <a:p>
-            <a:pPr algn="ctr"/>
-          </a:p>
-        </p:txBody>
-      </p:sp>
-      <p:sp>
-        <p:nvSpPr>
-          <p:cNvPr id="21" name="TextBox 20"/>
-          <p:cNvSpPr txBox="1"/>
-          <p:nvPr/>
-        </p:nvSpPr>
-        <p:spPr>
-          <a:xfrm>
-            <a:off x="5821527" y="3717036"/>
-            <a:ext cx="548640" cy="548640"/>
-          </a:xfrm>
-          <a:prstGeom prst="rect">
-            <a:avLst/>
-          </a:prstGeom>
-          <a:noFill/>
-        </p:spPr>
-        <p:txBody>
-          <a:bodyPr wrap="square" anchor="ctr"/>
-          <a:lstStyle/>
-          <a:p>
-            <a:pPr algn="ctr">
-              <a:lnSpc>
-                <a:spcPct val="110000"/>
-              </a:lnSpc>
-            </a:pPr>
-            <a:r>
-              <a:rPr sz="1400" b="1">
-                <a:solidFill>
-                  <a:srgbClr val="FFFFFF"/>
-                </a:solidFill>
-                <a:latin typeface="맑은 고딕"/>
-                <a:ea typeface="맑은 고딕"/>
-                <a:cs typeface="맑은 고딕"/>
-              </a:rPr>
-              <a:t>vs</a:t>
+            </a:pPr>
+            <a:r>
+              <a:rPr sz="1250" b="1">
+                <a:solidFill>
+                  <a:srgbClr val="556175"/>
+                </a:solidFill>
+                <a:latin typeface="맑은 고딕"/>
+                <a:ea typeface="맑은 고딕"/>
+                <a:cs typeface="맑은 고딕"/>
+              </a:rPr>
+              <a:t>제외</a:t>
             </a:r>
           </a:p>
         </p:txBody>
@@ -34460,7 +34921,7 @@
                 <a:ea typeface="맑은 고딕"/>
                 <a:cs typeface="맑은 고딕"/>
               </a:rPr>
-              <a:t>승인이 전달되면 엔진은 설비에 명령을 내고, 시계열 DB에서 유온을 다시 읽고, CMMS에 작업지시를 등록한다.</a:t>
+              <a:t>승인이 전달되면 엔진은 SCADA로 명령을 내고, 시계열 DB에서 유온을 다시 읽고, CMMS에 작업지시를 등록한다.</a:t>
             </a:r>
           </a:p>
         </p:txBody>
@@ -34535,7 +34996,7 @@
       </p:sp>
       <p:pic>
         <p:nvPicPr>
-          <p:cNvPr id="6" name="삽화:시스템실행.svg" descr="illust_3211333275089742961_1791744928.png"/>
+          <p:cNvPr id="6" name="삽화:시스템실행.svg" descr="illust_3900145109908996040_1791770778.png"/>
           <p:cNvPicPr>
             <a:picLocks noChangeAspect="1"/>
           </p:cNvPicPr>
@@ -35088,7 +35549,7 @@
       </p:sp>
       <p:pic>
         <p:nvPicPr>
-          <p:cNvPr id="6" name="삽화:세종료.svg" descr="illust_7715334567662070582_1791743711.png"/>
+          <p:cNvPr id="6" name="삽화:세종료.svg" descr="illust_7773051831209134899_1791743711.png"/>
           <p:cNvPicPr>
             <a:picLocks noChangeAspect="1"/>
           </p:cNvPicPr>
@@ -35587,7 +36048,7 @@
                 <a:ea typeface="맑은 고딕"/>
                 <a:cs typeface="맑은 고딕"/>
               </a:rPr>
-              <a:t>지식이 빠지면 제안에 근거가 없고, 에이전트가 빠지면 사람이 견주며, 프로세스가 빠지면 실행에 닿지 못한다.</a:t>
+              <a:t>지식이 빠지면 추천안에 근거가 없고, 에이전트가 빠지면 사람이 견주며, 프로세스가 빠지면 실행에 닿지 못한다.</a:t>
             </a:r>
           </a:p>
         </p:txBody>
@@ -35825,7 +36286,7 @@
                 <a:ea typeface="맑은 고딕"/>
                 <a:cs typeface="맑은 고딕"/>
               </a:rPr>
-              <a:t>• 제안이 무엇에 근거했는지 되짚을 수 없다</a:t>
+              <a:t>• 추천안이 무엇에 근거했는지 되짚을 수 없다</a:t>
             </a:r>
           </a:p>
         </p:txBody>
@@ -36458,7 +36919,7 @@
                 <a:ea typeface="맑은 고딕"/>
                 <a:cs typeface="맑은 고딕"/>
               </a:rPr>
-              <a:t>세 업무에서 AI는 읽고 견주어 제안했고, 사람은 프로세스를 설계하고 제안을 승인하거나 거절했다.</a:t>
+              <a:t>세 업무에서 AI는 읽고 견주어 제안했고, 사람은 프로세스를 설계하고 추천안을 승인하거나 거절했다.</a:t>
             </a:r>
           </a:p>
         </p:txBody>
@@ -36991,7 +37452,7 @@
                 <a:ea typeface="맑은 고딕"/>
                 <a:cs typeface="맑은 고딕"/>
               </a:rPr>
-              <a:t>• 제안을 승인하거나 거절한다</a:t>
+              <a:t>• 추천안을 승인하거나 거절한다</a:t>
             </a:r>
           </a:p>
           <a:p>
@@ -38120,7 +38581,7 @@
                 <a:ea typeface="맑은 고딕"/>
                 <a:cs typeface="맑은 고딕"/>
               </a:rPr>
-              <a:t>제안은 근거가 지식에 닿아 있고, 정해진 역할이 승인하고, 실행과 결과가 기록으로 남을 때 끝난 업무가 된다.</a:t>
+              <a:t>추천안은 근거가 지식에 닿아 있고, 정해진 역할이 승인하고, 실행과 결과가 기록으로 남을 때 끝난 업무가 된다.</a:t>
             </a:r>
           </a:p>
         </p:txBody>
@@ -38337,7 +38798,7 @@
                 <a:ea typeface="맑은 고딕"/>
                 <a:cs typeface="맑은 고딕"/>
               </a:rPr>
-              <a:t>• 판단의 근거가 등록된 지식과</a:t>
+              <a:t>• 추천안의 근거가 등록된 지식과</a:t>
             </a:r>
           </a:p>
           <a:p>
@@ -38577,7 +39038,7 @@
                 <a:ea typeface="맑은 고딕"/>
                 <a:cs typeface="맑은 고딕"/>
               </a:rPr>
-              <a:t>• 스킬과 도구로 만든 판단이</a:t>
+              <a:t>• 스킬과 도구로 만든 추천안이</a:t>
             </a:r>
           </a:p>
           <a:p>
@@ -40171,7 +40632,7 @@
       </p:sp>
       <p:pic>
         <p:nvPicPr>
-          <p:cNvPr id="6" name="삽화:세시작.svg" descr="illust_5023678281945270164_1791743711.png"/>
+          <p:cNvPr id="6" name="삽화:세시작.svg" descr="illust_7507125924456950772_1791743711.png"/>
           <p:cNvPicPr>
             <a:picLocks noChangeAspect="1"/>
           </p:cNvPicPr>
@@ -41401,7 +41862,7 @@
                 <a:ea typeface="맑은 고딕"/>
                 <a:cs typeface="맑은 고딕"/>
               </a:rPr>
-              <a:t>정비 계획 에이전트의 제안이 대부분 적절했으므로 승인 작업을 빼고 정비 오더를 바로 등록하자는 의견이 나왔다.</a:t>
+              <a:t>정비 계획 에이전트의 추천안이 대부분 적절했으므로 승인 작업을 빼고 정비 오더를 바로 등록하자는 의견이 나왔다.</a:t>
             </a:r>
           </a:p>
         </p:txBody>
@@ -41677,7 +42138,7 @@
                 <a:ea typeface="맑은 고딕"/>
                 <a:cs typeface="맑은 고딕"/>
               </a:rPr>
-              <a:t>제안이 정확하다면 승인 작업을 빼고 에이전트의 제안을 바로 등록한다</a:t>
+              <a:t>추천안이 정확하다면 승인 작업을 빼고 추천안대로 바로 등록한다</a:t>
             </a:r>
           </a:p>
         </p:txBody>
@@ -44603,7 +45064,7 @@
                 <a:ea typeface="맑은 고딕"/>
                 <a:cs typeface="맑은 고딕"/>
               </a:rPr>
-              <a:t>세 업무는 시작 조건, 에이전트의 판단, 승인자, 실행 시스템이 다르고, 제안에서 승인을 거쳐 처리로 가는 순서는 같다.</a:t>
+              <a:t>세 업무는 시작 조건, 에이전트의 판단, 승인자, 실행 시스템이 다르고, 추천안이 승인을 거쳐 처리로 가는 순서는 같다.</a:t>
             </a:r>
           </a:p>
         </p:txBody>
@@ -46333,7 +46794,7 @@
       </p:sp>
       <p:pic>
         <p:nvPicPr>
-          <p:cNvPr id="6" name="삽화:운전시간.svg" descr="illust_1591289300600594281_1791743711.png"/>
+          <p:cNvPr id="6" name="삽화:운전시간.svg" descr="illust_7859101098763153838_1791743711.png"/>
           <p:cNvPicPr>
             <a:picLocks noChangeAspect="1"/>
           </p:cNvPicPr>

--- a/docs/교재/통합반_오프라인/10회차/통합반_오프라인_10회차.pptx
+++ b/docs/교재/통합반_오프라인/10회차/통합반_오프라인_10회차.pptx
@@ -7196,7 +7196,7 @@
       </p:sp>
       <p:pic>
         <p:nvPicPr>
-          <p:cNvPr id="6" name="삽화:재고.svg" descr="illust_895450059837999180_1791743711.png"/>
+          <p:cNvPr id="6" name="삽화:재고.svg" descr="illust_35959757509394394_1791772944.png"/>
           <p:cNvPicPr>
             <a:picLocks noChangeAspect="1"/>
           </p:cNvPicPr>
@@ -10004,7 +10004,7 @@
       </p:sp>
       <p:pic>
         <p:nvPicPr>
-          <p:cNvPr id="6" name="삽화:세흐름_나란히.svg" descr="illust_2384168900132868414_1791743711.png"/>
+          <p:cNvPr id="6" name="삽화:세흐름_나란히.svg" descr="illust_948115050597481794_1791772944.png"/>
           <p:cNvPicPr>
             <a:picLocks noChangeAspect="1"/>
           </p:cNvPicPr>
@@ -11490,7 +11490,7 @@
       </p:sp>
       <p:pic>
         <p:nvPicPr>
-          <p:cNvPr id="6" name="삽화:승인블록_자리.svg" descr="illust_7564186825106726284_1791743711.png"/>
+          <p:cNvPr id="6" name="삽화:승인블록_자리.svg" descr="illust_4133486982481253994_1791772944.png"/>
           <p:cNvPicPr>
             <a:picLocks noChangeAspect="1"/>
           </p:cNvPicPr>
@@ -12421,7 +12421,7 @@
       </p:sp>
       <p:pic>
         <p:nvPicPr>
-          <p:cNvPr id="6" name="삽화:흐름_정기점검.svg" descr="illust_4133770100786933770_1791743711.png"/>
+          <p:cNvPr id="6" name="삽화:흐름_정기점검.svg" descr="illust_7149280400560905535_1791772944.png"/>
           <p:cNvPicPr>
             <a:picLocks noChangeAspect="1"/>
           </p:cNvPicPr>
@@ -13310,7 +13310,7 @@
       </p:sp>
       <p:pic>
         <p:nvPicPr>
-          <p:cNvPr id="6" name="삽화:흐름_재고보충.svg" descr="illust_537293735982613688_1791743711.png"/>
+          <p:cNvPr id="6" name="삽화:흐름_재고보충.svg" descr="illust_8615721108996379366_1791772944.png"/>
           <p:cNvPicPr>
             <a:picLocks noChangeAspect="1"/>
           </p:cNvPicPr>
@@ -22770,7 +22770,7 @@
       </p:sp>
       <p:pic>
         <p:nvPicPr>
-          <p:cNvPr id="6" name="삽화:세층연결.svg" descr="illust_1839498804498376977_1791743711.png"/>
+          <p:cNvPr id="6" name="삽화:세층연결.svg" descr="illust_2379440920557667633_1791772944.png"/>
           <p:cNvPicPr>
             <a:picLocks noChangeAspect="1"/>
           </p:cNvPicPr>
@@ -27254,7 +27254,7 @@
       </p:sp>
       <p:pic>
         <p:nvPicPr>
-          <p:cNvPr id="6" name="삽화:장치자리.svg" descr="illust_7021465128722940694_1791770880.png"/>
+          <p:cNvPr id="6" name="삽화:장치자리.svg" descr="illust_5503550975636153996_1791770880.png"/>
           <p:cNvPicPr>
             <a:picLocks noChangeAspect="1"/>
           </p:cNvPicPr>
@@ -29735,7 +29735,7 @@
       </p:sp>
       <p:pic>
         <p:nvPicPr>
-          <p:cNvPr id="6" name="삽화:요소_복습.svg" descr="illust_2936756098066877527_1791743711.png"/>
+          <p:cNvPr id="6" name="삽화:요소_복습.svg" descr="illust_6669910783780166749_1791772944.png"/>
           <p:cNvPicPr>
             <a:picLocks noChangeAspect="1"/>
           </p:cNvPicPr>
@@ -30561,7 +30561,7 @@
       </p:sp>
       <p:pic>
         <p:nvPicPr>
-          <p:cNvPr id="6" name="삽화:다섯자리.svg" descr="illust_1085505173167016964_1791743711.png"/>
+          <p:cNvPr id="6" name="삽화:다섯자리.svg" descr="illust_2396511633058597893_1791772944.png"/>
           <p:cNvPicPr>
             <a:picLocks noChangeAspect="1"/>
           </p:cNvPicPr>
@@ -31156,7 +31156,7 @@
       </p:sp>
       <p:pic>
         <p:nvPicPr>
-          <p:cNvPr id="6" name="삽화:주고받는것.svg" descr="illust_8686692510619145217_1791743711.png"/>
+          <p:cNvPr id="6" name="삽화:주고받는것.svg" descr="illust_792343401901960521_1791772944.png"/>
           <p:cNvPicPr>
             <a:picLocks noChangeAspect="1"/>
           </p:cNvPicPr>
@@ -34996,7 +34996,7 @@
       </p:sp>
       <p:pic>
         <p:nvPicPr>
-          <p:cNvPr id="6" name="삽화:시스템실행.svg" descr="illust_3900145109908996040_1791770778.png"/>
+          <p:cNvPr id="6" name="삽화:시스템실행.svg" descr="illust_8865255667507569099_1791770778.png"/>
           <p:cNvPicPr>
             <a:picLocks noChangeAspect="1"/>
           </p:cNvPicPr>
@@ -35549,7 +35549,7 @@
       </p:sp>
       <p:pic>
         <p:nvPicPr>
-          <p:cNvPr id="6" name="삽화:세종료.svg" descr="illust_7773051831209134899_1791743711.png"/>
+          <p:cNvPr id="6" name="삽화:세종료.svg" descr="illust_6724290866089676280_1791772944.png"/>
           <p:cNvPicPr>
             <a:picLocks noChangeAspect="1"/>
           </p:cNvPicPr>
@@ -40453,7 +40453,7 @@
                 <a:ea typeface="맑은 고딕"/>
                 <a:cs typeface="맑은 고딕"/>
               </a:rPr>
-              <a:t>배운 내용을 바탕으로 정답을 맞춰보세요.</a:t>
+              <a:t>배운 내용을 바탕으로 정답을 맞혀 보세요.</a:t>
             </a:r>
           </a:p>
         </p:txBody>
@@ -40632,7 +40632,7 @@
       </p:sp>
       <p:pic>
         <p:nvPicPr>
-          <p:cNvPr id="6" name="삽화:세시작.svg" descr="illust_7507125924456950772_1791743711.png"/>
+          <p:cNvPr id="6" name="삽화:세시작.svg" descr="illust_6914813584899572363_1791772944.png"/>
           <p:cNvPicPr>
             <a:picLocks noChangeAspect="1"/>
           </p:cNvPicPr>
@@ -46794,7 +46794,7 @@
       </p:sp>
       <p:pic>
         <p:nvPicPr>
-          <p:cNvPr id="6" name="삽화:운전시간.svg" descr="illust_7859101098763153838_1791743711.png"/>
+          <p:cNvPr id="6" name="삽화:운전시간.svg" descr="illust_6594850039201187302_1791772944.png"/>
           <p:cNvPicPr>
             <a:picLocks noChangeAspect="1"/>
           </p:cNvPicPr>

--- a/docs/교재/통합반_오프라인/10회차/통합반_오프라인_10회차.pptx
+++ b/docs/교재/통합반_오프라인/10회차/통합반_오프라인_10회차.pptx
@@ -834,7 +834,7 @@
           <a:lstStyle/>
           <a:p>
             <a:r>
-              <a:t>승인 블록을 다시 써서 그린 정기 점검 프로세스입니다. 하늘색 요소는 긴급 대응 프로세스의 승인 블록과 같고, 승인 역할만 설비보전팀장으로 바뀌었습니다. 새로 그린 것은 흰 요소 넷입니다. 정기 점검 요청이라는 시작 이벤트, 에이전트의 정비 계획 제안, 그리고 승인 뒤의 정비 오더 등록 · 공지 메일과 결과 보고입니다. 작업은 여섯, 게이트웨이는 하나, 끝 이벤트는 셋입니다.</a:t>
+              <a:t>정기 점검 프로세스의 전체 그림입니다. 하늘색 요소는 긴급 대응 프로세스의 승인 블록과 같고, 승인 역할만 설비보전팀장으로 바뀌었습니다. 이 프로세스에서 달라진 것은 흰 요소 넷입니다. 정기 점검 요청이라는 시작 이벤트, 에이전트의 정비 계획 제안, 그리고 승인 뒤의 정비 오더 등록 · 공지 메일과 결과 보고입니다. 작업은 여섯, 게이트웨이는 하나, 끝 이벤트는 셋입니다.</a:t>
             </a:r>
           </a:p>
         </p:txBody>
@@ -904,7 +904,7 @@
           <a:lstStyle/>
           <a:p>
             <a:r>
-              <a:t>재고 보충 프로세스도 같은 방법으로 그립니다. 하늘색 승인 블록은 그대로이고 승인 역할이 구매 담당입니다. 승인 뒤에는 ERP 발주 · 공급사 메일, 입고 · 재고 반영, 결과 보고의 세 작업이 이어집니다. 정기 점검보다 시스템 작업이 하나 많아 작업은 일곱입니다. 두 그림을 견주면 승인 블록의 오른쪽에 무엇을 잇느냐만 다릅니다.</a:t>
+              <a:t>재고 보충 프로세스도 같은 구조입니다. 하늘색 승인 블록은 그대로이고 승인 역할이 구매 담당입니다. 승인 뒤에는 ERP 발주 · 공급사 메일, 입고 · 재고 반영, 결과 보고의 세 작업이 이어집니다. 정기 점검보다 시스템 작업이 하나 많아 작업은 일곱입니다. 두 그림을 견주면 승인 블록의 오른쪽에 이어지는 작업만 다릅니다.</a:t>
             </a:r>
           </a:p>
         </p:txBody>
@@ -7196,7 +7196,7 @@
       </p:sp>
       <p:pic>
         <p:nvPicPr>
-          <p:cNvPr id="6" name="삽화:재고.svg" descr="illust_35959757509394394_1791772944.png"/>
+          <p:cNvPr id="6" name="삽화:재고.svg" descr="illust_4914467372103017890_1791772944.png"/>
           <p:cNvPicPr>
             <a:picLocks noChangeAspect="1"/>
           </p:cNvPicPr>
@@ -10004,7 +10004,7 @@
       </p:sp>
       <p:pic>
         <p:nvPicPr>
-          <p:cNvPr id="6" name="삽화:세흐름_나란히.svg" descr="illust_948115050597481794_1791772944.png"/>
+          <p:cNvPr id="6" name="삽화:세흐름_나란히.svg" descr="illust_8917249836331567889_1791772944.png"/>
           <p:cNvPicPr>
             <a:picLocks noChangeAspect="1"/>
           </p:cNvPicPr>
@@ -11490,7 +11490,7 @@
       </p:sp>
       <p:pic>
         <p:nvPicPr>
-          <p:cNvPr id="6" name="삽화:승인블록_자리.svg" descr="illust_4133486982481253994_1791772944.png"/>
+          <p:cNvPr id="6" name="삽화:승인블록_자리.svg" descr="illust_578551386212140832_1791772944.png"/>
           <p:cNvPicPr>
             <a:picLocks noChangeAspect="1"/>
           </p:cNvPicPr>
@@ -12346,7 +12346,7 @@
                 <a:ea typeface="맑은 고딕"/>
                 <a:cs typeface="맑은 고딕"/>
               </a:rPr>
-              <a:t>정기 점검 프로세스는 승인 블록을 그대로 쓰고, 시작 이벤트와 제안 작업과 승인 뒤의 작업 둘만 새로 그린 것이다.</a:t>
+              <a:t>정기 점검 프로세스는 승인 블록이 긴급 대응과 같고, 시작 이벤트와 제안 작업과 승인 뒤의 작업 둘만 다르다.</a:t>
             </a:r>
           </a:p>
         </p:txBody>
@@ -12421,7 +12421,7 @@
       </p:sp>
       <p:pic>
         <p:nvPicPr>
-          <p:cNvPr id="6" name="삽화:흐름_정기점검.svg" descr="illust_7149280400560905535_1791772944.png"/>
+          <p:cNvPr id="6" name="삽화:흐름_정기점검.svg" descr="illust_904196186821671188_1791772944.png"/>
           <p:cNvPicPr>
             <a:picLocks noChangeAspect="1"/>
           </p:cNvPicPr>
@@ -13110,7 +13110,7 @@
                 <a:ea typeface="맑은 고딕"/>
                 <a:cs typeface="맑은 고딕"/>
               </a:rPr>
-              <a:t>새로 그린 것</a:t>
+              <a:t>이 프로세스에서 달라진 요소</a:t>
             </a:r>
           </a:p>
           <a:p>
@@ -13235,7 +13235,7 @@
                 <a:ea typeface="맑은 고딕"/>
                 <a:cs typeface="맑은 고딕"/>
               </a:rPr>
-              <a:t>재고 보충 프로세스도 같은 승인 블록 뒤에 발주, 입고와 재고 반영, 결과 보고의 세 작업을 이어 작업 일곱으로 완성된다.</a:t>
+              <a:t>재고 보충 프로세스도 승인 블록은 같고, 그 뒤에 발주, 입고와 재고 반영, 결과 보고의 세 작업이 이어져 작업이 일곱이다.</a:t>
             </a:r>
           </a:p>
         </p:txBody>
@@ -13310,7 +13310,7 @@
       </p:sp>
       <p:pic>
         <p:nvPicPr>
-          <p:cNvPr id="6" name="삽화:흐름_재고보충.svg" descr="illust_8615721108996379366_1791772944.png"/>
+          <p:cNvPr id="6" name="삽화:흐름_재고보충.svg" descr="illust_904208386596252907_1791772944.png"/>
           <p:cNvPicPr>
             <a:picLocks noChangeAspect="1"/>
           </p:cNvPicPr>
@@ -22770,7 +22770,7 @@
       </p:sp>
       <p:pic>
         <p:nvPicPr>
-          <p:cNvPr id="6" name="삽화:세층연결.svg" descr="illust_2379440920557667633_1791772944.png"/>
+          <p:cNvPr id="6" name="삽화:세층연결.svg" descr="illust_1340409373328579367_1791772944.png"/>
           <p:cNvPicPr>
             <a:picLocks noChangeAspect="1"/>
           </p:cNvPicPr>
@@ -27254,7 +27254,7 @@
       </p:sp>
       <p:pic>
         <p:nvPicPr>
-          <p:cNvPr id="6" name="삽화:장치자리.svg" descr="illust_5503550975636153996_1791770880.png"/>
+          <p:cNvPr id="6" name="삽화:장치자리.svg" descr="illust_4770285912081924103_1791770880.png"/>
           <p:cNvPicPr>
             <a:picLocks noChangeAspect="1"/>
           </p:cNvPicPr>
@@ -29735,7 +29735,7 @@
       </p:sp>
       <p:pic>
         <p:nvPicPr>
-          <p:cNvPr id="6" name="삽화:요소_복습.svg" descr="illust_6669910783780166749_1791772944.png"/>
+          <p:cNvPr id="6" name="삽화:요소_복습.svg" descr="illust_613768269351234201_1791772944.png"/>
           <p:cNvPicPr>
             <a:picLocks noChangeAspect="1"/>
           </p:cNvPicPr>
@@ -30561,7 +30561,7 @@
       </p:sp>
       <p:pic>
         <p:nvPicPr>
-          <p:cNvPr id="6" name="삽화:다섯자리.svg" descr="illust_2396511633058597893_1791772944.png"/>
+          <p:cNvPr id="6" name="삽화:다섯자리.svg" descr="illust_4714317073839627341_1791772944.png"/>
           <p:cNvPicPr>
             <a:picLocks noChangeAspect="1"/>
           </p:cNvPicPr>
@@ -31156,7 +31156,7 @@
       </p:sp>
       <p:pic>
         <p:nvPicPr>
-          <p:cNvPr id="6" name="삽화:주고받는것.svg" descr="illust_792343401901960521_1791772944.png"/>
+          <p:cNvPr id="6" name="삽화:주고받는것.svg" descr="illust_7736659519982392018_1791772944.png"/>
           <p:cNvPicPr>
             <a:picLocks noChangeAspect="1"/>
           </p:cNvPicPr>
@@ -34996,7 +34996,7 @@
       </p:sp>
       <p:pic>
         <p:nvPicPr>
-          <p:cNvPr id="6" name="삽화:시스템실행.svg" descr="illust_8865255667507569099_1791770778.png"/>
+          <p:cNvPr id="6" name="삽화:시스템실행.svg" descr="illust_280132012034163988_1791770778.png"/>
           <p:cNvPicPr>
             <a:picLocks noChangeAspect="1"/>
           </p:cNvPicPr>
@@ -35549,7 +35549,7 @@
       </p:sp>
       <p:pic>
         <p:nvPicPr>
-          <p:cNvPr id="6" name="삽화:세종료.svg" descr="illust_6724290866089676280_1791772944.png"/>
+          <p:cNvPr id="6" name="삽화:세종료.svg" descr="illust_225544453425280548_1791772944.png"/>
           <p:cNvPicPr>
             <a:picLocks noChangeAspect="1"/>
           </p:cNvPicPr>
@@ -40632,7 +40632,7 @@
       </p:sp>
       <p:pic>
         <p:nvPicPr>
-          <p:cNvPr id="6" name="삽화:세시작.svg" descr="illust_6914813584899572363_1791772944.png"/>
+          <p:cNvPr id="6" name="삽화:세시작.svg" descr="illust_7697198541693775397_1791772944.png"/>
           <p:cNvPicPr>
             <a:picLocks noChangeAspect="1"/>
           </p:cNvPicPr>
@@ -46794,7 +46794,7 @@
       </p:sp>
       <p:pic>
         <p:nvPicPr>
-          <p:cNvPr id="6" name="삽화:운전시간.svg" descr="illust_6594850039201187302_1791772944.png"/>
+          <p:cNvPr id="6" name="삽화:운전시간.svg" descr="illust_410138020274897418_1791772944.png"/>
           <p:cNvPicPr>
             <a:picLocks noChangeAspect="1"/>
           </p:cNvPicPr>
